--- a/透明物体/汇报/透明物体多层深度_简洁汇报_2026-08-08.pptx
+++ b/透明物体/汇报/透明物体多层深度_简洁汇报_2026-08-08.pptx
@@ -8426,7 +8426,7 @@
                 </a:solidFill>
                 <a:latin typeface="Microsoft YaHei"/>
               </a:rPr>
-              <a:t>目前复现进度：哪些是论文协议，哪些是我们的诊断</a:t>
+              <a:t>复现进度：已经证明什么，还缺什么</a:t>
             </a:r>
           </a:p>
         </p:txBody>
@@ -8474,8 +8474,8 @@
         </p:nvSpPr>
         <p:spPr>
           <a:xfrm>
-            <a:off x="603504" y="1152144"/>
-            <a:ext cx="2834640" cy="219456"/>
+            <a:off x="603504" y="1161288"/>
+            <a:ext cx="2103120" cy="219456"/>
           </a:xfrm>
           <a:prstGeom prst="rect">
             <a:avLst/>
@@ -8496,7 +8496,7 @@
                 </a:solidFill>
                 <a:latin typeface="Microsoft YaHei"/>
               </a:rPr>
-              <a:t>官方协议 / benchmark</a:t>
+              <a:t>已完成的证据</a:t>
             </a:r>
           </a:p>
         </p:txBody>
@@ -8509,8 +8509,8 @@
         </p:nvSpPr>
         <p:spPr>
           <a:xfrm>
-            <a:off x="2962656" y="1106424"/>
-            <a:ext cx="1060704" cy="292608"/>
+            <a:off x="5806440" y="1115568"/>
+            <a:ext cx="1115568" cy="292608"/>
           </a:xfrm>
           <a:prstGeom prst="roundRect">
             <a:avLst/>
@@ -8554,8 +8554,8 @@
         </p:nvSpPr>
         <p:spPr>
           <a:xfrm>
-            <a:off x="2962656" y="1175004"/>
-            <a:ext cx="1060704" cy="118872"/>
+            <a:off x="5806440" y="1184148"/>
+            <a:ext cx="1115568" cy="118872"/>
           </a:xfrm>
           <a:prstGeom prst="rect">
             <a:avLst/>
@@ -8576,7 +8576,7 @@
                 </a:solidFill>
                 <a:latin typeface="Microsoft YaHei"/>
               </a:rPr>
-              <a:t>可直接引用</a:t>
+              <a:t>结果可信</a:t>
             </a:r>
           </a:p>
         </p:txBody>
@@ -8589,8 +8589,8 @@
         </p:nvSpPr>
         <p:spPr>
           <a:xfrm>
-            <a:off x="603504" y="1636776"/>
-            <a:ext cx="5385816" cy="1005840"/>
+            <a:off x="603504" y="1600200"/>
+            <a:ext cx="6528816" cy="987552"/>
           </a:xfrm>
           <a:prstGeom prst="roundRect">
             <a:avLst/>
@@ -8628,14 +8628,59 @@
       </p:sp>
       <p:sp>
         <p:nvSpPr>
-          <p:cNvPr id="9" name="TextBox 8"/>
-          <p:cNvSpPr txBox="1"/>
-          <p:nvPr/>
-        </p:nvSpPr>
-        <p:spPr>
-          <a:xfrm>
-            <a:off x="841248" y="1801368"/>
-            <a:ext cx="2212848" cy="182880"/>
+          <p:cNvPr id="9" name="Rectangle 8"/>
+          <p:cNvSpPr/>
+          <p:nvPr/>
+        </p:nvSpPr>
+        <p:spPr>
+          <a:xfrm>
+            <a:off x="603504" y="1600200"/>
+            <a:ext cx="64008" cy="987552"/>
+          </a:xfrm>
+          <a:prstGeom prst="rect">
+            <a:avLst/>
+          </a:prstGeom>
+          <a:solidFill>
+            <a:srgbClr val="15805D"/>
+          </a:solidFill>
+          <a:ln w="10160">
+            <a:solidFill>
+              <a:srgbClr val="15805D"/>
+            </a:solidFill>
+          </a:ln>
+        </p:spPr>
+        <p:style>
+          <a:lnRef idx="1">
+            <a:schemeClr val="accent1"/>
+          </a:lnRef>
+          <a:fillRef idx="3">
+            <a:schemeClr val="accent1"/>
+          </a:fillRef>
+          <a:effectRef idx="2">
+            <a:schemeClr val="accent1"/>
+          </a:effectRef>
+          <a:fontRef idx="minor">
+            <a:schemeClr val="lt1"/>
+          </a:fontRef>
+        </p:style>
+        <p:txBody>
+          <a:bodyPr rtlCol="0" anchor="ctr"/>
+          <a:lstStyle/>
+          <a:p>
+            <a:pPr algn="ctr"/>
+          </a:p>
+        </p:txBody>
+      </p:sp>
+      <p:sp>
+        <p:nvSpPr>
+          <p:cNvPr id="10" name="TextBox 9"/>
+          <p:cNvSpPr txBox="1"/>
+          <p:nvPr/>
+        </p:nvSpPr>
+        <p:spPr>
+          <a:xfrm>
+            <a:off x="841248" y="1755648"/>
+            <a:ext cx="1901952" cy="192024"/>
           </a:xfrm>
           <a:prstGeom prst="rect">
             <a:avLst/>
@@ -8656,21 +8701,21 @@
                 </a:solidFill>
                 <a:latin typeface="Microsoft YaHei"/>
               </a:rPr>
-              <a:t>Depth4ToM Base path</a:t>
-            </a:r>
-          </a:p>
-        </p:txBody>
-      </p:sp>
-      <p:sp>
-        <p:nvSpPr>
-          <p:cNvPr id="10" name="TextBox 9"/>
-          <p:cNvSpPr txBox="1"/>
-          <p:nvPr/>
-        </p:nvSpPr>
-        <p:spPr>
-          <a:xfrm>
-            <a:off x="841248" y="2148840"/>
-            <a:ext cx="2212848" cy="164592"/>
+              <a:t>单层深度基线</a:t>
+            </a:r>
+          </a:p>
+        </p:txBody>
+      </p:sp>
+      <p:sp>
+        <p:nvSpPr>
+          <p:cNvPr id="11" name="TextBox 10"/>
+          <p:cNvSpPr txBox="1"/>
+          <p:nvPr/>
+        </p:nvSpPr>
+        <p:spPr>
+          <a:xfrm>
+            <a:off x="841248" y="2112264"/>
+            <a:ext cx="1901952" cy="164592"/>
           </a:xfrm>
           <a:prstGeom prst="rect">
             <a:avLst/>
@@ -8691,21 +8736,21 @@
                 </a:solidFill>
                 <a:latin typeface="Microsoft YaHei"/>
               </a:rPr>
-              <a:t>Booster 228</a:t>
-            </a:r>
-          </a:p>
-        </p:txBody>
-      </p:sp>
-      <p:sp>
-        <p:nvSpPr>
-          <p:cNvPr id="11" name="TextBox 10"/>
-          <p:cNvSpPr txBox="1"/>
-          <p:nvPr/>
-        </p:nvSpPr>
-        <p:spPr>
-          <a:xfrm>
-            <a:off x="3054096" y="1801368"/>
-            <a:ext cx="2496312" cy="201168"/>
+              <a:t>Booster · 228 张</a:t>
+            </a:r>
+          </a:p>
+        </p:txBody>
+      </p:sp>
+      <p:sp>
+        <p:nvSpPr>
+          <p:cNvPr id="12" name="TextBox 11"/>
+          <p:cNvSpPr txBox="1"/>
+          <p:nvPr/>
+        </p:nvSpPr>
+        <p:spPr>
+          <a:xfrm>
+            <a:off x="2788920" y="1746504"/>
+            <a:ext cx="3931920" cy="210312"/>
           </a:xfrm>
           <a:prstGeom prst="rect">
             <a:avLst/>
@@ -8720,27 +8765,27 @@
           <a:p>
             <a:pPr algn="r"/>
             <a:r>
-              <a:rPr sz="1160" b="1">
-                <a:solidFill>
-                  <a:srgbClr val="0F766E"/>
-                </a:solidFill>
-                <a:latin typeface="Microsoft YaHei"/>
-              </a:rPr>
-              <a:t>DPT ToM RMSE 136.28 mm</a:t>
-            </a:r>
-          </a:p>
-        </p:txBody>
-      </p:sp>
-      <p:sp>
-        <p:nvSpPr>
-          <p:cNvPr id="12" name="TextBox 11"/>
-          <p:cNvSpPr txBox="1"/>
-          <p:nvPr/>
-        </p:nvSpPr>
-        <p:spPr>
-          <a:xfrm>
-            <a:off x="3054096" y="2167128"/>
-            <a:ext cx="2496312" cy="164592"/>
+              <a:rPr sz="1110" b="1">
+                <a:solidFill>
+                  <a:srgbClr val="15805D"/>
+                </a:solidFill>
+                <a:latin typeface="Microsoft YaHei"/>
+              </a:rPr>
+              <a:t>均方根误差 136.28 mm（约 13.6 cm）</a:t>
+            </a:r>
+          </a:p>
+        </p:txBody>
+      </p:sp>
+      <p:sp>
+        <p:nvSpPr>
+          <p:cNvPr id="13" name="TextBox 12"/>
+          <p:cNvSpPr txBox="1"/>
+          <p:nvPr/>
+        </p:nvSpPr>
+        <p:spPr>
+          <a:xfrm>
+            <a:off x="2788920" y="2121408"/>
+            <a:ext cx="3931920" cy="164592"/>
           </a:xfrm>
           <a:prstGeom prst="rect">
             <a:avLst/>
@@ -8755,27 +8800,27 @@
           <a:p>
             <a:pPr algn="r"/>
             <a:r>
-              <a:rPr sz="919" b="1">
-                <a:solidFill>
-                  <a:srgbClr val="15805D"/>
-                </a:solidFill>
-                <a:latin typeface="Microsoft YaHei"/>
-              </a:rPr>
-              <a:t>与论文一致</a:t>
-            </a:r>
-          </a:p>
-        </p:txBody>
-      </p:sp>
-      <p:sp>
-        <p:nvSpPr>
-          <p:cNvPr id="13" name="Rounded Rectangle 12"/>
+              <a:rPr sz="890" b="0">
+                <a:solidFill>
+                  <a:srgbClr val="667381"/>
+                </a:solidFill>
+                <a:latin typeface="Microsoft YaHei"/>
+              </a:rPr>
+              <a:t>与论文表格一致</a:t>
+            </a:r>
+          </a:p>
+        </p:txBody>
+      </p:sp>
+      <p:sp>
+        <p:nvSpPr>
+          <p:cNvPr id="14" name="Rounded Rectangle 13"/>
           <p:cNvSpPr/>
           <p:nvPr/>
         </p:nvSpPr>
         <p:spPr>
           <a:xfrm>
-            <a:off x="603504" y="2889504"/>
-            <a:ext cx="5385816" cy="1005840"/>
+            <a:off x="603504" y="2724912"/>
+            <a:ext cx="6528816" cy="987552"/>
           </a:xfrm>
           <a:prstGeom prst="roundRect">
             <a:avLst/>
@@ -8813,14 +8858,59 @@
       </p:sp>
       <p:sp>
         <p:nvSpPr>
-          <p:cNvPr id="14" name="TextBox 13"/>
-          <p:cNvSpPr txBox="1"/>
-          <p:nvPr/>
-        </p:nvSpPr>
-        <p:spPr>
-          <a:xfrm>
-            <a:off x="841248" y="3054096"/>
-            <a:ext cx="2212848" cy="182880"/>
+          <p:cNvPr id="15" name="Rectangle 14"/>
+          <p:cNvSpPr/>
+          <p:nvPr/>
+        </p:nvSpPr>
+        <p:spPr>
+          <a:xfrm>
+            <a:off x="603504" y="2724912"/>
+            <a:ext cx="64008" cy="987552"/>
+          </a:xfrm>
+          <a:prstGeom prst="rect">
+            <a:avLst/>
+          </a:prstGeom>
+          <a:solidFill>
+            <a:srgbClr val="0F766E"/>
+          </a:solidFill>
+          <a:ln w="10160">
+            <a:solidFill>
+              <a:srgbClr val="0F766E"/>
+            </a:solidFill>
+          </a:ln>
+        </p:spPr>
+        <p:style>
+          <a:lnRef idx="1">
+            <a:schemeClr val="accent1"/>
+          </a:lnRef>
+          <a:fillRef idx="3">
+            <a:schemeClr val="accent1"/>
+          </a:fillRef>
+          <a:effectRef idx="2">
+            <a:schemeClr val="accent1"/>
+          </a:effectRef>
+          <a:fontRef idx="minor">
+            <a:schemeClr val="lt1"/>
+          </a:fontRef>
+        </p:style>
+        <p:txBody>
+          <a:bodyPr rtlCol="0" anchor="ctr"/>
+          <a:lstStyle/>
+          <a:p>
+            <a:pPr algn="ctr"/>
+          </a:p>
+        </p:txBody>
+      </p:sp>
+      <p:sp>
+        <p:nvSpPr>
+          <p:cNvPr id="16" name="TextBox 15"/>
+          <p:cNvSpPr txBox="1"/>
+          <p:nvPr/>
+        </p:nvSpPr>
+        <p:spPr>
+          <a:xfrm>
+            <a:off x="841248" y="2880360"/>
+            <a:ext cx="1901952" cy="192024"/>
           </a:xfrm>
           <a:prstGeom prst="rect">
             <a:avLst/>
@@ -8841,21 +8931,21 @@
                 </a:solidFill>
                 <a:latin typeface="Microsoft YaHei"/>
               </a:rPr>
-              <a:t>DPT Base vs SeeGroup</a:t>
-            </a:r>
-          </a:p>
-        </p:txBody>
-      </p:sp>
-      <p:sp>
-        <p:nvSpPr>
-          <p:cNvPr id="15" name="TextBox 14"/>
-          <p:cNvSpPr txBox="1"/>
-          <p:nvPr/>
-        </p:nvSpPr>
-        <p:spPr>
-          <a:xfrm>
-            <a:off x="841248" y="3401568"/>
-            <a:ext cx="2212848" cy="164592"/>
+              <a:t>多层深度对比</a:t>
+            </a:r>
+          </a:p>
+        </p:txBody>
+      </p:sp>
+      <p:sp>
+        <p:nvSpPr>
+          <p:cNvPr id="17" name="TextBox 16"/>
+          <p:cNvSpPr txBox="1"/>
+          <p:nvPr/>
+        </p:nvSpPr>
+        <p:spPr>
+          <a:xfrm>
+            <a:off x="841248" y="3236976"/>
+            <a:ext cx="1901952" cy="164592"/>
           </a:xfrm>
           <a:prstGeom prst="rect">
             <a:avLst/>
@@ -8876,21 +8966,21 @@
                 </a:solidFill>
                 <a:latin typeface="Microsoft YaHei"/>
               </a:rPr>
-              <a:t>LayeredDepth val 300</a:t>
-            </a:r>
-          </a:p>
-        </p:txBody>
-      </p:sp>
-      <p:sp>
-        <p:nvSpPr>
-          <p:cNvPr id="16" name="TextBox 15"/>
-          <p:cNvSpPr txBox="1"/>
-          <p:nvPr/>
-        </p:nvSpPr>
-        <p:spPr>
-          <a:xfrm>
-            <a:off x="3054096" y="3054096"/>
-            <a:ext cx="2496312" cy="201168"/>
+              <a:t>LayeredDepth · 300 张</a:t>
+            </a:r>
+          </a:p>
+        </p:txBody>
+      </p:sp>
+      <p:sp>
+        <p:nvSpPr>
+          <p:cNvPr id="18" name="TextBox 17"/>
+          <p:cNvSpPr txBox="1"/>
+          <p:nvPr/>
+        </p:nvSpPr>
+        <p:spPr>
+          <a:xfrm>
+            <a:off x="2788920" y="2871216"/>
+            <a:ext cx="3931920" cy="210312"/>
           </a:xfrm>
           <a:prstGeom prst="rect">
             <a:avLst/>
@@ -8905,27 +8995,27 @@
           <a:p>
             <a:pPr algn="r"/>
             <a:r>
-              <a:rPr sz="1160" b="1">
+              <a:rPr sz="1110" b="1">
                 <a:solidFill>
                   <a:srgbClr val="0F766E"/>
                 </a:solidFill>
                 <a:latin typeface="Microsoft YaHei"/>
               </a:rPr>
-              <a:t>layer_all 29.95% → 72.41%</a:t>
-            </a:r>
-          </a:p>
-        </p:txBody>
-      </p:sp>
-      <p:sp>
-        <p:nvSpPr>
-          <p:cNvPr id="17" name="TextBox 16"/>
-          <p:cNvSpPr txBox="1"/>
-          <p:nvPr/>
-        </p:nvSpPr>
-        <p:spPr>
-          <a:xfrm>
-            <a:off x="3054096" y="3419856"/>
-            <a:ext cx="2496312" cy="164592"/>
+              <a:t>4 个界面顺序全对：29.95% → 72.41%</a:t>
+            </a:r>
+          </a:p>
+        </p:txBody>
+      </p:sp>
+      <p:sp>
+        <p:nvSpPr>
+          <p:cNvPr id="19" name="TextBox 18"/>
+          <p:cNvSpPr txBox="1"/>
+          <p:nvPr/>
+        </p:nvSpPr>
+        <p:spPr>
+          <a:xfrm>
+            <a:off x="2788920" y="3246120"/>
+            <a:ext cx="3931920" cy="164592"/>
           </a:xfrm>
           <a:prstGeom prst="rect">
             <a:avLst/>
@@ -8940,27 +9030,117 @@
           <a:p>
             <a:pPr algn="r"/>
             <a:r>
-              <a:rPr sz="919" b="1">
-                <a:solidFill>
-                  <a:srgbClr val="15805D"/>
-                </a:solidFill>
-                <a:latin typeface="Microsoft YaHei"/>
-              </a:rPr>
-              <a:t>+42.46 pp</a:t>
-            </a:r>
-          </a:p>
-        </p:txBody>
-      </p:sp>
-      <p:sp>
-        <p:nvSpPr>
-          <p:cNvPr id="18" name="TextBox 17"/>
-          <p:cNvSpPr txBox="1"/>
-          <p:nvPr/>
-        </p:nvSpPr>
-        <p:spPr>
-          <a:xfrm>
-            <a:off x="6272784" y="1152144"/>
-            <a:ext cx="2834640" cy="219456"/>
+              <a:rPr sz="890" b="0">
+                <a:solidFill>
+                  <a:srgbClr val="667381"/>
+                </a:solidFill>
+                <a:latin typeface="Microsoft YaHei"/>
+              </a:rPr>
+              <a:t>多层模型明显更完整</a:t>
+            </a:r>
+          </a:p>
+        </p:txBody>
+      </p:sp>
+      <p:sp>
+        <p:nvSpPr>
+          <p:cNvPr id="20" name="Rounded Rectangle 19"/>
+          <p:cNvSpPr/>
+          <p:nvPr/>
+        </p:nvSpPr>
+        <p:spPr>
+          <a:xfrm>
+            <a:off x="603504" y="3849624"/>
+            <a:ext cx="6528816" cy="987552"/>
+          </a:xfrm>
+          <a:prstGeom prst="roundRect">
+            <a:avLst/>
+          </a:prstGeom>
+          <a:solidFill>
+            <a:srgbClr val="FFFFFF"/>
+          </a:solidFill>
+          <a:ln w="10160">
+            <a:solidFill>
+              <a:srgbClr val="DDE3E8"/>
+            </a:solidFill>
+          </a:ln>
+        </p:spPr>
+        <p:style>
+          <a:lnRef idx="1">
+            <a:schemeClr val="accent1"/>
+          </a:lnRef>
+          <a:fillRef idx="3">
+            <a:schemeClr val="accent1"/>
+          </a:fillRef>
+          <a:effectRef idx="2">
+            <a:schemeClr val="accent1"/>
+          </a:effectRef>
+          <a:fontRef idx="minor">
+            <a:schemeClr val="lt1"/>
+          </a:fontRef>
+        </p:style>
+        <p:txBody>
+          <a:bodyPr rtlCol="0" anchor="ctr"/>
+          <a:lstStyle/>
+          <a:p>
+            <a:pPr algn="ctr"/>
+          </a:p>
+        </p:txBody>
+      </p:sp>
+      <p:sp>
+        <p:nvSpPr>
+          <p:cNvPr id="21" name="Rectangle 20"/>
+          <p:cNvSpPr/>
+          <p:nvPr/>
+        </p:nvSpPr>
+        <p:spPr>
+          <a:xfrm>
+            <a:off x="603504" y="3849624"/>
+            <a:ext cx="64008" cy="987552"/>
+          </a:xfrm>
+          <a:prstGeom prst="rect">
+            <a:avLst/>
+          </a:prstGeom>
+          <a:solidFill>
+            <a:srgbClr val="C46B16"/>
+          </a:solidFill>
+          <a:ln w="10160">
+            <a:solidFill>
+              <a:srgbClr val="C46B16"/>
+            </a:solidFill>
+          </a:ln>
+        </p:spPr>
+        <p:style>
+          <a:lnRef idx="1">
+            <a:schemeClr val="accent1"/>
+          </a:lnRef>
+          <a:fillRef idx="3">
+            <a:schemeClr val="accent1"/>
+          </a:fillRef>
+          <a:effectRef idx="2">
+            <a:schemeClr val="accent1"/>
+          </a:effectRef>
+          <a:fontRef idx="minor">
+            <a:schemeClr val="lt1"/>
+          </a:fontRef>
+        </p:style>
+        <p:txBody>
+          <a:bodyPr rtlCol="0" anchor="ctr"/>
+          <a:lstStyle/>
+          <a:p>
+            <a:pPr algn="ctr"/>
+          </a:p>
+        </p:txBody>
+      </p:sp>
+      <p:sp>
+        <p:nvSpPr>
+          <p:cNvPr id="22" name="TextBox 21"/>
+          <p:cNvSpPr txBox="1"/>
+          <p:nvPr/>
+        </p:nvSpPr>
+        <p:spPr>
+          <a:xfrm>
+            <a:off x="841248" y="4005072"/>
+            <a:ext cx="1901952" cy="192024"/>
           </a:xfrm>
           <a:prstGeom prst="rect">
             <a:avLst/>
@@ -8975,27 +9155,167 @@
           <a:p>
             <a:pPr algn="l"/>
             <a:r>
+              <a:rPr sz="1150" b="1">
+                <a:solidFill>
+                  <a:srgbClr val="172331"/>
+                </a:solidFill>
+                <a:latin typeface="Microsoft YaHei"/>
+              </a:rPr>
+              <a:t>薄壳几何检查</a:t>
+            </a:r>
+          </a:p>
+        </p:txBody>
+      </p:sp>
+      <p:sp>
+        <p:nvSpPr>
+          <p:cNvPr id="23" name="TextBox 22"/>
+          <p:cNvSpPr txBox="1"/>
+          <p:nvPr/>
+        </p:nvSpPr>
+        <p:spPr>
+          <a:xfrm>
+            <a:off x="841248" y="4361688"/>
+            <a:ext cx="1901952" cy="164592"/>
+          </a:xfrm>
+          <a:prstGeom prst="rect">
+            <a:avLst/>
+          </a:prstGeom>
+          <a:noFill/>
+        </p:spPr>
+        <p:txBody>
+          <a:bodyPr wrap="square" lIns="18288" rIns="18288" tIns="18288" bIns="18288" anchor="t">
+            <a:spAutoFit/>
+          </a:bodyPr>
+          <a:lstStyle/>
+          <a:p>
+            <a:pPr algn="l"/>
+            <a:r>
+              <a:rPr sz="900" b="0">
+                <a:solidFill>
+                  <a:srgbClr val="667381"/>
+                </a:solidFill>
+                <a:latin typeface="Microsoft YaHei"/>
+              </a:rPr>
+              <a:t>TablewareNet · 100 个场景</a:t>
+            </a:r>
+          </a:p>
+        </p:txBody>
+      </p:sp>
+      <p:sp>
+        <p:nvSpPr>
+          <p:cNvPr id="24" name="TextBox 23"/>
+          <p:cNvSpPr txBox="1"/>
+          <p:nvPr/>
+        </p:nvSpPr>
+        <p:spPr>
+          <a:xfrm>
+            <a:off x="2788920" y="3995928"/>
+            <a:ext cx="3931920" cy="210312"/>
+          </a:xfrm>
+          <a:prstGeom prst="rect">
+            <a:avLst/>
+          </a:prstGeom>
+          <a:noFill/>
+        </p:spPr>
+        <p:txBody>
+          <a:bodyPr wrap="square" lIns="18288" rIns="18288" tIns="18288" bIns="18288" anchor="t">
+            <a:spAutoFit/>
+          </a:bodyPr>
+          <a:lstStyle/>
+          <a:p>
+            <a:pPr algn="r"/>
+            <a:r>
+              <a:rPr sz="1110" b="1">
+                <a:solidFill>
+                  <a:srgbClr val="C46B16"/>
+                </a:solidFill>
+                <a:latin typeface="Microsoft YaHei"/>
+              </a:rPr>
+              <a:t>已知真实物体区域时，界面识别 F1 = 79.15%</a:t>
+            </a:r>
+          </a:p>
+        </p:txBody>
+      </p:sp>
+      <p:sp>
+        <p:nvSpPr>
+          <p:cNvPr id="25" name="TextBox 24"/>
+          <p:cNvSpPr txBox="1"/>
+          <p:nvPr/>
+        </p:nvSpPr>
+        <p:spPr>
+          <a:xfrm>
+            <a:off x="2788920" y="4370832"/>
+            <a:ext cx="3931920" cy="164592"/>
+          </a:xfrm>
+          <a:prstGeom prst="rect">
+            <a:avLst/>
+          </a:prstGeom>
+          <a:noFill/>
+        </p:spPr>
+        <p:txBody>
+          <a:bodyPr wrap="square" lIns="18288" rIns="18288" tIns="18288" bIns="18288" anchor="t">
+            <a:spAutoFit/>
+          </a:bodyPr>
+          <a:lstStyle/>
+          <a:p>
+            <a:pPr algn="r"/>
+            <a:r>
+              <a:rPr sz="890" b="0">
+                <a:solidFill>
+                  <a:srgbClr val="667381"/>
+                </a:solidFill>
+                <a:latin typeface="Microsoft YaHei"/>
+              </a:rPr>
+              <a:t>说明几何路线可行，不是论文正式分数</a:t>
+            </a:r>
+          </a:p>
+        </p:txBody>
+      </p:sp>
+      <p:sp>
+        <p:nvSpPr>
+          <p:cNvPr id="26" name="TextBox 25"/>
+          <p:cNvSpPr txBox="1"/>
+          <p:nvPr/>
+        </p:nvSpPr>
+        <p:spPr>
+          <a:xfrm>
+            <a:off x="7370064" y="1161288"/>
+            <a:ext cx="1920240" cy="219456"/>
+          </a:xfrm>
+          <a:prstGeom prst="rect">
+            <a:avLst/>
+          </a:prstGeom>
+          <a:noFill/>
+        </p:spPr>
+        <p:txBody>
+          <a:bodyPr wrap="square" lIns="18288" rIns="18288" tIns="18288" bIns="18288" anchor="t">
+            <a:spAutoFit/>
+          </a:bodyPr>
+          <a:lstStyle/>
+          <a:p>
+            <a:pPr algn="l"/>
+            <a:r>
               <a:rPr sz="1400" b="1">
                 <a:solidFill>
                   <a:srgbClr val="172331"/>
                 </a:solidFill>
                 <a:latin typeface="Microsoft YaHei"/>
               </a:rPr>
-              <a:t>我们的诊断 / oracle</a:t>
-            </a:r>
-          </a:p>
-        </p:txBody>
-      </p:sp>
-      <p:sp>
-        <p:nvSpPr>
-          <p:cNvPr id="19" name="Rounded Rectangle 18"/>
+              <a:t>仍未完成</a:t>
+            </a:r>
+          </a:p>
+        </p:txBody>
+      </p:sp>
+      <p:sp>
+        <p:nvSpPr>
+          <p:cNvPr id="27" name="Rounded Rectangle 26"/>
           <p:cNvSpPr/>
           <p:nvPr/>
         </p:nvSpPr>
         <p:spPr>
           <a:xfrm>
-            <a:off x="9838944" y="1106424"/>
-            <a:ext cx="1554480" cy="292608"/>
+            <a:off x="10305288" y="1115568"/>
+            <a:ext cx="1280160" cy="292608"/>
           </a:xfrm>
           <a:prstGeom prst="roundRect">
             <a:avLst/>
@@ -9033,14 +9353,14 @@
       </p:sp>
       <p:sp>
         <p:nvSpPr>
-          <p:cNvPr id="20" name="TextBox 19"/>
-          <p:cNvSpPr txBox="1"/>
-          <p:nvPr/>
-        </p:nvSpPr>
-        <p:spPr>
-          <a:xfrm>
-            <a:off x="9838944" y="1175004"/>
-            <a:ext cx="1554480" cy="118872"/>
+          <p:cNvPr id="28" name="TextBox 27"/>
+          <p:cNvSpPr txBox="1"/>
+          <p:nvPr/>
+        </p:nvSpPr>
+        <p:spPr>
+          <a:xfrm>
+            <a:off x="10305288" y="1184148"/>
+            <a:ext cx="1280160" cy="118872"/>
           </a:xfrm>
           <a:prstGeom prst="rect">
             <a:avLst/>
@@ -9061,21 +9381,21 @@
                 </a:solidFill>
                 <a:latin typeface="Microsoft YaHei"/>
               </a:rPr>
-              <a:t>不能冒充论文分数</a:t>
-            </a:r>
-          </a:p>
-        </p:txBody>
-      </p:sp>
-      <p:sp>
-        <p:nvSpPr>
-          <p:cNvPr id="21" name="Rounded Rectangle 20"/>
+              <a:t>暂不下结论</a:t>
+            </a:r>
+          </a:p>
+        </p:txBody>
+      </p:sp>
+      <p:sp>
+        <p:nvSpPr>
+          <p:cNvPr id="29" name="Rounded Rectangle 28"/>
           <p:cNvSpPr/>
           <p:nvPr/>
         </p:nvSpPr>
         <p:spPr>
           <a:xfrm>
-            <a:off x="6272784" y="1636776"/>
-            <a:ext cx="5312664" cy="1005840"/>
+            <a:off x="7370064" y="1600200"/>
+            <a:ext cx="4215384" cy="1554480"/>
           </a:xfrm>
           <a:prstGeom prst="roundRect">
             <a:avLst/>
@@ -9113,14 +9433,59 @@
       </p:sp>
       <p:sp>
         <p:nvSpPr>
-          <p:cNvPr id="22" name="TextBox 21"/>
-          <p:cNvSpPr txBox="1"/>
-          <p:nvPr/>
-        </p:nvSpPr>
-        <p:spPr>
-          <a:xfrm>
-            <a:off x="6510528" y="1801368"/>
-            <a:ext cx="2267712" cy="182880"/>
+          <p:cNvPr id="30" name="Rectangle 29"/>
+          <p:cNvSpPr/>
+          <p:nvPr/>
+        </p:nvSpPr>
+        <p:spPr>
+          <a:xfrm>
+            <a:off x="7370064" y="1600200"/>
+            <a:ext cx="64008" cy="1554480"/>
+          </a:xfrm>
+          <a:prstGeom prst="rect">
+            <a:avLst/>
+          </a:prstGeom>
+          <a:solidFill>
+            <a:srgbClr val="C46B16"/>
+          </a:solidFill>
+          <a:ln w="10160">
+            <a:solidFill>
+              <a:srgbClr val="C46B16"/>
+            </a:solidFill>
+          </a:ln>
+        </p:spPr>
+        <p:style>
+          <a:lnRef idx="1">
+            <a:schemeClr val="accent1"/>
+          </a:lnRef>
+          <a:fillRef idx="3">
+            <a:schemeClr val="accent1"/>
+          </a:fillRef>
+          <a:effectRef idx="2">
+            <a:schemeClr val="accent1"/>
+          </a:effectRef>
+          <a:fontRef idx="minor">
+            <a:schemeClr val="lt1"/>
+          </a:fontRef>
+        </p:style>
+        <p:txBody>
+          <a:bodyPr rtlCol="0" anchor="ctr"/>
+          <a:lstStyle/>
+          <a:p>
+            <a:pPr algn="ctr"/>
+          </a:p>
+        </p:txBody>
+      </p:sp>
+      <p:sp>
+        <p:nvSpPr>
+          <p:cNvPr id="31" name="TextBox 30"/>
+          <p:cNvSpPr txBox="1"/>
+          <p:nvPr/>
+        </p:nvSpPr>
+        <p:spPr>
+          <a:xfrm>
+            <a:off x="7626096" y="1792224"/>
+            <a:ext cx="3666744" cy="210312"/>
           </a:xfrm>
           <a:prstGeom prst="rect">
             <a:avLst/>
@@ -9135,27 +9500,27 @@
           <a:p>
             <a:pPr algn="l"/>
             <a:r>
-              <a:rPr sz="1150" b="1">
+              <a:rPr sz="1220" b="1">
                 <a:solidFill>
                   <a:srgbClr val="172331"/>
                 </a:solidFill>
                 <a:latin typeface="Microsoft YaHei"/>
               </a:rPr>
-              <a:t>T²SQNet + GT mask</a:t>
-            </a:r>
-          </a:p>
-        </p:txBody>
-      </p:sp>
-      <p:sp>
-        <p:nvSpPr>
-          <p:cNvPr id="23" name="TextBox 22"/>
-          <p:cNvSpPr txBox="1"/>
-          <p:nvPr/>
-        </p:nvSpPr>
-        <p:spPr>
-          <a:xfrm>
-            <a:off x="6510528" y="2148840"/>
-            <a:ext cx="2267712" cy="164592"/>
+              <a:t>TransCG 全量测试</a:t>
+            </a:r>
+          </a:p>
+        </p:txBody>
+      </p:sp>
+      <p:sp>
+        <p:nvSpPr>
+          <p:cNvPr id="32" name="TextBox 31"/>
+          <p:cNvSpPr txBox="1"/>
+          <p:nvPr/>
+        </p:nvSpPr>
+        <p:spPr>
+          <a:xfrm>
+            <a:off x="7626096" y="2148840"/>
+            <a:ext cx="3666744" cy="182880"/>
           </a:xfrm>
           <a:prstGeom prst="rect">
             <a:avLst/>
@@ -9170,40 +9535,40 @@
           <a:p>
             <a:pPr algn="l"/>
             <a:r>
-              <a:rPr sz="900" b="0">
+              <a:rPr sz="930" b="0">
                 <a:solidFill>
                   <a:srgbClr val="667381"/>
                 </a:solidFill>
                 <a:latin typeface="Microsoft YaHei"/>
               </a:rPr>
-              <a:t>TablewareNet 100 scenes</a:t>
-            </a:r>
-          </a:p>
-        </p:txBody>
-      </p:sp>
-      <p:sp>
-        <p:nvSpPr>
-          <p:cNvPr id="24" name="TextBox 23"/>
-          <p:cNvSpPr txBox="1"/>
-          <p:nvPr/>
-        </p:nvSpPr>
-        <p:spPr>
-          <a:xfrm>
-            <a:off x="8741664" y="1801368"/>
-            <a:ext cx="2404872" cy="201168"/>
-          </a:xfrm>
-          <a:prstGeom prst="rect">
-            <a:avLst/>
-          </a:prstGeom>
-          <a:noFill/>
-        </p:spPr>
-        <p:txBody>
-          <a:bodyPr wrap="square" lIns="18288" rIns="18288" tIns="18288" bIns="18288" anchor="t">
-            <a:spAutoFit/>
-          </a:bodyPr>
-          <a:lstStyle/>
-          <a:p>
-            <a:pPr algn="r"/>
+              <a:t>需要 52 个场景 / 23,524 个样本</a:t>
+            </a:r>
+          </a:p>
+        </p:txBody>
+      </p:sp>
+      <p:sp>
+        <p:nvSpPr>
+          <p:cNvPr id="33" name="TextBox 32"/>
+          <p:cNvSpPr txBox="1"/>
+          <p:nvPr/>
+        </p:nvSpPr>
+        <p:spPr>
+          <a:xfrm>
+            <a:off x="7626096" y="2496312"/>
+            <a:ext cx="3666744" cy="201168"/>
+          </a:xfrm>
+          <a:prstGeom prst="rect">
+            <a:avLst/>
+          </a:prstGeom>
+          <a:noFill/>
+        </p:spPr>
+        <p:txBody>
+          <a:bodyPr wrap="square" lIns="18288" rIns="18288" tIns="18288" bIns="18288" anchor="t">
+            <a:spAutoFit/>
+          </a:bodyPr>
+          <a:lstStyle/>
+          <a:p>
+            <a:pPr algn="l"/>
             <a:r>
               <a:rPr sz="1130" b="1">
                 <a:solidFill>
@@ -9211,56 +9576,56 @@
                 </a:solidFill>
                 <a:latin typeface="Microsoft YaHei"/>
               </a:rPr>
-              <a:t>Shell interface F1 79.15%</a:t>
-            </a:r>
-          </a:p>
-        </p:txBody>
-      </p:sp>
-      <p:sp>
-        <p:nvSpPr>
-          <p:cNvPr id="25" name="TextBox 24"/>
-          <p:cNvSpPr txBox="1"/>
-          <p:nvPr/>
-        </p:nvSpPr>
-        <p:spPr>
-          <a:xfrm>
-            <a:off x="8741664" y="2167128"/>
-            <a:ext cx="2404872" cy="164592"/>
-          </a:xfrm>
-          <a:prstGeom prst="rect">
-            <a:avLst/>
-          </a:prstGeom>
-          <a:noFill/>
-        </p:spPr>
-        <p:txBody>
-          <a:bodyPr wrap="square" lIns="18288" rIns="18288" tIns="18288" bIns="18288" anchor="t">
-            <a:spAutoFit/>
-          </a:bodyPr>
-          <a:lstStyle/>
-          <a:p>
-            <a:pPr algn="r"/>
-            <a:r>
-              <a:rPr sz="919" b="1">
-                <a:solidFill>
-                  <a:srgbClr val="C46B16"/>
-                </a:solidFill>
-                <a:latin typeface="Microsoft YaHei"/>
-              </a:rPr>
-              <a:t>受控几何 oracle</a:t>
-            </a:r>
-          </a:p>
-        </p:txBody>
-      </p:sp>
-      <p:sp>
-        <p:nvSpPr>
-          <p:cNvPr id="26" name="Rounded Rectangle 25"/>
+              <a:t>已取得 40 / 52 个场景</a:t>
+            </a:r>
+          </a:p>
+        </p:txBody>
+      </p:sp>
+      <p:sp>
+        <p:nvSpPr>
+          <p:cNvPr id="34" name="TextBox 33"/>
+          <p:cNvSpPr txBox="1"/>
+          <p:nvPr/>
+        </p:nvSpPr>
+        <p:spPr>
+          <a:xfrm>
+            <a:off x="7626096" y="2825496"/>
+            <a:ext cx="3666744" cy="164592"/>
+          </a:xfrm>
+          <a:prstGeom prst="rect">
+            <a:avLst/>
+          </a:prstGeom>
+          <a:noFill/>
+        </p:spPr>
+        <p:txBody>
+          <a:bodyPr wrap="square" lIns="18288" rIns="18288" tIns="18288" bIns="18288" anchor="t">
+            <a:spAutoFit/>
+          </a:bodyPr>
+          <a:lstStyle/>
+          <a:p>
+            <a:pPr algn="l"/>
+            <a:r>
+              <a:rPr sz="890" b="0">
+                <a:solidFill>
+                  <a:srgbClr val="667381"/>
+                </a:solidFill>
+                <a:latin typeface="Microsoft YaHei"/>
+              </a:rPr>
+              <a:t>缺少 12 个场景，暂不报最终指标</a:t>
+            </a:r>
+          </a:p>
+        </p:txBody>
+      </p:sp>
+      <p:sp>
+        <p:nvSpPr>
+          <p:cNvPr id="35" name="Rounded Rectangle 34"/>
           <p:cNvSpPr/>
           <p:nvPr/>
         </p:nvSpPr>
         <p:spPr>
           <a:xfrm>
-            <a:off x="6272784" y="2889504"/>
-            <a:ext cx="5312664" cy="1005840"/>
+            <a:off x="7370064" y="3346704"/>
+            <a:ext cx="4215384" cy="1554480"/>
           </a:xfrm>
           <a:prstGeom prst="roundRect">
             <a:avLst/>
@@ -9298,14 +9663,59 @@
       </p:sp>
       <p:sp>
         <p:nvSpPr>
-          <p:cNvPr id="27" name="TextBox 26"/>
-          <p:cNvSpPr txBox="1"/>
-          <p:nvPr/>
-        </p:nvSpPr>
-        <p:spPr>
-          <a:xfrm>
-            <a:off x="6510528" y="3054096"/>
-            <a:ext cx="2267712" cy="182880"/>
+          <p:cNvPr id="36" name="Rectangle 35"/>
+          <p:cNvSpPr/>
+          <p:nvPr/>
+        </p:nvSpPr>
+        <p:spPr>
+          <a:xfrm>
+            <a:off x="7370064" y="3346704"/>
+            <a:ext cx="64008" cy="1554480"/>
+          </a:xfrm>
+          <a:prstGeom prst="rect">
+            <a:avLst/>
+          </a:prstGeom>
+          <a:solidFill>
+            <a:srgbClr val="C46B16"/>
+          </a:solidFill>
+          <a:ln w="10160">
+            <a:solidFill>
+              <a:srgbClr val="C46B16"/>
+            </a:solidFill>
+          </a:ln>
+        </p:spPr>
+        <p:style>
+          <a:lnRef idx="1">
+            <a:schemeClr val="accent1"/>
+          </a:lnRef>
+          <a:fillRef idx="3">
+            <a:schemeClr val="accent1"/>
+          </a:fillRef>
+          <a:effectRef idx="2">
+            <a:schemeClr val="accent1"/>
+          </a:effectRef>
+          <a:fontRef idx="minor">
+            <a:schemeClr val="lt1"/>
+          </a:fontRef>
+        </p:style>
+        <p:txBody>
+          <a:bodyPr rtlCol="0" anchor="ctr"/>
+          <a:lstStyle/>
+          <a:p>
+            <a:pPr algn="ctr"/>
+          </a:p>
+        </p:txBody>
+      </p:sp>
+      <p:sp>
+        <p:nvSpPr>
+          <p:cNvPr id="37" name="TextBox 36"/>
+          <p:cNvSpPr txBox="1"/>
+          <p:nvPr/>
+        </p:nvSpPr>
+        <p:spPr>
+          <a:xfrm>
+            <a:off x="7626096" y="3538728"/>
+            <a:ext cx="3666744" cy="210312"/>
           </a:xfrm>
           <a:prstGeom prst="rect">
             <a:avLst/>
@@ -9320,27 +9730,27 @@
           <a:p>
             <a:pPr algn="l"/>
             <a:r>
-              <a:rPr sz="1150" b="1">
+              <a:rPr sz="1220" b="1">
                 <a:solidFill>
                   <a:srgbClr val="172331"/>
                 </a:solidFill>
                 <a:latin typeface="Microsoft YaHei"/>
               </a:rPr>
-              <a:t>TransCG full test</a:t>
-            </a:r>
-          </a:p>
-        </p:txBody>
-      </p:sp>
-      <p:sp>
-        <p:nvSpPr>
-          <p:cNvPr id="28" name="TextBox 27"/>
-          <p:cNvSpPr txBox="1"/>
-          <p:nvPr/>
-        </p:nvSpPr>
-        <p:spPr>
-          <a:xfrm>
-            <a:off x="6510528" y="3401568"/>
-            <a:ext cx="2267712" cy="164592"/>
+              <a:t>机器人抓取收益</a:t>
+            </a:r>
+          </a:p>
+        </p:txBody>
+      </p:sp>
+      <p:sp>
+        <p:nvSpPr>
+          <p:cNvPr id="38" name="TextBox 37"/>
+          <p:cNvSpPr txBox="1"/>
+          <p:nvPr/>
+        </p:nvSpPr>
+        <p:spPr>
+          <a:xfrm>
+            <a:off x="7626096" y="3895344"/>
+            <a:ext cx="3666744" cy="182880"/>
           </a:xfrm>
           <a:prstGeom prst="rect">
             <a:avLst/>
@@ -9355,40 +9765,40 @@
           <a:p>
             <a:pPr algn="l"/>
             <a:r>
-              <a:rPr sz="900" b="0">
+              <a:rPr sz="930" b="0">
                 <a:solidFill>
                   <a:srgbClr val="667381"/>
                 </a:solidFill>
                 <a:latin typeface="Microsoft YaHei"/>
               </a:rPr>
-              <a:t>52 scenes / 23,524 samples</a:t>
-            </a:r>
-          </a:p>
-        </p:txBody>
-      </p:sp>
-      <p:sp>
-        <p:nvSpPr>
-          <p:cNvPr id="29" name="TextBox 28"/>
-          <p:cNvSpPr txBox="1"/>
-          <p:nvPr/>
-        </p:nvSpPr>
-        <p:spPr>
-          <a:xfrm>
-            <a:off x="8741664" y="3054096"/>
-            <a:ext cx="2404872" cy="201168"/>
-          </a:xfrm>
-          <a:prstGeom prst="rect">
-            <a:avLst/>
-          </a:prstGeom>
-          <a:noFill/>
-        </p:spPr>
-        <p:txBody>
-          <a:bodyPr wrap="square" lIns="18288" rIns="18288" tIns="18288" bIns="18288" anchor="t">
-            <a:spAutoFit/>
-          </a:bodyPr>
-          <a:lstStyle/>
-          <a:p>
-            <a:pPr algn="r"/>
+              <a:t>还没有公平比较单层与多层输入</a:t>
+            </a:r>
+          </a:p>
+        </p:txBody>
+      </p:sp>
+      <p:sp>
+        <p:nvSpPr>
+          <p:cNvPr id="39" name="TextBox 38"/>
+          <p:cNvSpPr txBox="1"/>
+          <p:nvPr/>
+        </p:nvSpPr>
+        <p:spPr>
+          <a:xfrm>
+            <a:off x="7626096" y="4242816"/>
+            <a:ext cx="3666744" cy="201168"/>
+          </a:xfrm>
+          <a:prstGeom prst="rect">
+            <a:avLst/>
+          </a:prstGeom>
+          <a:noFill/>
+        </p:spPr>
+        <p:txBody>
+          <a:bodyPr wrap="square" lIns="18288" rIns="18288" tIns="18288" bIns="18288" anchor="t">
+            <a:spAutoFit/>
+          </a:bodyPr>
+          <a:lstStyle/>
+          <a:p>
+            <a:pPr algn="l"/>
             <a:r>
               <a:rPr sz="1130" b="1">
                 <a:solidFill>
@@ -9396,56 +9806,56 @@
                 </a:solidFill>
                 <a:latin typeface="Microsoft YaHei"/>
               </a:rPr>
-              <a:t>当前已取得 40 / 52 scenes</a:t>
-            </a:r>
-          </a:p>
-        </p:txBody>
-      </p:sp>
-      <p:sp>
-        <p:nvSpPr>
-          <p:cNvPr id="30" name="TextBox 29"/>
-          <p:cNvSpPr txBox="1"/>
-          <p:nvPr/>
-        </p:nvSpPr>
-        <p:spPr>
-          <a:xfrm>
-            <a:off x="8741664" y="3419856"/>
-            <a:ext cx="2404872" cy="164592"/>
-          </a:xfrm>
-          <a:prstGeom prst="rect">
-            <a:avLst/>
-          </a:prstGeom>
-          <a:noFill/>
-        </p:spPr>
-        <p:txBody>
-          <a:bodyPr wrap="square" lIns="18288" rIns="18288" tIns="18288" bIns="18288" anchor="t">
-            <a:spAutoFit/>
-          </a:bodyPr>
-          <a:lstStyle/>
-          <a:p>
-            <a:pPr algn="r"/>
-            <a:r>
-              <a:rPr sz="919" b="1">
-                <a:solidFill>
-                  <a:srgbClr val="C46B16"/>
-                </a:solidFill>
-                <a:latin typeface="Microsoft YaHei"/>
-              </a:rPr>
-              <a:t>尚无 full metric</a:t>
-            </a:r>
-          </a:p>
-        </p:txBody>
-      </p:sp>
-      <p:sp>
-        <p:nvSpPr>
-          <p:cNvPr id="31" name="Rounded Rectangle 30"/>
+              <a:t>尚无抓取成功率结论</a:t>
+            </a:r>
+          </a:p>
+        </p:txBody>
+      </p:sp>
+      <p:sp>
+        <p:nvSpPr>
+          <p:cNvPr id="40" name="TextBox 39"/>
+          <p:cNvSpPr txBox="1"/>
+          <p:nvPr/>
+        </p:nvSpPr>
+        <p:spPr>
+          <a:xfrm>
+            <a:off x="7626096" y="4572000"/>
+            <a:ext cx="3666744" cy="164592"/>
+          </a:xfrm>
+          <a:prstGeom prst="rect">
+            <a:avLst/>
+          </a:prstGeom>
+          <a:noFill/>
+        </p:spPr>
+        <p:txBody>
+          <a:bodyPr wrap="square" lIns="18288" rIns="18288" tIns="18288" bIns="18288" anchor="t">
+            <a:spAutoFit/>
+          </a:bodyPr>
+          <a:lstStyle/>
+          <a:p>
+            <a:pPr algn="l"/>
+            <a:r>
+              <a:rPr sz="890" b="0">
+                <a:solidFill>
+                  <a:srgbClr val="667381"/>
+                </a:solidFill>
+                <a:latin typeface="Microsoft YaHei"/>
+              </a:rPr>
+              <a:t>下一页用同一规划器直接验证</a:t>
+            </a:r>
+          </a:p>
+        </p:txBody>
+      </p:sp>
+      <p:sp>
+        <p:nvSpPr>
+          <p:cNvPr id="41" name="Rounded Rectangle 40"/>
           <p:cNvSpPr/>
           <p:nvPr/>
         </p:nvSpPr>
         <p:spPr>
           <a:xfrm>
-            <a:off x="786384" y="4498848"/>
-            <a:ext cx="10588752" cy="1060704"/>
+            <a:off x="786384" y="5230368"/>
+            <a:ext cx="10588752" cy="786384"/>
           </a:xfrm>
           <a:prstGeom prst="roundRect">
             <a:avLst/>
@@ -9483,14 +9893,14 @@
       </p:sp>
       <p:sp>
         <p:nvSpPr>
-          <p:cNvPr id="32" name="TextBox 31"/>
-          <p:cNvSpPr txBox="1"/>
-          <p:nvPr/>
-        </p:nvSpPr>
-        <p:spPr>
-          <a:xfrm>
-            <a:off x="1051560" y="4727448"/>
-            <a:ext cx="1152144" cy="201168"/>
+          <p:cNvPr id="42" name="TextBox 41"/>
+          <p:cNvSpPr txBox="1"/>
+          <p:nvPr/>
+        </p:nvSpPr>
+        <p:spPr>
+          <a:xfrm>
+            <a:off x="1042415" y="5486400"/>
+            <a:ext cx="1261872" cy="201168"/>
           </a:xfrm>
           <a:prstGeom prst="rect">
             <a:avLst/>
@@ -9511,21 +9921,21 @@
                 </a:solidFill>
                 <a:latin typeface="Microsoft YaHei"/>
               </a:rPr>
-              <a:t>当前能说</a:t>
-            </a:r>
-          </a:p>
-        </p:txBody>
-      </p:sp>
-      <p:sp>
-        <p:nvSpPr>
-          <p:cNvPr id="33" name="TextBox 32"/>
-          <p:cNvSpPr txBox="1"/>
-          <p:nvPr/>
-        </p:nvSpPr>
-        <p:spPr>
-          <a:xfrm>
-            <a:off x="2084831" y="4718304"/>
-            <a:ext cx="8823960" cy="219456"/>
+              <a:t>目前结论</a:t>
+            </a:r>
+          </a:p>
+        </p:txBody>
+      </p:sp>
+      <p:sp>
+        <p:nvSpPr>
+          <p:cNvPr id="43" name="TextBox 42"/>
+          <p:cNvSpPr txBox="1"/>
+          <p:nvPr/>
+        </p:nvSpPr>
+        <p:spPr>
+          <a:xfrm>
+            <a:off x="2203704" y="5449824"/>
+            <a:ext cx="8750808" cy="283464"/>
           </a:xfrm>
           <a:prstGeom prst="rect">
             <a:avLst/>
@@ -9540,90 +9950,20 @@
           <a:p>
             <a:pPr algn="l"/>
             <a:r>
-              <a:rPr sz="1300" b="1">
+              <a:rPr sz="1320" b="1">
                 <a:solidFill>
                   <a:srgbClr val="172331"/>
                 </a:solidFill>
                 <a:latin typeface="Microsoft YaHei"/>
               </a:rPr>
-              <a:t>多层表示在感知协议上优势显著；受控条件下能够恢复大量薄壳界面。</a:t>
-            </a:r>
-          </a:p>
-        </p:txBody>
-      </p:sp>
-      <p:sp>
-        <p:nvSpPr>
-          <p:cNvPr id="34" name="TextBox 33"/>
-          <p:cNvSpPr txBox="1"/>
-          <p:nvPr/>
-        </p:nvSpPr>
-        <p:spPr>
-          <a:xfrm>
-            <a:off x="1051560" y="5138928"/>
-            <a:ext cx="1152144" cy="201168"/>
-          </a:xfrm>
-          <a:prstGeom prst="rect">
-            <a:avLst/>
-          </a:prstGeom>
-          <a:noFill/>
-        </p:spPr>
-        <p:txBody>
-          <a:bodyPr wrap="square" lIns="18288" rIns="18288" tIns="18288" bIns="18288" anchor="t">
-            <a:spAutoFit/>
-          </a:bodyPr>
-          <a:lstStyle/>
-          <a:p>
-            <a:pPr algn="l"/>
-            <a:r>
-              <a:rPr sz="1200" b="1">
-                <a:solidFill>
-                  <a:srgbClr val="B7443E"/>
-                </a:solidFill>
-                <a:latin typeface="Microsoft YaHei"/>
-              </a:rPr>
-              <a:t>当前不能说</a:t>
-            </a:r>
-          </a:p>
-        </p:txBody>
-      </p:sp>
-      <p:sp>
-        <p:nvSpPr>
-          <p:cNvPr id="35" name="TextBox 34"/>
-          <p:cNvSpPr txBox="1"/>
-          <p:nvPr/>
-        </p:nvSpPr>
-        <p:spPr>
-          <a:xfrm>
-            <a:off x="2084831" y="5129784"/>
-            <a:ext cx="8823960" cy="219456"/>
-          </a:xfrm>
-          <a:prstGeom prst="rect">
-            <a:avLst/>
-          </a:prstGeom>
-          <a:noFill/>
-        </p:spPr>
-        <p:txBody>
-          <a:bodyPr wrap="square" lIns="18288" rIns="18288" tIns="18288" bIns="18288" anchor="t">
-            <a:spAutoFit/>
-          </a:bodyPr>
-          <a:lstStyle/>
-          <a:p>
-            <a:pPr algn="l"/>
-            <a:r>
-              <a:rPr sz="1220" b="0">
-                <a:solidFill>
-                  <a:srgbClr val="667381"/>
-                </a:solidFill>
-                <a:latin typeface="Microsoft YaHei"/>
-              </a:rPr>
-              <a:t>已经提升 planner / robot success；Depth4ToM-FT 与 TransCG full test 仍未完成。</a:t>
-            </a:r>
-          </a:p>
-        </p:txBody>
-      </p:sp>
-      <p:sp>
-        <p:nvSpPr>
-          <p:cNvPr id="36" name="TextBox 35"/>
+              <a:t>多层深度能更完整地描述透明物体；是否让机器人抓得更稳，还需要下一步实验。</a:t>
+            </a:r>
+          </a:p>
+        </p:txBody>
+      </p:sp>
+      <p:sp>
+        <p:nvSpPr>
+          <p:cNvPr id="44" name="TextBox 43"/>
           <p:cNvSpPr txBox="1"/>
           <p:nvPr/>
         </p:nvSpPr>
@@ -9651,7 +9991,7 @@
                 </a:solidFill>
                 <a:latin typeface="Microsoft YaHei"/>
               </a:rPr>
-              <a:t>本地完整运行：Booster 228、LayeredDepth validation 300、TablewareNet test 100 scenes。</a:t>
+              <a:t>所有数字都来自本地完整运行；未完成的实验不提前写成结论。</a:t>
             </a:r>
           </a:p>
         </p:txBody>
@@ -9747,7 +10087,7 @@
                 </a:solidFill>
                 <a:latin typeface="Microsoft YaHei"/>
               </a:rPr>
-              <a:t>下一步：先证明规划收益，再训练新 Head</a:t>
+              <a:t>下一步：证明“多层深度是否真的更好抓”</a:t>
             </a:r>
           </a:p>
         </p:txBody>
@@ -9789,24 +10129,59 @@
       </p:cxnSp>
       <p:sp>
         <p:nvSpPr>
-          <p:cNvPr id="5" name="Oval 4"/>
+          <p:cNvPr id="5" name="TextBox 4"/>
+          <p:cNvSpPr txBox="1"/>
+          <p:nvPr/>
+        </p:nvSpPr>
+        <p:spPr>
+          <a:xfrm>
+            <a:off x="603504" y="1069848"/>
+            <a:ext cx="10424160" cy="228600"/>
+          </a:xfrm>
+          <a:prstGeom prst="rect">
+            <a:avLst/>
+          </a:prstGeom>
+          <a:noFill/>
+        </p:spPr>
+        <p:txBody>
+          <a:bodyPr wrap="square" lIns="18288" rIns="18288" tIns="18288" bIns="18288" anchor="t">
+            <a:spAutoFit/>
+          </a:bodyPr>
+          <a:lstStyle/>
+          <a:p>
+            <a:pPr algn="l"/>
+            <a:r>
+              <a:rPr sz="1320" b="0">
+                <a:solidFill>
+                  <a:srgbClr val="667381"/>
+                </a:solidFill>
+                <a:latin typeface="Microsoft YaHei"/>
+              </a:rPr>
+              <a:t>保持物体、物体区域和抓取规划器完全相同，只改变输入的几何信息。</a:t>
+            </a:r>
+          </a:p>
+        </p:txBody>
+      </p:sp>
+      <p:sp>
+        <p:nvSpPr>
+          <p:cNvPr id="6" name="Rounded Rectangle 5"/>
           <p:cNvSpPr/>
           <p:nvPr/>
         </p:nvSpPr>
         <p:spPr>
           <a:xfrm>
-            <a:off x="1563624" y="1463040"/>
-            <a:ext cx="475488" cy="475488"/>
-          </a:xfrm>
-          <a:prstGeom prst="ellipse">
+            <a:off x="960120" y="1517904"/>
+            <a:ext cx="10268712" cy="630936"/>
+          </a:xfrm>
+          <a:prstGeom prst="roundRect">
             <a:avLst/>
           </a:prstGeom>
           <a:solidFill>
-            <a:srgbClr val="0F766E"/>
+            <a:srgbClr val="EAF6F4"/>
           </a:solidFill>
-          <a:ln>
+          <a:ln w="10160">
             <a:solidFill>
-              <a:srgbClr val="0F766E"/>
+              <a:srgbClr val="EAF6F4"/>
             </a:solidFill>
           </a:ln>
         </p:spPr>
@@ -9834,154 +10209,245 @@
       </p:sp>
       <p:sp>
         <p:nvSpPr>
-          <p:cNvPr id="6" name="TextBox 5"/>
-          <p:cNvSpPr txBox="1"/>
-          <p:nvPr/>
-        </p:nvSpPr>
-        <p:spPr>
-          <a:xfrm>
-            <a:off x="1563624" y="1600931"/>
-            <a:ext cx="475488" cy="142646"/>
-          </a:xfrm>
-          <a:prstGeom prst="rect">
-            <a:avLst/>
-          </a:prstGeom>
-          <a:noFill/>
-        </p:spPr>
-        <p:txBody>
-          <a:bodyPr wrap="square" lIns="18288" rIns="18288" tIns="18288" bIns="18288" anchor="t">
-            <a:spAutoFit/>
-          </a:bodyPr>
-          <a:lstStyle/>
-          <a:p>
-            <a:pPr algn="ctr"/>
-            <a:r>
-              <a:rPr sz="1000" b="1">
-                <a:solidFill>
-                  <a:srgbClr val="FFFFFF"/>
-                </a:solidFill>
-                <a:latin typeface="Microsoft YaHei"/>
-              </a:rPr>
-              <a:t>1</a:t>
-            </a:r>
-          </a:p>
-        </p:txBody>
-      </p:sp>
-      <p:cxnSp>
-        <p:nvCxnSpPr>
-          <p:cNvPr id="7" name="Connector 6"/>
-          <p:cNvCxnSpPr/>
-          <p:nvPr/>
-        </p:nvCxnSpPr>
-        <p:spPr>
-          <a:xfrm>
-            <a:off x="2039112" y="1700784"/>
-            <a:ext cx="1380744" cy="0"/>
-          </a:xfrm>
-          <a:prstGeom prst="line">
-            <a:avLst/>
-          </a:prstGeom>
-          <a:ln w="19050">
+          <p:cNvPr id="7" name="TextBox 6"/>
+          <p:cNvSpPr txBox="1"/>
+          <p:nvPr/>
+        </p:nvSpPr>
+        <p:spPr>
+          <a:xfrm>
+            <a:off x="1188720" y="1719072"/>
+            <a:ext cx="9811512" cy="228600"/>
+          </a:xfrm>
+          <a:prstGeom prst="rect">
+            <a:avLst/>
+          </a:prstGeom>
+          <a:noFill/>
+        </p:spPr>
+        <p:txBody>
+          <a:bodyPr wrap="square" lIns="18288" rIns="18288" tIns="18288" bIns="18288" anchor="t">
+            <a:spAutoFit/>
+          </a:bodyPr>
+          <a:lstStyle/>
+          <a:p>
+            <a:pPr algn="ctr"/>
+            <a:r>
+              <a:rPr sz="1420" b="1">
+                <a:solidFill>
+                  <a:srgbClr val="0F766E"/>
+                </a:solidFill>
+                <a:latin typeface="Microsoft YaHei"/>
+              </a:rPr>
+              <a:t>核心问题：只知道最前表面，与知道前后 / 内外表面相比，哪一种抓取错误更少？</a:t>
+            </a:r>
+          </a:p>
+        </p:txBody>
+      </p:sp>
+      <p:sp>
+        <p:nvSpPr>
+          <p:cNvPr id="8" name="Rounded Rectangle 7"/>
+          <p:cNvSpPr/>
+          <p:nvPr/>
+        </p:nvSpPr>
+        <p:spPr>
+          <a:xfrm>
+            <a:off x="676656" y="2532888"/>
+            <a:ext cx="3447288" cy="2075688"/>
+          </a:xfrm>
+          <a:prstGeom prst="roundRect">
+            <a:avLst/>
+          </a:prstGeom>
+          <a:solidFill>
+            <a:srgbClr val="FFFFFF"/>
+          </a:solidFill>
+          <a:ln w="10160">
             <a:solidFill>
               <a:srgbClr val="DDE3E8"/>
             </a:solidFill>
           </a:ln>
         </p:spPr>
         <p:style>
-          <a:lnRef idx="2">
+          <a:lnRef idx="1">
             <a:schemeClr val="accent1"/>
           </a:lnRef>
-          <a:fillRef idx="0">
+          <a:fillRef idx="3">
             <a:schemeClr val="accent1"/>
           </a:fillRef>
-          <a:effectRef idx="1">
+          <a:effectRef idx="2">
             <a:schemeClr val="accent1"/>
           </a:effectRef>
           <a:fontRef idx="minor">
-            <a:schemeClr val="tx1"/>
+            <a:schemeClr val="lt1"/>
           </a:fontRef>
         </p:style>
-      </p:cxnSp>
-      <p:sp>
-        <p:nvSpPr>
-          <p:cNvPr id="8" name="TextBox 7"/>
-          <p:cNvSpPr txBox="1"/>
-          <p:nvPr/>
-        </p:nvSpPr>
-        <p:spPr>
-          <a:xfrm>
-            <a:off x="658368" y="2221992"/>
-            <a:ext cx="2304288" cy="384048"/>
-          </a:xfrm>
-          <a:prstGeom prst="rect">
-            <a:avLst/>
-          </a:prstGeom>
-          <a:noFill/>
-        </p:spPr>
-        <p:txBody>
-          <a:bodyPr wrap="square" lIns="18288" rIns="18288" tIns="18288" bIns="18288" anchor="t">
-            <a:spAutoFit/>
-          </a:bodyPr>
-          <a:lstStyle/>
-          <a:p>
-            <a:pPr algn="ctr"/>
-            <a:r>
-              <a:rPr sz="1300" b="1">
+        <p:txBody>
+          <a:bodyPr rtlCol="0" anchor="ctr"/>
+          <a:lstStyle/>
+          <a:p>
+            <a:pPr algn="ctr"/>
+          </a:p>
+        </p:txBody>
+      </p:sp>
+      <p:sp>
+        <p:nvSpPr>
+          <p:cNvPr id="9" name="Oval 8"/>
+          <p:cNvSpPr/>
+          <p:nvPr/>
+        </p:nvSpPr>
+        <p:spPr>
+          <a:xfrm>
+            <a:off x="877824" y="2761488"/>
+            <a:ext cx="402336" cy="402336"/>
+          </a:xfrm>
+          <a:prstGeom prst="ellipse">
+            <a:avLst/>
+          </a:prstGeom>
+          <a:solidFill>
+            <a:srgbClr val="2563EB"/>
+          </a:solidFill>
+          <a:ln>
+            <a:solidFill>
+              <a:srgbClr val="2563EB"/>
+            </a:solidFill>
+          </a:ln>
+        </p:spPr>
+        <p:style>
+          <a:lnRef idx="1">
+            <a:schemeClr val="accent1"/>
+          </a:lnRef>
+          <a:fillRef idx="3">
+            <a:schemeClr val="accent1"/>
+          </a:fillRef>
+          <a:effectRef idx="2">
+            <a:schemeClr val="accent1"/>
+          </a:effectRef>
+          <a:fontRef idx="minor">
+            <a:schemeClr val="lt1"/>
+          </a:fontRef>
+        </p:style>
+        <p:txBody>
+          <a:bodyPr rtlCol="0" anchor="ctr"/>
+          <a:lstStyle/>
+          <a:p>
+            <a:pPr algn="ctr"/>
+          </a:p>
+        </p:txBody>
+      </p:sp>
+      <p:sp>
+        <p:nvSpPr>
+          <p:cNvPr id="10" name="TextBox 9"/>
+          <p:cNvSpPr txBox="1"/>
+          <p:nvPr/>
+        </p:nvSpPr>
+        <p:spPr>
+          <a:xfrm>
+            <a:off x="877824" y="2878165"/>
+            <a:ext cx="402336" cy="120700"/>
+          </a:xfrm>
+          <a:prstGeom prst="rect">
+            <a:avLst/>
+          </a:prstGeom>
+          <a:noFill/>
+        </p:spPr>
+        <p:txBody>
+          <a:bodyPr wrap="square" lIns="18288" rIns="18288" tIns="18288" bIns="18288" anchor="t">
+            <a:spAutoFit/>
+          </a:bodyPr>
+          <a:lstStyle/>
+          <a:p>
+            <a:pPr algn="ctr"/>
+            <a:r>
+              <a:rPr sz="1000" b="1">
+                <a:solidFill>
+                  <a:srgbClr val="FFFFFF"/>
+                </a:solidFill>
+                <a:latin typeface="Microsoft YaHei"/>
+              </a:rPr>
+              <a:t>1</a:t>
+            </a:r>
+          </a:p>
+        </p:txBody>
+      </p:sp>
+      <p:sp>
+        <p:nvSpPr>
+          <p:cNvPr id="11" name="TextBox 10"/>
+          <p:cNvSpPr txBox="1"/>
+          <p:nvPr/>
+        </p:nvSpPr>
+        <p:spPr>
+          <a:xfrm>
+            <a:off x="1426464" y="2798064"/>
+            <a:ext cx="2395728" cy="228600"/>
+          </a:xfrm>
+          <a:prstGeom prst="rect">
+            <a:avLst/>
+          </a:prstGeom>
+          <a:noFill/>
+        </p:spPr>
+        <p:txBody>
+          <a:bodyPr wrap="square" lIns="18288" rIns="18288" tIns="18288" bIns="18288" anchor="t">
+            <a:spAutoFit/>
+          </a:bodyPr>
+          <a:lstStyle/>
+          <a:p>
+            <a:pPr algn="l"/>
+            <a:r>
+              <a:rPr sz="1400" b="1">
                 <a:solidFill>
                   <a:srgbClr val="172331"/>
                 </a:solidFill>
                 <a:latin typeface="Microsoft YaHei"/>
               </a:rPr>
-              <a:t>Planner oracle</a:t>
-            </a:r>
-          </a:p>
-        </p:txBody>
-      </p:sp>
-      <p:sp>
-        <p:nvSpPr>
-          <p:cNvPr id="9" name="TextBox 8"/>
-          <p:cNvSpPr txBox="1"/>
-          <p:nvPr/>
-        </p:nvSpPr>
-        <p:spPr>
-          <a:xfrm>
-            <a:off x="658368" y="2788920"/>
-            <a:ext cx="2304288" cy="347472"/>
-          </a:xfrm>
-          <a:prstGeom prst="rect">
-            <a:avLst/>
-          </a:prstGeom>
-          <a:noFill/>
-        </p:spPr>
-        <p:txBody>
-          <a:bodyPr wrap="square" lIns="18288" rIns="18288" tIns="18288" bIns="18288" anchor="t">
-            <a:spAutoFit/>
-          </a:bodyPr>
-          <a:lstStyle/>
-          <a:p>
-            <a:pPr algn="ctr"/>
-            <a:r>
-              <a:rPr sz="1019" b="0">
+              <a:t>做公平对比</a:t>
+            </a:r>
+          </a:p>
+        </p:txBody>
+      </p:sp>
+      <p:sp>
+        <p:nvSpPr>
+          <p:cNvPr id="12" name="TextBox 11"/>
+          <p:cNvSpPr txBox="1"/>
+          <p:nvPr/>
+        </p:nvSpPr>
+        <p:spPr>
+          <a:xfrm>
+            <a:off x="950976" y="3291840"/>
+            <a:ext cx="2898648" cy="685800"/>
+          </a:xfrm>
+          <a:prstGeom prst="rect">
+            <a:avLst/>
+          </a:prstGeom>
+          <a:noFill/>
+        </p:spPr>
+        <p:txBody>
+          <a:bodyPr wrap="square" lIns="18288" rIns="18288" tIns="18288" bIns="18288" anchor="ctr">
+            <a:spAutoFit/>
+          </a:bodyPr>
+          <a:lstStyle/>
+          <a:p>
+            <a:pPr algn="ctr"/>
+            <a:r>
+              <a:rPr sz="1070" b="0">
                 <a:solidFill>
                   <a:srgbClr val="667381"/>
                 </a:solidFill>
                 <a:latin typeface="Microsoft YaHei"/>
               </a:rPr>
-              <a:t>同一 planner 下比较</a:t>
-            </a:r>
-          </a:p>
-        </p:txBody>
-      </p:sp>
-      <p:sp>
-        <p:nvSpPr>
-          <p:cNvPr id="10" name="Rounded Rectangle 9"/>
+              <a:t>方案 A：只给最前表面
+方案 B：给出完整多层界面</a:t>
+            </a:r>
+          </a:p>
+        </p:txBody>
+      </p:sp>
+      <p:sp>
+        <p:nvSpPr>
+          <p:cNvPr id="13" name="Rounded Rectangle 12"/>
           <p:cNvSpPr/>
           <p:nvPr/>
         </p:nvSpPr>
         <p:spPr>
           <a:xfrm>
-            <a:off x="749808" y="3419856"/>
-            <a:ext cx="2121408" cy="749808"/>
+            <a:off x="960120" y="4114800"/>
+            <a:ext cx="2880360" cy="310896"/>
           </a:xfrm>
           <a:prstGeom prst="roundRect">
             <a:avLst/>
@@ -10019,60 +10485,59 @@
       </p:sp>
       <p:sp>
         <p:nvSpPr>
-          <p:cNvPr id="11" name="TextBox 10"/>
-          <p:cNvSpPr txBox="1"/>
-          <p:nvPr/>
-        </p:nvSpPr>
-        <p:spPr>
-          <a:xfrm>
-            <a:off x="841247" y="3611880"/>
-            <a:ext cx="1938528" cy="347472"/>
-          </a:xfrm>
-          <a:prstGeom prst="rect">
-            <a:avLst/>
-          </a:prstGeom>
-          <a:noFill/>
-        </p:spPr>
-        <p:txBody>
-          <a:bodyPr wrap="square" lIns="18288" rIns="18288" tIns="18288" bIns="18288" anchor="t">
-            <a:spAutoFit/>
-          </a:bodyPr>
-          <a:lstStyle/>
-          <a:p>
-            <a:pPr algn="ctr"/>
-            <a:r>
-              <a:rPr sz="1030" b="1">
-                <a:solidFill>
-                  <a:srgbClr val="0F766E"/>
-                </a:solidFill>
-                <a:latin typeface="Microsoft YaHei"/>
-              </a:rPr>
-              <a:t>GT-front
-vs GT-events</a:t>
-            </a:r>
-          </a:p>
-        </p:txBody>
-      </p:sp>
-      <p:sp>
-        <p:nvSpPr>
-          <p:cNvPr id="12" name="Oval 11"/>
+          <p:cNvPr id="14" name="TextBox 13"/>
+          <p:cNvSpPr txBox="1"/>
+          <p:nvPr/>
+        </p:nvSpPr>
+        <p:spPr>
+          <a:xfrm>
+            <a:off x="1033271" y="4187952"/>
+            <a:ext cx="2734056" cy="164592"/>
+          </a:xfrm>
+          <a:prstGeom prst="rect">
+            <a:avLst/>
+          </a:prstGeom>
+          <a:noFill/>
+        </p:spPr>
+        <p:txBody>
+          <a:bodyPr wrap="square" lIns="18288" rIns="18288" tIns="18288" bIns="18288" anchor="t">
+            <a:spAutoFit/>
+          </a:bodyPr>
+          <a:lstStyle/>
+          <a:p>
+            <a:pPr algn="ctr"/>
+            <a:r>
+              <a:rPr sz="869" b="1">
+                <a:solidFill>
+                  <a:srgbClr val="2563EB"/>
+                </a:solidFill>
+                <a:latin typeface="Microsoft YaHei"/>
+              </a:rPr>
+              <a:t>其余条件全部相同</a:t>
+            </a:r>
+          </a:p>
+        </p:txBody>
+      </p:sp>
+      <p:sp>
+        <p:nvSpPr>
+          <p:cNvPr id="15" name="Rounded Rectangle 14"/>
           <p:cNvSpPr/>
           <p:nvPr/>
         </p:nvSpPr>
         <p:spPr>
           <a:xfrm>
-            <a:off x="4398264" y="1463040"/>
-            <a:ext cx="475488" cy="475488"/>
-          </a:xfrm>
-          <a:prstGeom prst="ellipse">
+            <a:off x="4498848" y="2532888"/>
+            <a:ext cx="3447288" cy="2075688"/>
+          </a:xfrm>
+          <a:prstGeom prst="roundRect">
             <a:avLst/>
           </a:prstGeom>
           <a:solidFill>
-            <a:srgbClr val="2563EB"/>
+            <a:srgbClr val="FFFFFF"/>
           </a:solidFill>
-          <a:ln>
+          <a:ln w="10160">
             <a:solidFill>
-              <a:srgbClr val="2563EB"/>
+              <a:srgbClr val="DDE3E8"/>
             </a:solidFill>
           </a:ln>
         </p:spPr>
@@ -10100,154 +10565,166 @@
       </p:sp>
       <p:sp>
         <p:nvSpPr>
-          <p:cNvPr id="13" name="TextBox 12"/>
-          <p:cNvSpPr txBox="1"/>
-          <p:nvPr/>
-        </p:nvSpPr>
-        <p:spPr>
-          <a:xfrm>
-            <a:off x="4398264" y="1600931"/>
-            <a:ext cx="475488" cy="142646"/>
-          </a:xfrm>
-          <a:prstGeom prst="rect">
-            <a:avLst/>
-          </a:prstGeom>
-          <a:noFill/>
-        </p:spPr>
-        <p:txBody>
-          <a:bodyPr wrap="square" lIns="18288" rIns="18288" tIns="18288" bIns="18288" anchor="t">
-            <a:spAutoFit/>
-          </a:bodyPr>
-          <a:lstStyle/>
-          <a:p>
-            <a:pPr algn="ctr"/>
-            <a:r>
-              <a:rPr sz="1000" b="1">
-                <a:solidFill>
-                  <a:srgbClr val="FFFFFF"/>
-                </a:solidFill>
-                <a:latin typeface="Microsoft YaHei"/>
-              </a:rPr>
-              <a:t>2</a:t>
-            </a:r>
-          </a:p>
-        </p:txBody>
-      </p:sp>
-      <p:cxnSp>
-        <p:nvCxnSpPr>
-          <p:cNvPr id="14" name="Connector 13"/>
-          <p:cNvCxnSpPr/>
-          <p:nvPr/>
-        </p:nvCxnSpPr>
-        <p:spPr>
-          <a:xfrm>
-            <a:off x="4873752" y="1700784"/>
-            <a:ext cx="1380744" cy="0"/>
-          </a:xfrm>
-          <a:prstGeom prst="line">
-            <a:avLst/>
-          </a:prstGeom>
-          <a:ln w="19050">
+          <p:cNvPr id="16" name="Oval 15"/>
+          <p:cNvSpPr/>
+          <p:nvPr/>
+        </p:nvSpPr>
+        <p:spPr>
+          <a:xfrm>
+            <a:off x="4700016" y="2761488"/>
+            <a:ext cx="402336" cy="402336"/>
+          </a:xfrm>
+          <a:prstGeom prst="ellipse">
+            <a:avLst/>
+          </a:prstGeom>
+          <a:solidFill>
+            <a:srgbClr val="C46B16"/>
+          </a:solidFill>
+          <a:ln>
             <a:solidFill>
-              <a:srgbClr val="DDE3E8"/>
+              <a:srgbClr val="C46B16"/>
             </a:solidFill>
           </a:ln>
         </p:spPr>
         <p:style>
-          <a:lnRef idx="2">
+          <a:lnRef idx="1">
             <a:schemeClr val="accent1"/>
           </a:lnRef>
-          <a:fillRef idx="0">
+          <a:fillRef idx="3">
             <a:schemeClr val="accent1"/>
           </a:fillRef>
-          <a:effectRef idx="1">
+          <a:effectRef idx="2">
             <a:schemeClr val="accent1"/>
           </a:effectRef>
           <a:fontRef idx="minor">
-            <a:schemeClr val="tx1"/>
+            <a:schemeClr val="lt1"/>
           </a:fontRef>
         </p:style>
-      </p:cxnSp>
-      <p:sp>
-        <p:nvSpPr>
-          <p:cNvPr id="15" name="TextBox 14"/>
-          <p:cNvSpPr txBox="1"/>
-          <p:nvPr/>
-        </p:nvSpPr>
-        <p:spPr>
-          <a:xfrm>
-            <a:off x="3493008" y="2221992"/>
-            <a:ext cx="2304288" cy="384048"/>
-          </a:xfrm>
-          <a:prstGeom prst="rect">
-            <a:avLst/>
-          </a:prstGeom>
-          <a:noFill/>
-        </p:spPr>
-        <p:txBody>
-          <a:bodyPr wrap="square" lIns="18288" rIns="18288" tIns="18288" bIns="18288" anchor="t">
-            <a:spAutoFit/>
-          </a:bodyPr>
-          <a:lstStyle/>
-          <a:p>
-            <a:pPr algn="ctr"/>
-            <a:r>
-              <a:rPr sz="1300" b="1">
+        <p:txBody>
+          <a:bodyPr rtlCol="0" anchor="ctr"/>
+          <a:lstStyle/>
+          <a:p>
+            <a:pPr algn="ctr"/>
+          </a:p>
+        </p:txBody>
+      </p:sp>
+      <p:sp>
+        <p:nvSpPr>
+          <p:cNvPr id="17" name="TextBox 16"/>
+          <p:cNvSpPr txBox="1"/>
+          <p:nvPr/>
+        </p:nvSpPr>
+        <p:spPr>
+          <a:xfrm>
+            <a:off x="4700016" y="2878165"/>
+            <a:ext cx="402336" cy="120700"/>
+          </a:xfrm>
+          <a:prstGeom prst="rect">
+            <a:avLst/>
+          </a:prstGeom>
+          <a:noFill/>
+        </p:spPr>
+        <p:txBody>
+          <a:bodyPr wrap="square" lIns="18288" rIns="18288" tIns="18288" bIns="18288" anchor="t">
+            <a:spAutoFit/>
+          </a:bodyPr>
+          <a:lstStyle/>
+          <a:p>
+            <a:pPr algn="ctr"/>
+            <a:r>
+              <a:rPr sz="1000" b="1">
+                <a:solidFill>
+                  <a:srgbClr val="FFFFFF"/>
+                </a:solidFill>
+                <a:latin typeface="Microsoft YaHei"/>
+              </a:rPr>
+              <a:t>2</a:t>
+            </a:r>
+          </a:p>
+        </p:txBody>
+      </p:sp>
+      <p:sp>
+        <p:nvSpPr>
+          <p:cNvPr id="18" name="TextBox 17"/>
+          <p:cNvSpPr txBox="1"/>
+          <p:nvPr/>
+        </p:nvSpPr>
+        <p:spPr>
+          <a:xfrm>
+            <a:off x="5248656" y="2798064"/>
+            <a:ext cx="2395728" cy="228600"/>
+          </a:xfrm>
+          <a:prstGeom prst="rect">
+            <a:avLst/>
+          </a:prstGeom>
+          <a:noFill/>
+        </p:spPr>
+        <p:txBody>
+          <a:bodyPr wrap="square" lIns="18288" rIns="18288" tIns="18288" bIns="18288" anchor="t">
+            <a:spAutoFit/>
+          </a:bodyPr>
+          <a:lstStyle/>
+          <a:p>
+            <a:pPr algn="l"/>
+            <a:r>
+              <a:rPr sz="1400" b="1">
                 <a:solidFill>
                   <a:srgbClr val="172331"/>
                 </a:solidFill>
                 <a:latin typeface="Microsoft YaHei"/>
               </a:rPr>
-              <a:t>补齐 native baselines</a:t>
-            </a:r>
-          </a:p>
-        </p:txBody>
-      </p:sp>
-      <p:sp>
-        <p:nvSpPr>
-          <p:cNvPr id="16" name="TextBox 15"/>
-          <p:cNvSpPr txBox="1"/>
-          <p:nvPr/>
-        </p:nvSpPr>
-        <p:spPr>
-          <a:xfrm>
-            <a:off x="3493008" y="2788920"/>
-            <a:ext cx="2304288" cy="347472"/>
-          </a:xfrm>
-          <a:prstGeom prst="rect">
-            <a:avLst/>
-          </a:prstGeom>
-          <a:noFill/>
-        </p:spPr>
-        <p:txBody>
-          <a:bodyPr wrap="square" lIns="18288" rIns="18288" tIns="18288" bIns="18288" anchor="t">
-            <a:spAutoFit/>
-          </a:bodyPr>
-          <a:lstStyle/>
-          <a:p>
-            <a:pPr algn="ctr"/>
-            <a:r>
-              <a:rPr sz="1019" b="0">
+              <a:t>统计三类错误</a:t>
+            </a:r>
+          </a:p>
+        </p:txBody>
+      </p:sp>
+      <p:sp>
+        <p:nvSpPr>
+          <p:cNvPr id="19" name="TextBox 18"/>
+          <p:cNvSpPr txBox="1"/>
+          <p:nvPr/>
+        </p:nvSpPr>
+        <p:spPr>
+          <a:xfrm>
+            <a:off x="4773168" y="3291840"/>
+            <a:ext cx="2898648" cy="685800"/>
+          </a:xfrm>
+          <a:prstGeom prst="rect">
+            <a:avLst/>
+          </a:prstGeom>
+          <a:noFill/>
+        </p:spPr>
+        <p:txBody>
+          <a:bodyPr wrap="square" lIns="18288" rIns="18288" tIns="18288" bIns="18288" anchor="ctr">
+            <a:spAutoFit/>
+          </a:bodyPr>
+          <a:lstStyle/>
+          <a:p>
+            <a:pPr algn="ctr"/>
+            <a:r>
+              <a:rPr sz="1070" b="0">
                 <a:solidFill>
                   <a:srgbClr val="667381"/>
                 </a:solidFill>
                 <a:latin typeface="Microsoft YaHei"/>
               </a:rPr>
-              <a:t>完成 TransCG 余下 12 scenes</a:t>
-            </a:r>
-          </a:p>
-        </p:txBody>
-      </p:sp>
-      <p:sp>
-        <p:nvSpPr>
-          <p:cNvPr id="17" name="Rounded Rectangle 16"/>
+              <a:t>① 穿过物体外壁
+② 把空腔当成实心
+③ 抓取位姿碰撞或不可达</a:t>
+            </a:r>
+          </a:p>
+        </p:txBody>
+      </p:sp>
+      <p:sp>
+        <p:nvSpPr>
+          <p:cNvPr id="20" name="Rounded Rectangle 19"/>
           <p:cNvSpPr/>
           <p:nvPr/>
         </p:nvSpPr>
         <p:spPr>
           <a:xfrm>
-            <a:off x="3584448" y="3419856"/>
-            <a:ext cx="2121408" cy="749808"/>
+            <a:off x="4782312" y="4114800"/>
+            <a:ext cx="2880360" cy="310896"/>
           </a:xfrm>
           <a:prstGeom prst="roundRect">
             <a:avLst/>
@@ -10285,60 +10762,59 @@
       </p:sp>
       <p:sp>
         <p:nvSpPr>
-          <p:cNvPr id="18" name="TextBox 17"/>
-          <p:cNvSpPr txBox="1"/>
-          <p:nvPr/>
-        </p:nvSpPr>
-        <p:spPr>
-          <a:xfrm>
-            <a:off x="3675888" y="3611880"/>
-            <a:ext cx="1938528" cy="347472"/>
-          </a:xfrm>
-          <a:prstGeom prst="rect">
-            <a:avLst/>
-          </a:prstGeom>
-          <a:noFill/>
-        </p:spPr>
-        <p:txBody>
-          <a:bodyPr wrap="square" lIns="18288" rIns="18288" tIns="18288" bIns="18288" anchor="t">
-            <a:spAutoFit/>
-          </a:bodyPr>
-          <a:lstStyle/>
-          <a:p>
-            <a:pPr algn="ctr"/>
-            <a:r>
-              <a:rPr sz="1030" b="1">
-                <a:solidFill>
-                  <a:srgbClr val="2563EB"/>
-                </a:solidFill>
-                <a:latin typeface="Microsoft YaHei"/>
-              </a:rPr>
-              <a:t>DFNet + ReMake
-23,524 samples</a:t>
-            </a:r>
-          </a:p>
-        </p:txBody>
-      </p:sp>
-      <p:sp>
-        <p:nvSpPr>
-          <p:cNvPr id="19" name="Oval 18"/>
+          <p:cNvPr id="21" name="TextBox 20"/>
+          <p:cNvSpPr txBox="1"/>
+          <p:nvPr/>
+        </p:nvSpPr>
+        <p:spPr>
+          <a:xfrm>
+            <a:off x="4855464" y="4187952"/>
+            <a:ext cx="2734056" cy="164592"/>
+          </a:xfrm>
+          <a:prstGeom prst="rect">
+            <a:avLst/>
+          </a:prstGeom>
+          <a:noFill/>
+        </p:spPr>
+        <p:txBody>
+          <a:bodyPr wrap="square" lIns="18288" rIns="18288" tIns="18288" bIns="18288" anchor="t">
+            <a:spAutoFit/>
+          </a:bodyPr>
+          <a:lstStyle/>
+          <a:p>
+            <a:pPr algn="ctr"/>
+            <a:r>
+              <a:rPr sz="869" b="1">
+                <a:solidFill>
+                  <a:srgbClr val="C46B16"/>
+                </a:solidFill>
+                <a:latin typeface="Microsoft YaHei"/>
+              </a:rPr>
+              <a:t>重复实验，比较错误率和波动</a:t>
+            </a:r>
+          </a:p>
+        </p:txBody>
+      </p:sp>
+      <p:sp>
+        <p:nvSpPr>
+          <p:cNvPr id="22" name="Rounded Rectangle 21"/>
           <p:cNvSpPr/>
           <p:nvPr/>
         </p:nvSpPr>
         <p:spPr>
           <a:xfrm>
-            <a:off x="7232904" y="1463040"/>
-            <a:ext cx="475488" cy="475488"/>
-          </a:xfrm>
-          <a:prstGeom prst="ellipse">
+            <a:off x="8321040" y="2532888"/>
+            <a:ext cx="3447288" cy="2075688"/>
+          </a:xfrm>
+          <a:prstGeom prst="roundRect">
             <a:avLst/>
           </a:prstGeom>
           <a:solidFill>
-            <a:srgbClr val="C46B16"/>
+            <a:srgbClr val="FFFFFF"/>
           </a:solidFill>
-          <a:ln>
+          <a:ln w="10160">
             <a:solidFill>
-              <a:srgbClr val="C46B16"/>
+              <a:srgbClr val="DDE3E8"/>
             </a:solidFill>
           </a:ln>
         </p:spPr>
@@ -10366,154 +10842,165 @@
       </p:sp>
       <p:sp>
         <p:nvSpPr>
-          <p:cNvPr id="20" name="TextBox 19"/>
-          <p:cNvSpPr txBox="1"/>
-          <p:nvPr/>
-        </p:nvSpPr>
-        <p:spPr>
-          <a:xfrm>
-            <a:off x="7232904" y="1600931"/>
-            <a:ext cx="475488" cy="142646"/>
-          </a:xfrm>
-          <a:prstGeom prst="rect">
-            <a:avLst/>
-          </a:prstGeom>
-          <a:noFill/>
-        </p:spPr>
-        <p:txBody>
-          <a:bodyPr wrap="square" lIns="18288" rIns="18288" tIns="18288" bIns="18288" anchor="t">
-            <a:spAutoFit/>
-          </a:bodyPr>
-          <a:lstStyle/>
-          <a:p>
-            <a:pPr algn="ctr"/>
-            <a:r>
-              <a:rPr sz="1000" b="1">
-                <a:solidFill>
-                  <a:srgbClr val="FFFFFF"/>
-                </a:solidFill>
-                <a:latin typeface="Microsoft YaHei"/>
-              </a:rPr>
-              <a:t>3</a:t>
-            </a:r>
-          </a:p>
-        </p:txBody>
-      </p:sp>
-      <p:cxnSp>
-        <p:nvCxnSpPr>
-          <p:cNvPr id="21" name="Connector 20"/>
-          <p:cNvCxnSpPr/>
-          <p:nvPr/>
-        </p:nvCxnSpPr>
-        <p:spPr>
-          <a:xfrm>
-            <a:off x="7708392" y="1700784"/>
-            <a:ext cx="1380744" cy="0"/>
-          </a:xfrm>
-          <a:prstGeom prst="line">
-            <a:avLst/>
-          </a:prstGeom>
-          <a:ln w="19050">
+          <p:cNvPr id="23" name="Oval 22"/>
+          <p:cNvSpPr/>
+          <p:nvPr/>
+        </p:nvSpPr>
+        <p:spPr>
+          <a:xfrm>
+            <a:off x="8522208" y="2761488"/>
+            <a:ext cx="402336" cy="402336"/>
+          </a:xfrm>
+          <a:prstGeom prst="ellipse">
+            <a:avLst/>
+          </a:prstGeom>
+          <a:solidFill>
+            <a:srgbClr val="15805D"/>
+          </a:solidFill>
+          <a:ln>
             <a:solidFill>
-              <a:srgbClr val="DDE3E8"/>
+              <a:srgbClr val="15805D"/>
             </a:solidFill>
           </a:ln>
         </p:spPr>
         <p:style>
-          <a:lnRef idx="2">
+          <a:lnRef idx="1">
             <a:schemeClr val="accent1"/>
           </a:lnRef>
-          <a:fillRef idx="0">
+          <a:fillRef idx="3">
             <a:schemeClr val="accent1"/>
           </a:fillRef>
-          <a:effectRef idx="1">
+          <a:effectRef idx="2">
             <a:schemeClr val="accent1"/>
           </a:effectRef>
           <a:fontRef idx="minor">
-            <a:schemeClr val="tx1"/>
+            <a:schemeClr val="lt1"/>
           </a:fontRef>
         </p:style>
-      </p:cxnSp>
-      <p:sp>
-        <p:nvSpPr>
-          <p:cNvPr id="22" name="TextBox 21"/>
-          <p:cNvSpPr txBox="1"/>
-          <p:nvPr/>
-        </p:nvSpPr>
-        <p:spPr>
-          <a:xfrm>
-            <a:off x="6327648" y="2221992"/>
-            <a:ext cx="2304288" cy="384048"/>
-          </a:xfrm>
-          <a:prstGeom prst="rect">
-            <a:avLst/>
-          </a:prstGeom>
-          <a:noFill/>
-        </p:spPr>
-        <p:txBody>
-          <a:bodyPr wrap="square" lIns="18288" rIns="18288" tIns="18288" bIns="18288" anchor="t">
-            <a:spAutoFit/>
-          </a:bodyPr>
-          <a:lstStyle/>
-          <a:p>
-            <a:pPr algn="ctr"/>
-            <a:r>
-              <a:rPr sz="1300" b="1">
+        <p:txBody>
+          <a:bodyPr rtlCol="0" anchor="ctr"/>
+          <a:lstStyle/>
+          <a:p>
+            <a:pPr algn="ctr"/>
+          </a:p>
+        </p:txBody>
+      </p:sp>
+      <p:sp>
+        <p:nvSpPr>
+          <p:cNvPr id="24" name="TextBox 23"/>
+          <p:cNvSpPr txBox="1"/>
+          <p:nvPr/>
+        </p:nvSpPr>
+        <p:spPr>
+          <a:xfrm>
+            <a:off x="8522208" y="2878165"/>
+            <a:ext cx="402336" cy="120700"/>
+          </a:xfrm>
+          <a:prstGeom prst="rect">
+            <a:avLst/>
+          </a:prstGeom>
+          <a:noFill/>
+        </p:spPr>
+        <p:txBody>
+          <a:bodyPr wrap="square" lIns="18288" rIns="18288" tIns="18288" bIns="18288" anchor="t">
+            <a:spAutoFit/>
+          </a:bodyPr>
+          <a:lstStyle/>
+          <a:p>
+            <a:pPr algn="ctr"/>
+            <a:r>
+              <a:rPr sz="1000" b="1">
+                <a:solidFill>
+                  <a:srgbClr val="FFFFFF"/>
+                </a:solidFill>
+                <a:latin typeface="Microsoft YaHei"/>
+              </a:rPr>
+              <a:t>3</a:t>
+            </a:r>
+          </a:p>
+        </p:txBody>
+      </p:sp>
+      <p:sp>
+        <p:nvSpPr>
+          <p:cNvPr id="25" name="TextBox 24"/>
+          <p:cNvSpPr txBox="1"/>
+          <p:nvPr/>
+        </p:nvSpPr>
+        <p:spPr>
+          <a:xfrm>
+            <a:off x="9070848" y="2798064"/>
+            <a:ext cx="2395728" cy="228600"/>
+          </a:xfrm>
+          <a:prstGeom prst="rect">
+            <a:avLst/>
+          </a:prstGeom>
+          <a:noFill/>
+        </p:spPr>
+        <p:txBody>
+          <a:bodyPr wrap="square" lIns="18288" rIns="18288" tIns="18288" bIns="18288" anchor="t">
+            <a:spAutoFit/>
+          </a:bodyPr>
+          <a:lstStyle/>
+          <a:p>
+            <a:pPr algn="l"/>
+            <a:r>
+              <a:rPr sz="1400" b="1">
                 <a:solidFill>
                   <a:srgbClr val="172331"/>
                 </a:solidFill>
                 <a:latin typeface="Microsoft YaHei"/>
               </a:rPr>
-              <a:t>统一 failure slice</a:t>
-            </a:r>
-          </a:p>
-        </p:txBody>
-      </p:sp>
-      <p:sp>
-        <p:nvSpPr>
-          <p:cNvPr id="23" name="TextBox 22"/>
-          <p:cNvSpPr txBox="1"/>
-          <p:nvPr/>
-        </p:nvSpPr>
-        <p:spPr>
-          <a:xfrm>
-            <a:off x="6327648" y="2788920"/>
-            <a:ext cx="2304288" cy="347472"/>
-          </a:xfrm>
-          <a:prstGeom prst="rect">
-            <a:avLst/>
-          </a:prstGeom>
-          <a:noFill/>
-        </p:spPr>
-        <p:txBody>
-          <a:bodyPr wrap="square" lIns="18288" rIns="18288" tIns="18288" bIns="18288" anchor="t">
-            <a:spAutoFit/>
-          </a:bodyPr>
-          <a:lstStyle/>
-          <a:p>
-            <a:pPr algn="ctr"/>
-            <a:r>
-              <a:rPr sz="1019" b="0">
+              <a:t>根据结果决定</a:t>
+            </a:r>
+          </a:p>
+        </p:txBody>
+      </p:sp>
+      <p:sp>
+        <p:nvSpPr>
+          <p:cNvPr id="26" name="TextBox 25"/>
+          <p:cNvSpPr txBox="1"/>
+          <p:nvPr/>
+        </p:nvSpPr>
+        <p:spPr>
+          <a:xfrm>
+            <a:off x="8595360" y="3291840"/>
+            <a:ext cx="2898648" cy="685800"/>
+          </a:xfrm>
+          <a:prstGeom prst="rect">
+            <a:avLst/>
+          </a:prstGeom>
+          <a:noFill/>
+        </p:spPr>
+        <p:txBody>
+          <a:bodyPr wrap="square" lIns="18288" rIns="18288" tIns="18288" bIns="18288" anchor="ctr">
+            <a:spAutoFit/>
+          </a:bodyPr>
+          <a:lstStyle/>
+          <a:p>
+            <a:pPr algn="ctr"/>
+            <a:r>
+              <a:rPr sz="1070" b="0">
                 <a:solidFill>
                   <a:srgbClr val="667381"/>
                 </a:solidFill>
                 <a:latin typeface="Microsoft YaHei"/>
               </a:rPr>
-              <a:t>按场景报告置信区间</a:t>
-            </a:r>
-          </a:p>
-        </p:txBody>
-      </p:sp>
-      <p:sp>
-        <p:nvSpPr>
-          <p:cNvPr id="24" name="Rounded Rectangle 23"/>
+              <a:t>错误明显减少：训练我们的多层模型
+没有减少：先修改规划器或评测</a:t>
+            </a:r>
+          </a:p>
+        </p:txBody>
+      </p:sp>
+      <p:sp>
+        <p:nvSpPr>
+          <p:cNvPr id="27" name="Rounded Rectangle 26"/>
           <p:cNvSpPr/>
           <p:nvPr/>
         </p:nvSpPr>
         <p:spPr>
           <a:xfrm>
-            <a:off x="6419088" y="3419856"/>
-            <a:ext cx="2121408" cy="749808"/>
+            <a:off x="8604504" y="4114800"/>
+            <a:ext cx="2880360" cy="310896"/>
           </a:xfrm>
           <a:prstGeom prst="roundRect">
             <a:avLst/>
@@ -10551,60 +11038,59 @@
       </p:sp>
       <p:sp>
         <p:nvSpPr>
-          <p:cNvPr id="25" name="TextBox 24"/>
-          <p:cNvSpPr txBox="1"/>
-          <p:nvPr/>
-        </p:nvSpPr>
-        <p:spPr>
-          <a:xfrm>
-            <a:off x="6510528" y="3611880"/>
-            <a:ext cx="1938528" cy="347472"/>
-          </a:xfrm>
-          <a:prstGeom prst="rect">
-            <a:avLst/>
-          </a:prstGeom>
-          <a:noFill/>
-        </p:spPr>
-        <p:txBody>
-          <a:bodyPr wrap="square" lIns="18288" rIns="18288" tIns="18288" bIns="18288" anchor="t">
-            <a:spAutoFit/>
-          </a:bodyPr>
-          <a:lstStyle/>
-          <a:p>
-            <a:pPr algn="ctr"/>
-            <a:r>
-              <a:rPr sz="1030" b="1">
-                <a:solidFill>
-                  <a:srgbClr val="C46B16"/>
-                </a:solidFill>
-                <a:latin typeface="Microsoft YaHei"/>
-              </a:rPr>
-              <a:t>穿壁 / 空腔 /
-遮挡 / mask</a:t>
-            </a:r>
-          </a:p>
-        </p:txBody>
-      </p:sp>
-      <p:sp>
-        <p:nvSpPr>
-          <p:cNvPr id="26" name="Oval 25"/>
+          <p:cNvPr id="28" name="TextBox 27"/>
+          <p:cNvSpPr txBox="1"/>
+          <p:nvPr/>
+        </p:nvSpPr>
+        <p:spPr>
+          <a:xfrm>
+            <a:off x="8677656" y="4187952"/>
+            <a:ext cx="2734056" cy="164592"/>
+          </a:xfrm>
+          <a:prstGeom prst="rect">
+            <a:avLst/>
+          </a:prstGeom>
+          <a:noFill/>
+        </p:spPr>
+        <p:txBody>
+          <a:bodyPr wrap="square" lIns="18288" rIns="18288" tIns="18288" bIns="18288" anchor="t">
+            <a:spAutoFit/>
+          </a:bodyPr>
+          <a:lstStyle/>
+          <a:p>
+            <a:pPr algn="ctr"/>
+            <a:r>
+              <a:rPr sz="869" b="1">
+                <a:solidFill>
+                  <a:srgbClr val="15805D"/>
+                </a:solidFill>
+                <a:latin typeface="Microsoft YaHei"/>
+              </a:rPr>
+              <a:t>不盲目堆模型</a:t>
+            </a:r>
+          </a:p>
+        </p:txBody>
+      </p:sp>
+      <p:sp>
+        <p:nvSpPr>
+          <p:cNvPr id="29" name="Rounded Rectangle 28"/>
           <p:cNvSpPr/>
           <p:nvPr/>
         </p:nvSpPr>
         <p:spPr>
           <a:xfrm>
-            <a:off x="10067544" y="1463040"/>
-            <a:ext cx="475488" cy="475488"/>
-          </a:xfrm>
-          <a:prstGeom prst="ellipse">
+            <a:off x="877824" y="4965192"/>
+            <a:ext cx="10433304" cy="585216"/>
+          </a:xfrm>
+          <a:prstGeom prst="roundRect">
             <a:avLst/>
           </a:prstGeom>
           <a:solidFill>
-            <a:srgbClr val="15805D"/>
+            <a:srgbClr val="EEF4FF"/>
           </a:solidFill>
-          <a:ln>
+          <a:ln w="10160">
             <a:solidFill>
-              <a:srgbClr val="15805D"/>
+              <a:srgbClr val="EEF4FF"/>
             </a:solidFill>
           </a:ln>
         </p:spPr>
@@ -10632,151 +11118,36 @@
       </p:sp>
       <p:sp>
         <p:nvSpPr>
-          <p:cNvPr id="27" name="TextBox 26"/>
-          <p:cNvSpPr txBox="1"/>
-          <p:nvPr/>
-        </p:nvSpPr>
-        <p:spPr>
-          <a:xfrm>
-            <a:off x="10067544" y="1600931"/>
-            <a:ext cx="475488" cy="142646"/>
-          </a:xfrm>
-          <a:prstGeom prst="rect">
-            <a:avLst/>
-          </a:prstGeom>
-          <a:noFill/>
-        </p:spPr>
-        <p:txBody>
-          <a:bodyPr wrap="square" lIns="18288" rIns="18288" tIns="18288" bIns="18288" anchor="t">
-            <a:spAutoFit/>
-          </a:bodyPr>
-          <a:lstStyle/>
-          <a:p>
-            <a:pPr algn="ctr"/>
-            <a:r>
-              <a:rPr sz="1000" b="1">
-                <a:solidFill>
-                  <a:srgbClr val="FFFFFF"/>
-                </a:solidFill>
-                <a:latin typeface="Microsoft YaHei"/>
-              </a:rPr>
-              <a:t>4</a:t>
-            </a:r>
-          </a:p>
-        </p:txBody>
-      </p:sp>
-      <p:sp>
-        <p:nvSpPr>
-          <p:cNvPr id="28" name="TextBox 27"/>
-          <p:cNvSpPr txBox="1"/>
-          <p:nvPr/>
-        </p:nvSpPr>
-        <p:spPr>
-          <a:xfrm>
-            <a:off x="9162288" y="2221992"/>
-            <a:ext cx="2304288" cy="384048"/>
-          </a:xfrm>
-          <a:prstGeom prst="rect">
-            <a:avLst/>
-          </a:prstGeom>
-          <a:noFill/>
-        </p:spPr>
-        <p:txBody>
-          <a:bodyPr wrap="square" lIns="18288" rIns="18288" tIns="18288" bIns="18288" anchor="t">
-            <a:spAutoFit/>
-          </a:bodyPr>
-          <a:lstStyle/>
-          <a:p>
-            <a:pPr algn="ctr"/>
-            <a:r>
-              <a:rPr sz="1300" b="1">
-                <a:solidFill>
-                  <a:srgbClr val="172331"/>
-                </a:solidFill>
-                <a:latin typeface="Microsoft YaHei"/>
-              </a:rPr>
-              <a:t>训练我们的 Head</a:t>
-            </a:r>
-          </a:p>
-        </p:txBody>
-      </p:sp>
-      <p:sp>
-        <p:nvSpPr>
-          <p:cNvPr id="29" name="TextBox 28"/>
-          <p:cNvSpPr txBox="1"/>
-          <p:nvPr/>
-        </p:nvSpPr>
-        <p:spPr>
-          <a:xfrm>
-            <a:off x="9162288" y="2788920"/>
-            <a:ext cx="2304288" cy="347472"/>
-          </a:xfrm>
-          <a:prstGeom prst="rect">
-            <a:avLst/>
-          </a:prstGeom>
-          <a:noFill/>
-        </p:spPr>
-        <p:txBody>
-          <a:bodyPr wrap="square" lIns="18288" rIns="18288" tIns="18288" bIns="18288" anchor="t">
-            <a:spAutoFit/>
-          </a:bodyPr>
-          <a:lstStyle/>
-          <a:p>
-            <a:pPr algn="ctr"/>
-            <a:r>
-              <a:rPr sz="1019" b="0">
-                <a:solidFill>
-                  <a:srgbClr val="667381"/>
-                </a:solidFill>
-                <a:latin typeface="Microsoft YaHei"/>
-              </a:rPr>
-              <a:t>仅在 Gate 1 成立后</a:t>
-            </a:r>
-          </a:p>
-        </p:txBody>
-      </p:sp>
-      <p:sp>
-        <p:nvSpPr>
-          <p:cNvPr id="30" name="Rounded Rectangle 29"/>
-          <p:cNvSpPr/>
-          <p:nvPr/>
-        </p:nvSpPr>
-        <p:spPr>
-          <a:xfrm>
-            <a:off x="9253728" y="3419856"/>
-            <a:ext cx="2121408" cy="749808"/>
-          </a:xfrm>
-          <a:prstGeom prst="roundRect">
-            <a:avLst/>
-          </a:prstGeom>
-          <a:solidFill>
-            <a:srgbClr val="F5F8FA"/>
-          </a:solidFill>
-          <a:ln w="10160">
-            <a:solidFill>
-              <a:srgbClr val="F5F8FA"/>
-            </a:solidFill>
-          </a:ln>
-        </p:spPr>
-        <p:style>
-          <a:lnRef idx="1">
-            <a:schemeClr val="accent1"/>
-          </a:lnRef>
-          <a:fillRef idx="3">
-            <a:schemeClr val="accent1"/>
-          </a:fillRef>
-          <a:effectRef idx="2">
-            <a:schemeClr val="accent1"/>
-          </a:effectRef>
-          <a:fontRef idx="minor">
-            <a:schemeClr val="lt1"/>
-          </a:fontRef>
-        </p:style>
-        <p:txBody>
-          <a:bodyPr rtlCol="0" anchor="ctr"/>
-          <a:lstStyle/>
-          <a:p>
-            <a:pPr algn="ctr"/>
+          <p:cNvPr id="30" name="TextBox 29"/>
+          <p:cNvSpPr txBox="1"/>
+          <p:nvPr/>
+        </p:nvSpPr>
+        <p:spPr>
+          <a:xfrm>
+            <a:off x="1143000" y="5148072"/>
+            <a:ext cx="9902952" cy="210312"/>
+          </a:xfrm>
+          <a:prstGeom prst="rect">
+            <a:avLst/>
+          </a:prstGeom>
+          <a:noFill/>
+        </p:spPr>
+        <p:txBody>
+          <a:bodyPr wrap="square" lIns="18288" rIns="18288" tIns="18288" bIns="18288" anchor="t">
+            <a:spAutoFit/>
+          </a:bodyPr>
+          <a:lstStyle/>
+          <a:p>
+            <a:pPr algn="ctr"/>
+            <a:r>
+              <a:rPr sz="1200" b="1">
+                <a:solidFill>
+                  <a:srgbClr val="2563EB"/>
+                </a:solidFill>
+                <a:latin typeface="Microsoft YaHei"/>
+              </a:rPr>
+              <a:t>同时补齐已有方法：TransCG 剩余 12 个场景，并完成 DFNet / ReMake 全量测试。</a:t>
+            </a:r>
           </a:p>
         </p:txBody>
       </p:sp>
@@ -10788,186 +11159,36 @@
         </p:nvSpPr>
         <p:spPr>
           <a:xfrm>
-            <a:off x="9345168" y="3611880"/>
-            <a:ext cx="1938528" cy="347472"/>
-          </a:xfrm>
-          <a:prstGeom prst="rect">
-            <a:avLst/>
-          </a:prstGeom>
-          <a:noFill/>
-        </p:spPr>
-        <p:txBody>
-          <a:bodyPr wrap="square" lIns="18288" rIns="18288" tIns="18288" bIns="18288" anchor="t">
-            <a:spAutoFit/>
-          </a:bodyPr>
-          <a:lstStyle/>
-          <a:p>
-            <a:pPr algn="ctr"/>
-            <a:r>
-              <a:rPr sz="1030" b="1">
-                <a:solidFill>
-                  <a:srgbClr val="15805D"/>
-                </a:solidFill>
-                <a:latin typeface="Microsoft YaHei"/>
-              </a:rPr>
-              <a:t>DepthHypothesisPack</a:t>
-            </a:r>
-          </a:p>
-        </p:txBody>
-      </p:sp>
-      <p:sp>
-        <p:nvSpPr>
-          <p:cNvPr id="32" name="Rounded Rectangle 31"/>
-          <p:cNvSpPr/>
-          <p:nvPr/>
-        </p:nvSpPr>
-        <p:spPr>
-          <a:xfrm>
-            <a:off x="1024128" y="4837176"/>
-            <a:ext cx="10131552" cy="713232"/>
-          </a:xfrm>
-          <a:prstGeom prst="roundRect">
-            <a:avLst/>
-          </a:prstGeom>
-          <a:solidFill>
-            <a:srgbClr val="EAF6F4"/>
-          </a:solidFill>
-          <a:ln w="10160">
-            <a:solidFill>
-              <a:srgbClr val="EAF6F4"/>
-            </a:solidFill>
-          </a:ln>
-        </p:spPr>
-        <p:style>
-          <a:lnRef idx="1">
-            <a:schemeClr val="accent1"/>
-          </a:lnRef>
-          <a:fillRef idx="3">
-            <a:schemeClr val="accent1"/>
-          </a:fillRef>
-          <a:effectRef idx="2">
-            <a:schemeClr val="accent1"/>
-          </a:effectRef>
-          <a:fontRef idx="minor">
-            <a:schemeClr val="lt1"/>
-          </a:fontRef>
-        </p:style>
-        <p:txBody>
-          <a:bodyPr rtlCol="0" anchor="ctr"/>
-          <a:lstStyle/>
-          <a:p>
-            <a:pPr algn="ctr"/>
-          </a:p>
-        </p:txBody>
-      </p:sp>
-      <p:sp>
-        <p:nvSpPr>
-          <p:cNvPr id="33" name="TextBox 32"/>
-          <p:cNvSpPr txBox="1"/>
-          <p:nvPr/>
-        </p:nvSpPr>
-        <p:spPr>
-          <a:xfrm>
-            <a:off x="1271016" y="5074920"/>
-            <a:ext cx="1243584" cy="182880"/>
-          </a:xfrm>
-          <a:prstGeom prst="rect">
-            <a:avLst/>
-          </a:prstGeom>
-          <a:noFill/>
-        </p:spPr>
-        <p:txBody>
-          <a:bodyPr wrap="square" lIns="18288" rIns="18288" tIns="18288" bIns="18288" anchor="t">
-            <a:spAutoFit/>
-          </a:bodyPr>
-          <a:lstStyle/>
-          <a:p>
-            <a:pPr algn="l"/>
-            <a:r>
-              <a:rPr sz="1200" b="1">
+            <a:off x="1591056" y="5907024"/>
+            <a:ext cx="9015984" cy="256032"/>
+          </a:xfrm>
+          <a:prstGeom prst="rect">
+            <a:avLst/>
+          </a:prstGeom>
+          <a:noFill/>
+        </p:spPr>
+        <p:txBody>
+          <a:bodyPr wrap="square" lIns="18288" rIns="18288" tIns="18288" bIns="18288" anchor="t">
+            <a:spAutoFit/>
+          </a:bodyPr>
+          <a:lstStyle/>
+          <a:p>
+            <a:pPr algn="ctr"/>
+            <a:r>
+              <a:rPr sz="1540" b="1">
                 <a:solidFill>
                   <a:srgbClr val="0F766E"/>
                 </a:solidFill>
                 <a:latin typeface="Microsoft YaHei"/>
               </a:rPr>
-              <a:t>Go / No-Go</a:t>
-            </a:r>
-          </a:p>
-        </p:txBody>
-      </p:sp>
-      <p:sp>
-        <p:nvSpPr>
-          <p:cNvPr id="34" name="TextBox 33"/>
-          <p:cNvSpPr txBox="1"/>
-          <p:nvPr/>
-        </p:nvSpPr>
-        <p:spPr>
-          <a:xfrm>
-            <a:off x="2414016" y="5038344"/>
-            <a:ext cx="8375904" cy="265176"/>
-          </a:xfrm>
-          <a:prstGeom prst="rect">
-            <a:avLst/>
-          </a:prstGeom>
-          <a:noFill/>
-        </p:spPr>
-        <p:txBody>
-          <a:bodyPr wrap="square" lIns="18288" rIns="18288" tIns="18288" bIns="18288" anchor="t">
-            <a:spAutoFit/>
-          </a:bodyPr>
-          <a:lstStyle/>
-          <a:p>
-            <a:pPr algn="l"/>
-            <a:r>
-              <a:rPr sz="1400" b="1">
-                <a:solidFill>
-                  <a:srgbClr val="172331"/>
-                </a:solidFill>
-                <a:latin typeface="Microsoft YaHei"/>
-              </a:rPr>
-              <a:t>若 GT-events 不能改善固定 planner，就先修 planner / benchmark，而不是继续堆模型。</a:t>
-            </a:r>
-          </a:p>
-        </p:txBody>
-      </p:sp>
-      <p:sp>
-        <p:nvSpPr>
-          <p:cNvPr id="35" name="TextBox 34"/>
-          <p:cNvSpPr txBox="1"/>
-          <p:nvPr/>
-        </p:nvSpPr>
-        <p:spPr>
-          <a:xfrm>
-            <a:off x="2084831" y="5925312"/>
-            <a:ext cx="8010144" cy="246888"/>
-          </a:xfrm>
-          <a:prstGeom prst="rect">
-            <a:avLst/>
-          </a:prstGeom>
-          <a:noFill/>
-        </p:spPr>
-        <p:txBody>
-          <a:bodyPr wrap="square" lIns="18288" rIns="18288" tIns="18288" bIns="18288" anchor="t">
-            <a:spAutoFit/>
-          </a:bodyPr>
-          <a:lstStyle/>
-          <a:p>
-            <a:pPr algn="ctr"/>
-            <a:r>
-              <a:rPr sz="1600" b="1">
-                <a:solidFill>
-                  <a:srgbClr val="0F766E"/>
-                </a:solidFill>
-                <a:latin typeface="Microsoft YaHei"/>
-              </a:rPr>
-              <a:t>我们真正要证明的是：多层几何 → 更少的抓取规划错误。</a:t>
-            </a:r>
-          </a:p>
-        </p:txBody>
-      </p:sp>
-      <p:sp>
-        <p:nvSpPr>
-          <p:cNvPr id="36" name="TextBox 35"/>
+              <a:t>最终要证明的不是“深度图更漂亮”，而是“机械臂少犯抓取错误”。</a:t>
+            </a:r>
+          </a:p>
+        </p:txBody>
+      </p:sp>
+      <p:sp>
+        <p:nvSpPr>
+          <p:cNvPr id="32" name="TextBox 31"/>
           <p:cNvSpPr txBox="1"/>
           <p:nvPr/>
         </p:nvSpPr>
@@ -10995,7 +11216,7 @@
                 </a:solidFill>
                 <a:latin typeface="Microsoft YaHei"/>
               </a:rPr>
-              <a:t>TransCG 下载仍以断点续传方式轮询 Google Drive 配额。</a:t>
+              <a:t>先用真实几何验证价值，再投入训练 DepthHypothesisPack。</a:t>
             </a:r>
           </a:p>
         </p:txBody>

--- a/透明物体/汇报/透明物体多层深度_简洁汇报_2026-08-08.pptx
+++ b/透明物体/汇报/透明物体多层深度_简洁汇报_2026-08-08.pptx
@@ -12,6 +12,8 @@
     <p:sldId id="260" r:id="rId11"/>
     <p:sldId id="261" r:id="rId12"/>
     <p:sldId id="262" r:id="rId13"/>
+    <p:sldId id="263" r:id="rId14"/>
+    <p:sldId id="264" r:id="rId15"/>
   </p:sldIdLst>
   <p:sldSz cx="12191695" cy="6858000" type="screen4x3"/>
   <p:notesSz cx="6858000" cy="9144000"/>
@@ -7365,7 +7367,7 @@
                 </a:solidFill>
                 <a:latin typeface="Microsoft YaHei"/>
               </a:rPr>
-              <a:t>Idea：DepthHypothesisPack</a:t>
+              <a:t>候选技术路线：多界面薄壳表示</a:t>
             </a:r>
           </a:p>
         </p:txBody>
@@ -7414,7 +7416,7 @@
         <p:spPr>
           <a:xfrm>
             <a:off x="557784" y="1078992"/>
-            <a:ext cx="8046720" cy="237744"/>
+            <a:ext cx="9875520" cy="237744"/>
           </a:xfrm>
           <a:prstGeom prst="rect">
             <a:avLst/>
@@ -7429,13 +7431,13 @@
           <a:p>
             <a:pPr algn="l"/>
             <a:r>
-              <a:rPr sz="1400" b="0">
+              <a:rPr sz="1350" b="0">
                 <a:solidFill>
                   <a:srgbClr val="667381"/>
                 </a:solidFill>
                 <a:latin typeface="Microsoft YaHei"/>
               </a:rPr>
-              <a:t>把感知模型输出变成规划器能直接使用的薄壳事件。</a:t>
+              <a:t>每个像素不再只有一个深度，而是保留由近到远的界面、类型和不确定性。</a:t>
             </a:r>
           </a:p>
         </p:txBody>
@@ -7448,8 +7450,88 @@
         </p:nvSpPr>
         <p:spPr>
           <a:xfrm>
-            <a:off x="676656" y="1911095"/>
-            <a:ext cx="2139696" cy="1920240"/>
+            <a:off x="9070848" y="1033271"/>
+            <a:ext cx="2468880" cy="292608"/>
+          </a:xfrm>
+          <a:prstGeom prst="roundRect">
+            <a:avLst/>
+          </a:prstGeom>
+          <a:solidFill>
+            <a:srgbClr val="EAF6F4"/>
+          </a:solidFill>
+          <a:ln w="10160">
+            <a:solidFill>
+              <a:srgbClr val="EAF6F4"/>
+            </a:solidFill>
+          </a:ln>
+        </p:spPr>
+        <p:style>
+          <a:lnRef idx="1">
+            <a:schemeClr val="accent1"/>
+          </a:lnRef>
+          <a:fillRef idx="3">
+            <a:schemeClr val="accent1"/>
+          </a:fillRef>
+          <a:effectRef idx="2">
+            <a:schemeClr val="accent1"/>
+          </a:effectRef>
+          <a:fontRef idx="minor">
+            <a:schemeClr val="lt1"/>
+          </a:fontRef>
+        </p:style>
+        <p:txBody>
+          <a:bodyPr rtlCol="0" anchor="ctr"/>
+          <a:lstStyle/>
+          <a:p>
+            <a:pPr algn="ctr"/>
+          </a:p>
+        </p:txBody>
+      </p:sp>
+      <p:sp>
+        <p:nvSpPr>
+          <p:cNvPr id="7" name="TextBox 6"/>
+          <p:cNvSpPr txBox="1"/>
+          <p:nvPr/>
+        </p:nvSpPr>
+        <p:spPr>
+          <a:xfrm>
+            <a:off x="9070848" y="1101851"/>
+            <a:ext cx="2468880" cy="118872"/>
+          </a:xfrm>
+          <a:prstGeom prst="rect">
+            <a:avLst/>
+          </a:prstGeom>
+          <a:noFill/>
+        </p:spPr>
+        <p:txBody>
+          <a:bodyPr wrap="square" lIns="18288" rIns="18288" tIns="18288" bIns="18288" anchor="t">
+            <a:spAutoFit/>
+          </a:bodyPr>
+          <a:lstStyle/>
+          <a:p>
+            <a:pPr algn="ctr"/>
+            <a:r>
+              <a:rPr sz="880" b="1">
+                <a:solidFill>
+                  <a:srgbClr val="0F766E"/>
+                </a:solidFill>
+                <a:latin typeface="Microsoft YaHei"/>
+              </a:rPr>
+              <a:t>候选名称：DepthHypothesisPack</a:t>
+            </a:r>
+          </a:p>
+        </p:txBody>
+      </p:sp>
+      <p:sp>
+        <p:nvSpPr>
+          <p:cNvPr id="8" name="Rounded Rectangle 7"/>
+          <p:cNvSpPr/>
+          <p:nvPr/>
+        </p:nvSpPr>
+        <p:spPr>
+          <a:xfrm>
+            <a:off x="676656" y="1627632"/>
+            <a:ext cx="2212848" cy="1298448"/>
           </a:xfrm>
           <a:prstGeom prst="roundRect">
             <a:avLst/>
@@ -7487,14 +7569,14 @@
       </p:sp>
       <p:sp>
         <p:nvSpPr>
-          <p:cNvPr id="7" name="Rectangle 6"/>
+          <p:cNvPr id="9" name="Rectangle 8"/>
           <p:cNvSpPr/>
           <p:nvPr/>
         </p:nvSpPr>
         <p:spPr>
           <a:xfrm>
-            <a:off x="676656" y="1911095"/>
-            <a:ext cx="64008" cy="1920240"/>
+            <a:off x="676656" y="1627632"/>
+            <a:ext cx="64008" cy="1298448"/>
           </a:xfrm>
           <a:prstGeom prst="rect">
             <a:avLst/>
@@ -7532,29 +7614,29 @@
       </p:sp>
       <p:sp>
         <p:nvSpPr>
-          <p:cNvPr id="8" name="TextBox 7"/>
-          <p:cNvSpPr txBox="1"/>
-          <p:nvPr/>
-        </p:nvSpPr>
-        <p:spPr>
-          <a:xfrm>
-            <a:off x="905256" y="2203703"/>
-            <a:ext cx="1700784" cy="265176"/>
-          </a:xfrm>
-          <a:prstGeom prst="rect">
-            <a:avLst/>
-          </a:prstGeom>
-          <a:noFill/>
-        </p:spPr>
-        <p:txBody>
-          <a:bodyPr wrap="square" lIns="18288" rIns="18288" tIns="18288" bIns="18288" anchor="t">
-            <a:spAutoFit/>
-          </a:bodyPr>
-          <a:lstStyle/>
-          <a:p>
-            <a:pPr algn="ctr"/>
-            <a:r>
-              <a:rPr sz="1500" b="1">
+          <p:cNvPr id="10" name="TextBox 9"/>
+          <p:cNvSpPr txBox="1"/>
+          <p:nvPr/>
+        </p:nvSpPr>
+        <p:spPr>
+          <a:xfrm>
+            <a:off x="896112" y="1856232"/>
+            <a:ext cx="1783080" cy="246888"/>
+          </a:xfrm>
+          <a:prstGeom prst="rect">
+            <a:avLst/>
+          </a:prstGeom>
+          <a:noFill/>
+        </p:spPr>
+        <p:txBody>
+          <a:bodyPr wrap="square" lIns="18288" rIns="18288" tIns="18288" bIns="18288" anchor="t">
+            <a:spAutoFit/>
+          </a:bodyPr>
+          <a:lstStyle/>
+          <a:p>
+            <a:pPr algn="ctr"/>
+            <a:r>
+              <a:rPr sz="1400" b="1">
                 <a:solidFill>
                   <a:srgbClr val="172331"/>
                 </a:solidFill>
@@ -7567,49 +7649,50 @@
       </p:sp>
       <p:sp>
         <p:nvSpPr>
-          <p:cNvPr id="9" name="TextBox 8"/>
-          <p:cNvSpPr txBox="1"/>
-          <p:nvPr/>
-        </p:nvSpPr>
-        <p:spPr>
-          <a:xfrm>
-            <a:off x="905256" y="2825496"/>
-            <a:ext cx="1700784" cy="457200"/>
-          </a:xfrm>
-          <a:prstGeom prst="rect">
-            <a:avLst/>
-          </a:prstGeom>
-          <a:noFill/>
-        </p:spPr>
-        <p:txBody>
-          <a:bodyPr wrap="square" lIns="18288" rIns="18288" tIns="18288" bIns="18288" anchor="t">
-            <a:spAutoFit/>
-          </a:bodyPr>
-          <a:lstStyle/>
-          <a:p>
-            <a:pPr algn="ctr"/>
-            <a:r>
-              <a:rPr sz="1200" b="0">
+          <p:cNvPr id="11" name="TextBox 10"/>
+          <p:cNvSpPr txBox="1"/>
+          <p:nvPr/>
+        </p:nvSpPr>
+        <p:spPr>
+          <a:xfrm>
+            <a:off x="896112" y="2322576"/>
+            <a:ext cx="1783080" cy="374904"/>
+          </a:xfrm>
+          <a:prstGeom prst="rect">
+            <a:avLst/>
+          </a:prstGeom>
+          <a:noFill/>
+        </p:spPr>
+        <p:txBody>
+          <a:bodyPr wrap="square" lIns="18288" rIns="18288" tIns="18288" bIns="18288" anchor="t">
+            <a:spAutoFit/>
+          </a:bodyPr>
+          <a:lstStyle/>
+          <a:p>
+            <a:pPr algn="ctr"/>
+            <a:r>
+              <a:rPr sz="1050" b="0">
                 <a:solidFill>
                   <a:srgbClr val="667381"/>
                 </a:solidFill>
                 <a:latin typeface="Microsoft YaHei"/>
               </a:rPr>
-              <a:t>RGB-D + mask</a:t>
-            </a:r>
-          </a:p>
-        </p:txBody>
-      </p:sp>
-      <p:sp>
-        <p:nvSpPr>
-          <p:cNvPr id="10" name="Rounded Rectangle 9"/>
+              <a:t>RGB + 原始深度
++ 物体区域</a:t>
+            </a:r>
+          </a:p>
+        </p:txBody>
+      </p:sp>
+      <p:sp>
+        <p:nvSpPr>
+          <p:cNvPr id="12" name="Rounded Rectangle 11"/>
           <p:cNvSpPr/>
           <p:nvPr/>
         </p:nvSpPr>
         <p:spPr>
           <a:xfrm>
-            <a:off x="3685032" y="1911095"/>
-            <a:ext cx="3694176" cy="1920240"/>
+            <a:off x="3657600" y="1627632"/>
+            <a:ext cx="3822191" cy="1298448"/>
           </a:xfrm>
           <a:prstGeom prst="roundRect">
             <a:avLst/>
@@ -7647,14 +7730,14 @@
       </p:sp>
       <p:sp>
         <p:nvSpPr>
-          <p:cNvPr id="11" name="Rectangle 10"/>
+          <p:cNvPr id="13" name="Rectangle 12"/>
           <p:cNvSpPr/>
           <p:nvPr/>
         </p:nvSpPr>
         <p:spPr>
           <a:xfrm>
-            <a:off x="3685032" y="1911095"/>
-            <a:ext cx="64008" cy="1920240"/>
+            <a:off x="3657600" y="1627632"/>
+            <a:ext cx="64008" cy="1298448"/>
           </a:xfrm>
           <a:prstGeom prst="rect">
             <a:avLst/>
@@ -7692,84 +7775,84 @@
       </p:sp>
       <p:sp>
         <p:nvSpPr>
-          <p:cNvPr id="12" name="TextBox 11"/>
-          <p:cNvSpPr txBox="1"/>
-          <p:nvPr/>
-        </p:nvSpPr>
-        <p:spPr>
-          <a:xfrm>
-            <a:off x="3913632" y="2203703"/>
-            <a:ext cx="3255264" cy="265176"/>
-          </a:xfrm>
-          <a:prstGeom prst="rect">
-            <a:avLst/>
-          </a:prstGeom>
-          <a:noFill/>
-        </p:spPr>
-        <p:txBody>
-          <a:bodyPr wrap="square" lIns="18288" rIns="18288" tIns="18288" bIns="18288" anchor="t">
-            <a:spAutoFit/>
-          </a:bodyPr>
-          <a:lstStyle/>
-          <a:p>
-            <a:pPr algn="ctr"/>
-            <a:r>
-              <a:rPr sz="1500" b="1">
+          <p:cNvPr id="14" name="TextBox 13"/>
+          <p:cNvSpPr txBox="1"/>
+          <p:nvPr/>
+        </p:nvSpPr>
+        <p:spPr>
+          <a:xfrm>
+            <a:off x="3877056" y="1856232"/>
+            <a:ext cx="3392424" cy="246888"/>
+          </a:xfrm>
+          <a:prstGeom prst="rect">
+            <a:avLst/>
+          </a:prstGeom>
+          <a:noFill/>
+        </p:spPr>
+        <p:txBody>
+          <a:bodyPr wrap="square" lIns="18288" rIns="18288" tIns="18288" bIns="18288" anchor="t">
+            <a:spAutoFit/>
+          </a:bodyPr>
+          <a:lstStyle/>
+          <a:p>
+            <a:pPr algn="ctr"/>
+            <a:r>
+              <a:rPr sz="1400" b="1">
                 <a:solidFill>
                   <a:srgbClr val="172331"/>
                 </a:solidFill>
                 <a:latin typeface="Microsoft YaHei"/>
               </a:rPr>
-              <a:t>DepthHypothesisPack</a:t>
-            </a:r>
-          </a:p>
-        </p:txBody>
-      </p:sp>
-      <p:sp>
-        <p:nvSpPr>
-          <p:cNvPr id="13" name="TextBox 12"/>
-          <p:cNvSpPr txBox="1"/>
-          <p:nvPr/>
-        </p:nvSpPr>
-        <p:spPr>
-          <a:xfrm>
-            <a:off x="3913632" y="2825496"/>
-            <a:ext cx="3255264" cy="457200"/>
-          </a:xfrm>
-          <a:prstGeom prst="rect">
-            <a:avLst/>
-          </a:prstGeom>
-          <a:noFill/>
-        </p:spPr>
-        <p:txBody>
-          <a:bodyPr wrap="square" lIns="18288" rIns="18288" tIns="18288" bIns="18288" anchor="t">
-            <a:spAutoFit/>
-          </a:bodyPr>
-          <a:lstStyle/>
-          <a:p>
-            <a:pPr algn="ctr"/>
-            <a:r>
-              <a:rPr sz="1200" b="0">
+              <a:t>多界面事件包</a:t>
+            </a:r>
+          </a:p>
+        </p:txBody>
+      </p:sp>
+      <p:sp>
+        <p:nvSpPr>
+          <p:cNvPr id="15" name="TextBox 14"/>
+          <p:cNvSpPr txBox="1"/>
+          <p:nvPr/>
+        </p:nvSpPr>
+        <p:spPr>
+          <a:xfrm>
+            <a:off x="3877056" y="2322576"/>
+            <a:ext cx="3392424" cy="374904"/>
+          </a:xfrm>
+          <a:prstGeom prst="rect">
+            <a:avLst/>
+          </a:prstGeom>
+          <a:noFill/>
+        </p:spPr>
+        <p:txBody>
+          <a:bodyPr wrap="square" lIns="18288" rIns="18288" tIns="18288" bIns="18288" anchor="t">
+            <a:spAutoFit/>
+          </a:bodyPr>
+          <a:lstStyle/>
+          <a:p>
+            <a:pPr algn="ctr"/>
+            <a:r>
+              <a:rPr sz="1050" b="0">
                 <a:solidFill>
                   <a:srgbClr val="667381"/>
                 </a:solidFill>
                 <a:latin typeface="Microsoft YaHei"/>
               </a:rPr>
-              <a:t>[d¹, d², d³, d⁴] + 类型 / 置信度</a:t>
-            </a:r>
-          </a:p>
-        </p:txBody>
-      </p:sp>
-      <p:sp>
-        <p:nvSpPr>
-          <p:cNvPr id="14" name="Rounded Rectangle 13"/>
+              <a:t>[深度, 存在, 类型, 不确定性] × K</a:t>
+            </a:r>
+          </a:p>
+        </p:txBody>
+      </p:sp>
+      <p:sp>
+        <p:nvSpPr>
+          <p:cNvPr id="16" name="Rounded Rectangle 15"/>
           <p:cNvSpPr/>
           <p:nvPr/>
         </p:nvSpPr>
         <p:spPr>
           <a:xfrm>
-            <a:off x="8257031" y="1911095"/>
-            <a:ext cx="3255264" cy="1920240"/>
+            <a:off x="8247888" y="1627632"/>
+            <a:ext cx="3273552" cy="1298448"/>
           </a:xfrm>
           <a:prstGeom prst="roundRect">
             <a:avLst/>
@@ -7807,14 +7890,14 @@
       </p:sp>
       <p:sp>
         <p:nvSpPr>
-          <p:cNvPr id="15" name="Rectangle 14"/>
+          <p:cNvPr id="17" name="Rectangle 16"/>
           <p:cNvSpPr/>
           <p:nvPr/>
         </p:nvSpPr>
         <p:spPr>
           <a:xfrm>
-            <a:off x="8257031" y="1911095"/>
-            <a:ext cx="64008" cy="1920240"/>
+            <a:off x="8247888" y="1627632"/>
+            <a:ext cx="64008" cy="1298448"/>
           </a:xfrm>
           <a:prstGeom prst="rect">
             <a:avLst/>
@@ -7852,83 +7935,84 @@
       </p:sp>
       <p:sp>
         <p:nvSpPr>
-          <p:cNvPr id="16" name="TextBox 15"/>
-          <p:cNvSpPr txBox="1"/>
-          <p:nvPr/>
-        </p:nvSpPr>
-        <p:spPr>
-          <a:xfrm>
-            <a:off x="8485632" y="2203703"/>
-            <a:ext cx="2816352" cy="265176"/>
-          </a:xfrm>
-          <a:prstGeom prst="rect">
-            <a:avLst/>
-          </a:prstGeom>
-          <a:noFill/>
-        </p:spPr>
-        <p:txBody>
-          <a:bodyPr wrap="square" lIns="18288" rIns="18288" tIns="18288" bIns="18288" anchor="t">
-            <a:spAutoFit/>
-          </a:bodyPr>
-          <a:lstStyle/>
-          <a:p>
-            <a:pPr algn="ctr"/>
-            <a:r>
-              <a:rPr sz="1500" b="1">
+          <p:cNvPr id="18" name="TextBox 17"/>
+          <p:cNvSpPr txBox="1"/>
+          <p:nvPr/>
+        </p:nvSpPr>
+        <p:spPr>
+          <a:xfrm>
+            <a:off x="8467344" y="1856232"/>
+            <a:ext cx="2843784" cy="246888"/>
+          </a:xfrm>
+          <a:prstGeom prst="rect">
+            <a:avLst/>
+          </a:prstGeom>
+          <a:noFill/>
+        </p:spPr>
+        <p:txBody>
+          <a:bodyPr wrap="square" lIns="18288" rIns="18288" tIns="18288" bIns="18288" anchor="t">
+            <a:spAutoFit/>
+          </a:bodyPr>
+          <a:lstStyle/>
+          <a:p>
+            <a:pPr algn="ctr"/>
+            <a:r>
+              <a:rPr sz="1400" b="1">
                 <a:solidFill>
                   <a:srgbClr val="172331"/>
                 </a:solidFill>
                 <a:latin typeface="Microsoft YaHei"/>
               </a:rPr>
-              <a:t>Shell-aware planner</a:t>
-            </a:r>
-          </a:p>
-        </p:txBody>
-      </p:sp>
-      <p:sp>
-        <p:nvSpPr>
-          <p:cNvPr id="17" name="TextBox 16"/>
-          <p:cNvSpPr txBox="1"/>
-          <p:nvPr/>
-        </p:nvSpPr>
-        <p:spPr>
-          <a:xfrm>
-            <a:off x="8485632" y="2825496"/>
-            <a:ext cx="2816352" cy="457200"/>
-          </a:xfrm>
-          <a:prstGeom prst="rect">
-            <a:avLst/>
-          </a:prstGeom>
-          <a:noFill/>
-        </p:spPr>
-        <p:txBody>
-          <a:bodyPr wrap="square" lIns="18288" rIns="18288" tIns="18288" bIns="18288" anchor="t">
-            <a:spAutoFit/>
-          </a:bodyPr>
-          <a:lstStyle/>
-          <a:p>
-            <a:pPr algn="ctr"/>
-            <a:r>
-              <a:rPr sz="1200" b="0">
+              <a:t>薄壳几何与规划</a:t>
+            </a:r>
+          </a:p>
+        </p:txBody>
+      </p:sp>
+      <p:sp>
+        <p:nvSpPr>
+          <p:cNvPr id="19" name="TextBox 18"/>
+          <p:cNvSpPr txBox="1"/>
+          <p:nvPr/>
+        </p:nvSpPr>
+        <p:spPr>
+          <a:xfrm>
+            <a:off x="8467344" y="2322576"/>
+            <a:ext cx="2843784" cy="374904"/>
+          </a:xfrm>
+          <a:prstGeom prst="rect">
+            <a:avLst/>
+          </a:prstGeom>
+          <a:noFill/>
+        </p:spPr>
+        <p:txBody>
+          <a:bodyPr wrap="square" lIns="18288" rIns="18288" tIns="18288" bIns="18288" anchor="t">
+            <a:spAutoFit/>
+          </a:bodyPr>
+          <a:lstStyle/>
+          <a:p>
+            <a:pPr algn="ctr"/>
+            <a:r>
+              <a:rPr sz="1050" b="0">
                 <a:solidFill>
                   <a:srgbClr val="667381"/>
                 </a:solidFill>
                 <a:latin typeface="Microsoft YaHei"/>
               </a:rPr>
-              <a:t>碰撞、空腔、可达性检查</a:t>
-            </a:r>
-          </a:p>
-        </p:txBody>
-      </p:sp>
-      <p:sp>
-        <p:nvSpPr>
-          <p:cNvPr id="18" name="Chevron 17"/>
+              <a:t>外壁 / 内壁 / 空腔 / 开口
+碰撞与可达性检查</a:t>
+            </a:r>
+          </a:p>
+        </p:txBody>
+      </p:sp>
+      <p:sp>
+        <p:nvSpPr>
+          <p:cNvPr id="20" name="Chevron 19"/>
           <p:cNvSpPr/>
           <p:nvPr/>
         </p:nvSpPr>
         <p:spPr>
           <a:xfrm>
-            <a:off x="3054096" y="2578608"/>
+            <a:off x="3054096" y="2011680"/>
             <a:ext cx="365760" cy="493776"/>
           </a:xfrm>
           <a:prstGeom prst="chevron">
@@ -7967,13 +8051,13 @@
       </p:sp>
       <p:sp>
         <p:nvSpPr>
-          <p:cNvPr id="19" name="Chevron 18"/>
+          <p:cNvPr id="21" name="Chevron 20"/>
           <p:cNvSpPr/>
           <p:nvPr/>
         </p:nvSpPr>
         <p:spPr>
           <a:xfrm>
-            <a:off x="7626096" y="2578608"/>
+            <a:off x="7626096" y="2011680"/>
             <a:ext cx="365760" cy="493776"/>
           </a:xfrm>
           <a:prstGeom prst="chevron">
@@ -8012,154 +8096,14 @@
       </p:sp>
       <p:sp>
         <p:nvSpPr>
-          <p:cNvPr id="20" name="TextBox 19"/>
-          <p:cNvSpPr txBox="1"/>
-          <p:nvPr/>
-        </p:nvSpPr>
-        <p:spPr>
-          <a:xfrm>
-            <a:off x="4114800" y="3017520"/>
-            <a:ext cx="475488" cy="201168"/>
-          </a:xfrm>
-          <a:prstGeom prst="rect">
-            <a:avLst/>
-          </a:prstGeom>
-          <a:noFill/>
-        </p:spPr>
-        <p:txBody>
-          <a:bodyPr wrap="square" lIns="18288" rIns="18288" tIns="18288" bIns="18288" anchor="t">
-            <a:spAutoFit/>
-          </a:bodyPr>
-          <a:lstStyle/>
-          <a:p>
-            <a:pPr algn="ctr"/>
-            <a:r>
-              <a:rPr sz="1300" b="1">
-                <a:solidFill>
-                  <a:srgbClr val="2563EB"/>
-                </a:solidFill>
-                <a:latin typeface="Microsoft YaHei"/>
-              </a:rPr>
-              <a:t>d¹</a:t>
-            </a:r>
-          </a:p>
-        </p:txBody>
-      </p:sp>
-      <p:sp>
-        <p:nvSpPr>
-          <p:cNvPr id="21" name="TextBox 20"/>
-          <p:cNvSpPr txBox="1"/>
-          <p:nvPr/>
-        </p:nvSpPr>
-        <p:spPr>
-          <a:xfrm>
-            <a:off x="4727448" y="3017520"/>
-            <a:ext cx="475488" cy="201168"/>
-          </a:xfrm>
-          <a:prstGeom prst="rect">
-            <a:avLst/>
-          </a:prstGeom>
-          <a:noFill/>
-        </p:spPr>
-        <p:txBody>
-          <a:bodyPr wrap="square" lIns="18288" rIns="18288" tIns="18288" bIns="18288" anchor="t">
-            <a:spAutoFit/>
-          </a:bodyPr>
-          <a:lstStyle/>
-          <a:p>
-            <a:pPr algn="ctr"/>
-            <a:r>
-              <a:rPr sz="1300" b="1">
-                <a:solidFill>
-                  <a:srgbClr val="0F766E"/>
-                </a:solidFill>
-                <a:latin typeface="Microsoft YaHei"/>
-              </a:rPr>
-              <a:t>d²</a:t>
-            </a:r>
-          </a:p>
-        </p:txBody>
-      </p:sp>
-      <p:sp>
-        <p:nvSpPr>
-          <p:cNvPr id="22" name="TextBox 21"/>
-          <p:cNvSpPr txBox="1"/>
-          <p:nvPr/>
-        </p:nvSpPr>
-        <p:spPr>
-          <a:xfrm>
-            <a:off x="5340096" y="3017520"/>
-            <a:ext cx="475488" cy="201168"/>
-          </a:xfrm>
-          <a:prstGeom prst="rect">
-            <a:avLst/>
-          </a:prstGeom>
-          <a:noFill/>
-        </p:spPr>
-        <p:txBody>
-          <a:bodyPr wrap="square" lIns="18288" rIns="18288" tIns="18288" bIns="18288" anchor="t">
-            <a:spAutoFit/>
-          </a:bodyPr>
-          <a:lstStyle/>
-          <a:p>
-            <a:pPr algn="ctr"/>
-            <a:r>
-              <a:rPr sz="1300" b="1">
-                <a:solidFill>
-                  <a:srgbClr val="C46B16"/>
-                </a:solidFill>
-                <a:latin typeface="Microsoft YaHei"/>
-              </a:rPr>
-              <a:t>d³</a:t>
-            </a:r>
-          </a:p>
-        </p:txBody>
-      </p:sp>
-      <p:sp>
-        <p:nvSpPr>
-          <p:cNvPr id="23" name="TextBox 22"/>
-          <p:cNvSpPr txBox="1"/>
-          <p:nvPr/>
-        </p:nvSpPr>
-        <p:spPr>
-          <a:xfrm>
-            <a:off x="5952744" y="3017520"/>
-            <a:ext cx="475488" cy="201168"/>
-          </a:xfrm>
-          <a:prstGeom prst="rect">
-            <a:avLst/>
-          </a:prstGeom>
-          <a:noFill/>
-        </p:spPr>
-        <p:txBody>
-          <a:bodyPr wrap="square" lIns="18288" rIns="18288" tIns="18288" bIns="18288" anchor="t">
-            <a:spAutoFit/>
-          </a:bodyPr>
-          <a:lstStyle/>
-          <a:p>
-            <a:pPr algn="ctr"/>
-            <a:r>
-              <a:rPr sz="1300" b="1">
-                <a:solidFill>
-                  <a:srgbClr val="15805D"/>
-                </a:solidFill>
-                <a:latin typeface="Microsoft YaHei"/>
-              </a:rPr>
-              <a:t>d⁴</a:t>
-            </a:r>
-          </a:p>
-        </p:txBody>
-      </p:sp>
-      <p:sp>
-        <p:nvSpPr>
-          <p:cNvPr id="24" name="Rounded Rectangle 23"/>
+          <p:cNvPr id="22" name="Rounded Rectangle 21"/>
           <p:cNvSpPr/>
           <p:nvPr/>
         </p:nvSpPr>
         <p:spPr>
           <a:xfrm>
-            <a:off x="813816" y="4590288"/>
-            <a:ext cx="10588752" cy="1115568"/>
+            <a:off x="804672" y="3246120"/>
+            <a:ext cx="10579608" cy="1408176"/>
           </a:xfrm>
           <a:prstGeom prst="roundRect">
             <a:avLst/>
@@ -8197,14 +8141,14 @@
       </p:sp>
       <p:sp>
         <p:nvSpPr>
-          <p:cNvPr id="25" name="TextBox 24"/>
-          <p:cNvSpPr txBox="1"/>
-          <p:nvPr/>
-        </p:nvSpPr>
-        <p:spPr>
-          <a:xfrm>
-            <a:off x="1078992" y="4837176"/>
-            <a:ext cx="3749039" cy="237744"/>
+          <p:cNvPr id="23" name="TextBox 22"/>
+          <p:cNvSpPr txBox="1"/>
+          <p:nvPr/>
+        </p:nvSpPr>
+        <p:spPr>
+          <a:xfrm>
+            <a:off x="1051560" y="3483864"/>
+            <a:ext cx="1920240" cy="201168"/>
           </a:xfrm>
           <a:prstGeom prst="rect">
             <a:avLst/>
@@ -8219,27 +8163,777 @@
           <a:p>
             <a:pPr algn="l"/>
             <a:r>
-              <a:rPr sz="1500" b="1">
+              <a:rPr sz="1150" b="1">
                 <a:solidFill>
                   <a:srgbClr val="172331"/>
                 </a:solidFill>
                 <a:latin typeface="Microsoft YaHei"/>
               </a:rPr>
-              <a:t>关键不是“多输出几张 depth map”</a:t>
-            </a:r>
-          </a:p>
-        </p:txBody>
-      </p:sp>
-      <p:sp>
-        <p:nvSpPr>
-          <p:cNvPr id="26" name="TextBox 25"/>
-          <p:cNvSpPr txBox="1"/>
-          <p:nvPr/>
-        </p:nvSpPr>
-        <p:spPr>
-          <a:xfrm>
-            <a:off x="4654296" y="4828032"/>
-            <a:ext cx="6373368" cy="411480"/>
+              <a:t>同一像素的一条相机射线</a:t>
+            </a:r>
+          </a:p>
+        </p:txBody>
+      </p:sp>
+      <p:cxnSp>
+        <p:nvCxnSpPr>
+          <p:cNvPr id="24" name="Connector 23"/>
+          <p:cNvCxnSpPr/>
+          <p:nvPr/>
+        </p:nvCxnSpPr>
+        <p:spPr>
+          <a:xfrm>
+            <a:off x="2788920" y="3822191"/>
+            <a:ext cx="7799832" cy="0"/>
+          </a:xfrm>
+          <a:prstGeom prst="line">
+            <a:avLst/>
+          </a:prstGeom>
+          <a:ln w="16510">
+            <a:solidFill>
+              <a:srgbClr val="667381"/>
+            </a:solidFill>
+          </a:ln>
+        </p:spPr>
+        <p:style>
+          <a:lnRef idx="2">
+            <a:schemeClr val="accent1"/>
+          </a:lnRef>
+          <a:fillRef idx="0">
+            <a:schemeClr val="accent1"/>
+          </a:fillRef>
+          <a:effectRef idx="1">
+            <a:schemeClr val="accent1"/>
+          </a:effectRef>
+          <a:fontRef idx="minor">
+            <a:schemeClr val="tx1"/>
+          </a:fontRef>
+        </p:style>
+      </p:cxnSp>
+      <p:cxnSp>
+        <p:nvCxnSpPr>
+          <p:cNvPr id="25" name="Connector 24"/>
+          <p:cNvCxnSpPr/>
+          <p:nvPr/>
+        </p:nvCxnSpPr>
+        <p:spPr>
+          <a:xfrm>
+            <a:off x="3767328" y="3822191"/>
+            <a:ext cx="1060704" cy="0"/>
+          </a:xfrm>
+          <a:prstGeom prst="line">
+            <a:avLst/>
+          </a:prstGeom>
+          <a:ln w="63500">
+            <a:solidFill>
+              <a:srgbClr val="C46B16"/>
+            </a:solidFill>
+          </a:ln>
+        </p:spPr>
+        <p:style>
+          <a:lnRef idx="2">
+            <a:schemeClr val="accent1"/>
+          </a:lnRef>
+          <a:fillRef idx="0">
+            <a:schemeClr val="accent1"/>
+          </a:fillRef>
+          <a:effectRef idx="1">
+            <a:schemeClr val="accent1"/>
+          </a:effectRef>
+          <a:fontRef idx="minor">
+            <a:schemeClr val="tx1"/>
+          </a:fontRef>
+        </p:style>
+      </p:cxnSp>
+      <p:cxnSp>
+        <p:nvCxnSpPr>
+          <p:cNvPr id="26" name="Connector 25"/>
+          <p:cNvCxnSpPr/>
+          <p:nvPr/>
+        </p:nvCxnSpPr>
+        <p:spPr>
+          <a:xfrm>
+            <a:off x="4828032" y="3822191"/>
+            <a:ext cx="3310128" cy="0"/>
+          </a:xfrm>
+          <a:prstGeom prst="line">
+            <a:avLst/>
+          </a:prstGeom>
+          <a:ln w="63500">
+            <a:solidFill>
+              <a:srgbClr val="0F766E"/>
+            </a:solidFill>
+          </a:ln>
+        </p:spPr>
+        <p:style>
+          <a:lnRef idx="2">
+            <a:schemeClr val="accent1"/>
+          </a:lnRef>
+          <a:fillRef idx="0">
+            <a:schemeClr val="accent1"/>
+          </a:fillRef>
+          <a:effectRef idx="1">
+            <a:schemeClr val="accent1"/>
+          </a:effectRef>
+          <a:fontRef idx="minor">
+            <a:schemeClr val="tx1"/>
+          </a:fontRef>
+        </p:style>
+      </p:cxnSp>
+      <p:cxnSp>
+        <p:nvCxnSpPr>
+          <p:cNvPr id="27" name="Connector 26"/>
+          <p:cNvCxnSpPr/>
+          <p:nvPr/>
+        </p:nvCxnSpPr>
+        <p:spPr>
+          <a:xfrm>
+            <a:off x="8138160" y="3822191"/>
+            <a:ext cx="1060704" cy="0"/>
+          </a:xfrm>
+          <a:prstGeom prst="line">
+            <a:avLst/>
+          </a:prstGeom>
+          <a:ln w="63500">
+            <a:solidFill>
+              <a:srgbClr val="C46B16"/>
+            </a:solidFill>
+          </a:ln>
+        </p:spPr>
+        <p:style>
+          <a:lnRef idx="2">
+            <a:schemeClr val="accent1"/>
+          </a:lnRef>
+          <a:fillRef idx="0">
+            <a:schemeClr val="accent1"/>
+          </a:fillRef>
+          <a:effectRef idx="1">
+            <a:schemeClr val="accent1"/>
+          </a:effectRef>
+          <a:fontRef idx="minor">
+            <a:schemeClr val="tx1"/>
+          </a:fontRef>
+        </p:style>
+      </p:cxnSp>
+      <p:sp>
+        <p:nvSpPr>
+          <p:cNvPr id="28" name="Oval 27"/>
+          <p:cNvSpPr/>
+          <p:nvPr/>
+        </p:nvSpPr>
+        <p:spPr>
+          <a:xfrm>
+            <a:off x="3648456" y="3694176"/>
+            <a:ext cx="256032" cy="256032"/>
+          </a:xfrm>
+          <a:prstGeom prst="ellipse">
+            <a:avLst/>
+          </a:prstGeom>
+          <a:solidFill>
+            <a:srgbClr val="2563EB"/>
+          </a:solidFill>
+          <a:ln>
+            <a:solidFill>
+              <a:srgbClr val="2563EB"/>
+            </a:solidFill>
+          </a:ln>
+        </p:spPr>
+        <p:style>
+          <a:lnRef idx="1">
+            <a:schemeClr val="accent1"/>
+          </a:lnRef>
+          <a:fillRef idx="3">
+            <a:schemeClr val="accent1"/>
+          </a:fillRef>
+          <a:effectRef idx="2">
+            <a:schemeClr val="accent1"/>
+          </a:effectRef>
+          <a:fontRef idx="minor">
+            <a:schemeClr val="lt1"/>
+          </a:fontRef>
+        </p:style>
+        <p:txBody>
+          <a:bodyPr rtlCol="0" anchor="ctr"/>
+          <a:lstStyle/>
+          <a:p>
+            <a:pPr algn="ctr"/>
+          </a:p>
+        </p:txBody>
+      </p:sp>
+      <p:sp>
+        <p:nvSpPr>
+          <p:cNvPr id="29" name="TextBox 28"/>
+          <p:cNvSpPr txBox="1"/>
+          <p:nvPr/>
+        </p:nvSpPr>
+        <p:spPr>
+          <a:xfrm>
+            <a:off x="3557016" y="3401568"/>
+            <a:ext cx="438912" cy="164592"/>
+          </a:xfrm>
+          <a:prstGeom prst="rect">
+            <a:avLst/>
+          </a:prstGeom>
+          <a:noFill/>
+        </p:spPr>
+        <p:txBody>
+          <a:bodyPr wrap="square" lIns="18288" rIns="18288" tIns="18288" bIns="18288" anchor="t">
+            <a:spAutoFit/>
+          </a:bodyPr>
+          <a:lstStyle/>
+          <a:p>
+            <a:pPr algn="ctr"/>
+            <a:r>
+              <a:rPr sz="1000" b="1">
+                <a:solidFill>
+                  <a:srgbClr val="2563EB"/>
+                </a:solidFill>
+                <a:latin typeface="Microsoft YaHei"/>
+              </a:rPr>
+              <a:t>d¹</a:t>
+            </a:r>
+          </a:p>
+        </p:txBody>
+      </p:sp>
+      <p:sp>
+        <p:nvSpPr>
+          <p:cNvPr id="30" name="TextBox 29"/>
+          <p:cNvSpPr txBox="1"/>
+          <p:nvPr/>
+        </p:nvSpPr>
+        <p:spPr>
+          <a:xfrm>
+            <a:off x="3337560" y="4160520"/>
+            <a:ext cx="877824" cy="164592"/>
+          </a:xfrm>
+          <a:prstGeom prst="rect">
+            <a:avLst/>
+          </a:prstGeom>
+          <a:noFill/>
+        </p:spPr>
+        <p:txBody>
+          <a:bodyPr wrap="square" lIns="18288" rIns="18288" tIns="18288" bIns="18288" anchor="t">
+            <a:spAutoFit/>
+          </a:bodyPr>
+          <a:lstStyle/>
+          <a:p>
+            <a:pPr algn="ctr"/>
+            <a:r>
+              <a:rPr sz="819" b="0">
+                <a:solidFill>
+                  <a:srgbClr val="667381"/>
+                </a:solidFill>
+                <a:latin typeface="Microsoft YaHei"/>
+              </a:rPr>
+              <a:t>空气→材料</a:t>
+            </a:r>
+          </a:p>
+        </p:txBody>
+      </p:sp>
+      <p:sp>
+        <p:nvSpPr>
+          <p:cNvPr id="31" name="Oval 30"/>
+          <p:cNvSpPr/>
+          <p:nvPr/>
+        </p:nvSpPr>
+        <p:spPr>
+          <a:xfrm>
+            <a:off x="4709160" y="3694176"/>
+            <a:ext cx="256032" cy="256032"/>
+          </a:xfrm>
+          <a:prstGeom prst="ellipse">
+            <a:avLst/>
+          </a:prstGeom>
+          <a:solidFill>
+            <a:srgbClr val="C46B16"/>
+          </a:solidFill>
+          <a:ln>
+            <a:solidFill>
+              <a:srgbClr val="C46B16"/>
+            </a:solidFill>
+          </a:ln>
+        </p:spPr>
+        <p:style>
+          <a:lnRef idx="1">
+            <a:schemeClr val="accent1"/>
+          </a:lnRef>
+          <a:fillRef idx="3">
+            <a:schemeClr val="accent1"/>
+          </a:fillRef>
+          <a:effectRef idx="2">
+            <a:schemeClr val="accent1"/>
+          </a:effectRef>
+          <a:fontRef idx="minor">
+            <a:schemeClr val="lt1"/>
+          </a:fontRef>
+        </p:style>
+        <p:txBody>
+          <a:bodyPr rtlCol="0" anchor="ctr"/>
+          <a:lstStyle/>
+          <a:p>
+            <a:pPr algn="ctr"/>
+          </a:p>
+        </p:txBody>
+      </p:sp>
+      <p:sp>
+        <p:nvSpPr>
+          <p:cNvPr id="32" name="TextBox 31"/>
+          <p:cNvSpPr txBox="1"/>
+          <p:nvPr/>
+        </p:nvSpPr>
+        <p:spPr>
+          <a:xfrm>
+            <a:off x="4617720" y="3401568"/>
+            <a:ext cx="438912" cy="164592"/>
+          </a:xfrm>
+          <a:prstGeom prst="rect">
+            <a:avLst/>
+          </a:prstGeom>
+          <a:noFill/>
+        </p:spPr>
+        <p:txBody>
+          <a:bodyPr wrap="square" lIns="18288" rIns="18288" tIns="18288" bIns="18288" anchor="t">
+            <a:spAutoFit/>
+          </a:bodyPr>
+          <a:lstStyle/>
+          <a:p>
+            <a:pPr algn="ctr"/>
+            <a:r>
+              <a:rPr sz="1000" b="1">
+                <a:solidFill>
+                  <a:srgbClr val="C46B16"/>
+                </a:solidFill>
+                <a:latin typeface="Microsoft YaHei"/>
+              </a:rPr>
+              <a:t>d²</a:t>
+            </a:r>
+          </a:p>
+        </p:txBody>
+      </p:sp>
+      <p:sp>
+        <p:nvSpPr>
+          <p:cNvPr id="33" name="TextBox 32"/>
+          <p:cNvSpPr txBox="1"/>
+          <p:nvPr/>
+        </p:nvSpPr>
+        <p:spPr>
+          <a:xfrm>
+            <a:off x="4398264" y="4160520"/>
+            <a:ext cx="877824" cy="164592"/>
+          </a:xfrm>
+          <a:prstGeom prst="rect">
+            <a:avLst/>
+          </a:prstGeom>
+          <a:noFill/>
+        </p:spPr>
+        <p:txBody>
+          <a:bodyPr wrap="square" lIns="18288" rIns="18288" tIns="18288" bIns="18288" anchor="t">
+            <a:spAutoFit/>
+          </a:bodyPr>
+          <a:lstStyle/>
+          <a:p>
+            <a:pPr algn="ctr"/>
+            <a:r>
+              <a:rPr sz="819" b="0">
+                <a:solidFill>
+                  <a:srgbClr val="667381"/>
+                </a:solidFill>
+                <a:latin typeface="Microsoft YaHei"/>
+              </a:rPr>
+              <a:t>材料→空腔</a:t>
+            </a:r>
+          </a:p>
+        </p:txBody>
+      </p:sp>
+      <p:sp>
+        <p:nvSpPr>
+          <p:cNvPr id="34" name="Oval 33"/>
+          <p:cNvSpPr/>
+          <p:nvPr/>
+        </p:nvSpPr>
+        <p:spPr>
+          <a:xfrm>
+            <a:off x="8019288" y="3694176"/>
+            <a:ext cx="256032" cy="256032"/>
+          </a:xfrm>
+          <a:prstGeom prst="ellipse">
+            <a:avLst/>
+          </a:prstGeom>
+          <a:solidFill>
+            <a:srgbClr val="0F766E"/>
+          </a:solidFill>
+          <a:ln>
+            <a:solidFill>
+              <a:srgbClr val="0F766E"/>
+            </a:solidFill>
+          </a:ln>
+        </p:spPr>
+        <p:style>
+          <a:lnRef idx="1">
+            <a:schemeClr val="accent1"/>
+          </a:lnRef>
+          <a:fillRef idx="3">
+            <a:schemeClr val="accent1"/>
+          </a:fillRef>
+          <a:effectRef idx="2">
+            <a:schemeClr val="accent1"/>
+          </a:effectRef>
+          <a:fontRef idx="minor">
+            <a:schemeClr val="lt1"/>
+          </a:fontRef>
+        </p:style>
+        <p:txBody>
+          <a:bodyPr rtlCol="0" anchor="ctr"/>
+          <a:lstStyle/>
+          <a:p>
+            <a:pPr algn="ctr"/>
+          </a:p>
+        </p:txBody>
+      </p:sp>
+      <p:sp>
+        <p:nvSpPr>
+          <p:cNvPr id="35" name="TextBox 34"/>
+          <p:cNvSpPr txBox="1"/>
+          <p:nvPr/>
+        </p:nvSpPr>
+        <p:spPr>
+          <a:xfrm>
+            <a:off x="7927848" y="3401568"/>
+            <a:ext cx="438912" cy="164592"/>
+          </a:xfrm>
+          <a:prstGeom prst="rect">
+            <a:avLst/>
+          </a:prstGeom>
+          <a:noFill/>
+        </p:spPr>
+        <p:txBody>
+          <a:bodyPr wrap="square" lIns="18288" rIns="18288" tIns="18288" bIns="18288" anchor="t">
+            <a:spAutoFit/>
+          </a:bodyPr>
+          <a:lstStyle/>
+          <a:p>
+            <a:pPr algn="ctr"/>
+            <a:r>
+              <a:rPr sz="1000" b="1">
+                <a:solidFill>
+                  <a:srgbClr val="0F766E"/>
+                </a:solidFill>
+                <a:latin typeface="Microsoft YaHei"/>
+              </a:rPr>
+              <a:t>d³</a:t>
+            </a:r>
+          </a:p>
+        </p:txBody>
+      </p:sp>
+      <p:sp>
+        <p:nvSpPr>
+          <p:cNvPr id="36" name="TextBox 35"/>
+          <p:cNvSpPr txBox="1"/>
+          <p:nvPr/>
+        </p:nvSpPr>
+        <p:spPr>
+          <a:xfrm>
+            <a:off x="7708392" y="4160520"/>
+            <a:ext cx="877824" cy="164592"/>
+          </a:xfrm>
+          <a:prstGeom prst="rect">
+            <a:avLst/>
+          </a:prstGeom>
+          <a:noFill/>
+        </p:spPr>
+        <p:txBody>
+          <a:bodyPr wrap="square" lIns="18288" rIns="18288" tIns="18288" bIns="18288" anchor="t">
+            <a:spAutoFit/>
+          </a:bodyPr>
+          <a:lstStyle/>
+          <a:p>
+            <a:pPr algn="ctr"/>
+            <a:r>
+              <a:rPr sz="819" b="0">
+                <a:solidFill>
+                  <a:srgbClr val="667381"/>
+                </a:solidFill>
+                <a:latin typeface="Microsoft YaHei"/>
+              </a:rPr>
+              <a:t>空腔→材料</a:t>
+            </a:r>
+          </a:p>
+        </p:txBody>
+      </p:sp>
+      <p:sp>
+        <p:nvSpPr>
+          <p:cNvPr id="37" name="Oval 36"/>
+          <p:cNvSpPr/>
+          <p:nvPr/>
+        </p:nvSpPr>
+        <p:spPr>
+          <a:xfrm>
+            <a:off x="9079992" y="3694176"/>
+            <a:ext cx="256032" cy="256032"/>
+          </a:xfrm>
+          <a:prstGeom prst="ellipse">
+            <a:avLst/>
+          </a:prstGeom>
+          <a:solidFill>
+            <a:srgbClr val="15805D"/>
+          </a:solidFill>
+          <a:ln>
+            <a:solidFill>
+              <a:srgbClr val="15805D"/>
+            </a:solidFill>
+          </a:ln>
+        </p:spPr>
+        <p:style>
+          <a:lnRef idx="1">
+            <a:schemeClr val="accent1"/>
+          </a:lnRef>
+          <a:fillRef idx="3">
+            <a:schemeClr val="accent1"/>
+          </a:fillRef>
+          <a:effectRef idx="2">
+            <a:schemeClr val="accent1"/>
+          </a:effectRef>
+          <a:fontRef idx="minor">
+            <a:schemeClr val="lt1"/>
+          </a:fontRef>
+        </p:style>
+        <p:txBody>
+          <a:bodyPr rtlCol="0" anchor="ctr"/>
+          <a:lstStyle/>
+          <a:p>
+            <a:pPr algn="ctr"/>
+          </a:p>
+        </p:txBody>
+      </p:sp>
+      <p:sp>
+        <p:nvSpPr>
+          <p:cNvPr id="38" name="TextBox 37"/>
+          <p:cNvSpPr txBox="1"/>
+          <p:nvPr/>
+        </p:nvSpPr>
+        <p:spPr>
+          <a:xfrm>
+            <a:off x="8988552" y="3401568"/>
+            <a:ext cx="438912" cy="164592"/>
+          </a:xfrm>
+          <a:prstGeom prst="rect">
+            <a:avLst/>
+          </a:prstGeom>
+          <a:noFill/>
+        </p:spPr>
+        <p:txBody>
+          <a:bodyPr wrap="square" lIns="18288" rIns="18288" tIns="18288" bIns="18288" anchor="t">
+            <a:spAutoFit/>
+          </a:bodyPr>
+          <a:lstStyle/>
+          <a:p>
+            <a:pPr algn="ctr"/>
+            <a:r>
+              <a:rPr sz="1000" b="1">
+                <a:solidFill>
+                  <a:srgbClr val="15805D"/>
+                </a:solidFill>
+                <a:latin typeface="Microsoft YaHei"/>
+              </a:rPr>
+              <a:t>d⁴</a:t>
+            </a:r>
+          </a:p>
+        </p:txBody>
+      </p:sp>
+      <p:sp>
+        <p:nvSpPr>
+          <p:cNvPr id="39" name="TextBox 38"/>
+          <p:cNvSpPr txBox="1"/>
+          <p:nvPr/>
+        </p:nvSpPr>
+        <p:spPr>
+          <a:xfrm>
+            <a:off x="8769096" y="4160520"/>
+            <a:ext cx="877824" cy="164592"/>
+          </a:xfrm>
+          <a:prstGeom prst="rect">
+            <a:avLst/>
+          </a:prstGeom>
+          <a:noFill/>
+        </p:spPr>
+        <p:txBody>
+          <a:bodyPr wrap="square" lIns="18288" rIns="18288" tIns="18288" bIns="18288" anchor="t">
+            <a:spAutoFit/>
+          </a:bodyPr>
+          <a:lstStyle/>
+          <a:p>
+            <a:pPr algn="ctr"/>
+            <a:r>
+              <a:rPr sz="819" b="0">
+                <a:solidFill>
+                  <a:srgbClr val="667381"/>
+                </a:solidFill>
+                <a:latin typeface="Microsoft YaHei"/>
+              </a:rPr>
+              <a:t>材料→空气</a:t>
+            </a:r>
+          </a:p>
+        </p:txBody>
+      </p:sp>
+      <p:sp>
+        <p:nvSpPr>
+          <p:cNvPr id="40" name="TextBox 39"/>
+          <p:cNvSpPr txBox="1"/>
+          <p:nvPr/>
+        </p:nvSpPr>
+        <p:spPr>
+          <a:xfrm>
+            <a:off x="3968496" y="4142232"/>
+            <a:ext cx="658368" cy="164592"/>
+          </a:xfrm>
+          <a:prstGeom prst="rect">
+            <a:avLst/>
+          </a:prstGeom>
+          <a:noFill/>
+        </p:spPr>
+        <p:txBody>
+          <a:bodyPr wrap="square" lIns="18288" rIns="18288" tIns="18288" bIns="18288" anchor="t">
+            <a:spAutoFit/>
+          </a:bodyPr>
+          <a:lstStyle/>
+          <a:p>
+            <a:pPr algn="ctr"/>
+            <a:r>
+              <a:rPr sz="860" b="1">
+                <a:solidFill>
+                  <a:srgbClr val="C46B16"/>
+                </a:solidFill>
+                <a:latin typeface="Microsoft YaHei"/>
+              </a:rPr>
+              <a:t>材料</a:t>
+            </a:r>
+          </a:p>
+        </p:txBody>
+      </p:sp>
+      <p:sp>
+        <p:nvSpPr>
+          <p:cNvPr id="41" name="TextBox 40"/>
+          <p:cNvSpPr txBox="1"/>
+          <p:nvPr/>
+        </p:nvSpPr>
+        <p:spPr>
+          <a:xfrm>
+            <a:off x="6190488" y="4142232"/>
+            <a:ext cx="658368" cy="164592"/>
+          </a:xfrm>
+          <a:prstGeom prst="rect">
+            <a:avLst/>
+          </a:prstGeom>
+          <a:noFill/>
+        </p:spPr>
+        <p:txBody>
+          <a:bodyPr wrap="square" lIns="18288" rIns="18288" tIns="18288" bIns="18288" anchor="t">
+            <a:spAutoFit/>
+          </a:bodyPr>
+          <a:lstStyle/>
+          <a:p>
+            <a:pPr algn="ctr"/>
+            <a:r>
+              <a:rPr sz="860" b="1">
+                <a:solidFill>
+                  <a:srgbClr val="0F766E"/>
+                </a:solidFill>
+                <a:latin typeface="Microsoft YaHei"/>
+              </a:rPr>
+              <a:t>空腔</a:t>
+            </a:r>
+          </a:p>
+        </p:txBody>
+      </p:sp>
+      <p:sp>
+        <p:nvSpPr>
+          <p:cNvPr id="42" name="TextBox 41"/>
+          <p:cNvSpPr txBox="1"/>
+          <p:nvPr/>
+        </p:nvSpPr>
+        <p:spPr>
+          <a:xfrm>
+            <a:off x="8348472" y="4142232"/>
+            <a:ext cx="658368" cy="164592"/>
+          </a:xfrm>
+          <a:prstGeom prst="rect">
+            <a:avLst/>
+          </a:prstGeom>
+          <a:noFill/>
+        </p:spPr>
+        <p:txBody>
+          <a:bodyPr wrap="square" lIns="18288" rIns="18288" tIns="18288" bIns="18288" anchor="t">
+            <a:spAutoFit/>
+          </a:bodyPr>
+          <a:lstStyle/>
+          <a:p>
+            <a:pPr algn="ctr"/>
+            <a:r>
+              <a:rPr sz="860" b="1">
+                <a:solidFill>
+                  <a:srgbClr val="C46B16"/>
+                </a:solidFill>
+                <a:latin typeface="Microsoft YaHei"/>
+              </a:rPr>
+              <a:t>材料</a:t>
+            </a:r>
+          </a:p>
+        </p:txBody>
+      </p:sp>
+      <p:sp>
+        <p:nvSpPr>
+          <p:cNvPr id="43" name="Rounded Rectangle 42"/>
+          <p:cNvSpPr/>
+          <p:nvPr/>
+        </p:nvSpPr>
+        <p:spPr>
+          <a:xfrm>
+            <a:off x="850392" y="5020056"/>
+            <a:ext cx="10488168" cy="822960"/>
+          </a:xfrm>
+          <a:prstGeom prst="roundRect">
+            <a:avLst/>
+          </a:prstGeom>
+          <a:solidFill>
+            <a:srgbClr val="FFF4E8"/>
+          </a:solidFill>
+          <a:ln w="10160">
+            <a:solidFill>
+              <a:srgbClr val="FFF4E8"/>
+            </a:solidFill>
+          </a:ln>
+        </p:spPr>
+        <p:style>
+          <a:lnRef idx="1">
+            <a:schemeClr val="accent1"/>
+          </a:lnRef>
+          <a:fillRef idx="3">
+            <a:schemeClr val="accent1"/>
+          </a:fillRef>
+          <a:effectRef idx="2">
+            <a:schemeClr val="accent1"/>
+          </a:effectRef>
+          <a:fontRef idx="minor">
+            <a:schemeClr val="lt1"/>
+          </a:fontRef>
+        </p:style>
+        <p:txBody>
+          <a:bodyPr rtlCol="0" anchor="ctr"/>
+          <a:lstStyle/>
+          <a:p>
+            <a:pPr algn="ctr"/>
+          </a:p>
+        </p:txBody>
+      </p:sp>
+      <p:sp>
+        <p:nvSpPr>
+          <p:cNvPr id="44" name="TextBox 43"/>
+          <p:cNvSpPr txBox="1"/>
+          <p:nvPr/>
+        </p:nvSpPr>
+        <p:spPr>
+          <a:xfrm>
+            <a:off x="1106424" y="5285232"/>
+            <a:ext cx="1170432" cy="182880"/>
           </a:xfrm>
           <a:prstGeom prst="rect">
             <a:avLst/>
@@ -8254,27 +8948,27 @@
           <a:p>
             <a:pPr algn="l"/>
             <a:r>
-              <a:rPr sz="1300" b="1">
-                <a:solidFill>
-                  <a:srgbClr val="0F766E"/>
-                </a:solidFill>
-                <a:latin typeface="Microsoft YaHei"/>
-              </a:rPr>
-              <a:t>而是保留事件顺序与几何语义，让 planner 知道哪里是壁、哪里是空腔。</a:t>
-            </a:r>
-          </a:p>
-        </p:txBody>
-      </p:sp>
-      <p:sp>
-        <p:nvSpPr>
-          <p:cNvPr id="27" name="TextBox 26"/>
-          <p:cNvSpPr txBox="1"/>
-          <p:nvPr/>
-        </p:nvSpPr>
-        <p:spPr>
-          <a:xfrm>
-            <a:off x="1078992" y="5330952"/>
-            <a:ext cx="9692640" cy="201168"/>
+              <a:rPr sz="1150" b="1">
+                <a:solidFill>
+                  <a:srgbClr val="C46B16"/>
+                </a:solidFill>
+                <a:latin typeface="Microsoft YaHei"/>
+              </a:rPr>
+              <a:t>当前边界</a:t>
+            </a:r>
+          </a:p>
+        </p:txBody>
+      </p:sp>
+      <p:sp>
+        <p:nvSpPr>
+          <p:cNvPr id="45" name="TextBox 44"/>
+          <p:cNvSpPr txBox="1"/>
+          <p:nvPr/>
+        </p:nvSpPr>
+        <p:spPr>
+          <a:xfrm>
+            <a:off x="2212848" y="5248656"/>
+            <a:ext cx="8732520" cy="256032"/>
           </a:xfrm>
           <a:prstGeom prst="rect">
             <a:avLst/>
@@ -8289,20 +8983,20 @@
           <a:p>
             <a:pPr algn="l"/>
             <a:r>
-              <a:rPr sz="1080" b="0">
-                <a:solidFill>
-                  <a:srgbClr val="667381"/>
-                </a:solidFill>
-                <a:latin typeface="Microsoft YaHei"/>
-              </a:rPr>
-              <a:t>当前状态：Idea 已确定；Head 尚未训练，先通过下游可行性 Gate。</a:t>
-            </a:r>
-          </a:p>
-        </p:txBody>
-      </p:sp>
-      <p:sp>
-        <p:nvSpPr>
-          <p:cNvPr id="28" name="TextBox 27"/>
+              <a:rPr sz="1320" b="1">
+                <a:solidFill>
+                  <a:srgbClr val="172331"/>
+                </a:solidFill>
+                <a:latin typeface="Microsoft YaHei"/>
+              </a:rPr>
+              <a:t>表示定义与评测工具已经实现；多界面预测网络尚未训练，抓取收益尚未验证。</a:t>
+            </a:r>
+          </a:p>
+        </p:txBody>
+      </p:sp>
+      <p:sp>
+        <p:nvSpPr>
+          <p:cNvPr id="46" name="TextBox 45"/>
           <p:cNvSpPr txBox="1"/>
           <p:nvPr/>
         </p:nvSpPr>
@@ -8330,7 +9024,7 @@
                 </a:solidFill>
                 <a:latin typeface="Microsoft YaHei"/>
               </a:rPr>
-              <a:t>本页为本项目方法设计。</a:t>
+              <a:t>本页是候选方法设计，不是已经完成的模型结果。</a:t>
             </a:r>
           </a:p>
         </p:txBody>
@@ -8426,7 +9120,7 @@
                 </a:solidFill>
                 <a:latin typeface="Microsoft YaHei"/>
               </a:rPr>
-              <a:t>复现进度：已经证明什么，还缺什么</a:t>
+              <a:t>已经实现：ShellBench 统一表示与评测工具</a:t>
             </a:r>
           </a:p>
         </p:txBody>
@@ -8474,8 +9168,8 @@
         </p:nvSpPr>
         <p:spPr>
           <a:xfrm>
-            <a:off x="603504" y="1161288"/>
-            <a:ext cx="2103120" cy="219456"/>
+            <a:off x="603504" y="1060704"/>
+            <a:ext cx="9966960" cy="228600"/>
           </a:xfrm>
           <a:prstGeom prst="rect">
             <a:avLst/>
@@ -8490,13 +9184,13 @@
           <a:p>
             <a:pPr algn="l"/>
             <a:r>
-              <a:rPr sz="1400" b="1">
-                <a:solidFill>
-                  <a:srgbClr val="172331"/>
-                </a:solidFill>
-                <a:latin typeface="Microsoft YaHei"/>
-              </a:rPr>
-              <a:t>已完成的证据</a:t>
+              <a:rPr sz="1320" b="0">
+                <a:solidFill>
+                  <a:srgbClr val="667381"/>
+                </a:solidFill>
+                <a:latin typeface="Microsoft YaHei"/>
+              </a:rPr>
+              <a:t>它不是一个新模型，而是让单层、多层和完整真值在同一规则下公平比较。</a:t>
             </a:r>
           </a:p>
         </p:txBody>
@@ -8509,8 +9203,8 @@
         </p:nvSpPr>
         <p:spPr>
           <a:xfrm>
-            <a:off x="5806440" y="1115568"/>
-            <a:ext cx="1115568" cy="292608"/>
+            <a:off x="9912096" y="1014984"/>
+            <a:ext cx="1645920" cy="292608"/>
           </a:xfrm>
           <a:prstGeom prst="roundRect">
             <a:avLst/>
@@ -8554,8 +9248,8 @@
         </p:nvSpPr>
         <p:spPr>
           <a:xfrm>
-            <a:off x="5806440" y="1184148"/>
-            <a:ext cx="1115568" cy="118872"/>
+            <a:off x="9912096" y="1083564"/>
+            <a:ext cx="1645920" cy="118872"/>
           </a:xfrm>
           <a:prstGeom prst="rect">
             <a:avLst/>
@@ -8576,7 +9270,7 @@
                 </a:solidFill>
                 <a:latin typeface="Microsoft YaHei"/>
               </a:rPr>
-              <a:t>结果可信</a:t>
+              <a:t>代码与测试已完成</a:t>
             </a:r>
           </a:p>
         </p:txBody>
@@ -8589,8 +9283,8 @@
         </p:nvSpPr>
         <p:spPr>
           <a:xfrm>
-            <a:off x="603504" y="1600200"/>
-            <a:ext cx="6528816" cy="987552"/>
+            <a:off x="612648" y="1499616"/>
+            <a:ext cx="2386584" cy="621792"/>
           </a:xfrm>
           <a:prstGeom prst="roundRect">
             <a:avLst/>
@@ -8634,18 +9328,18 @@
         </p:nvSpPr>
         <p:spPr>
           <a:xfrm>
-            <a:off x="603504" y="1600200"/>
-            <a:ext cx="64008" cy="987552"/>
+            <a:off x="612648" y="1499616"/>
+            <a:ext cx="64008" cy="621792"/>
           </a:xfrm>
           <a:prstGeom prst="rect">
             <a:avLst/>
           </a:prstGeom>
           <a:solidFill>
-            <a:srgbClr val="15805D"/>
+            <a:srgbClr val="2563EB"/>
           </a:solidFill>
           <a:ln w="10160">
             <a:solidFill>
-              <a:srgbClr val="15805D"/>
+              <a:srgbClr val="2563EB"/>
             </a:solidFill>
           </a:ln>
         </p:spPr>
@@ -8679,8 +9373,8 @@
         </p:nvSpPr>
         <p:spPr>
           <a:xfrm>
-            <a:off x="841248" y="1755648"/>
-            <a:ext cx="1901952" cy="192024"/>
+            <a:off x="832104" y="1618488"/>
+            <a:ext cx="932688" cy="182880"/>
           </a:xfrm>
           <a:prstGeom prst="rect">
             <a:avLst/>
@@ -8695,13 +9389,13 @@
           <a:p>
             <a:pPr algn="l"/>
             <a:r>
-              <a:rPr sz="1150" b="1">
+              <a:rPr sz="1080" b="1">
                 <a:solidFill>
                   <a:srgbClr val="172331"/>
                 </a:solidFill>
                 <a:latin typeface="Microsoft YaHei"/>
               </a:rPr>
-              <a:t>单层深度基线</a:t>
+              <a:t>单层深度</a:t>
             </a:r>
           </a:p>
         </p:txBody>
@@ -8714,113 +9408,43 @@
         </p:nvSpPr>
         <p:spPr>
           <a:xfrm>
-            <a:off x="841248" y="2112264"/>
-            <a:ext cx="1901952" cy="164592"/>
-          </a:xfrm>
-          <a:prstGeom prst="rect">
-            <a:avLst/>
-          </a:prstGeom>
-          <a:noFill/>
-        </p:spPr>
-        <p:txBody>
-          <a:bodyPr wrap="square" lIns="18288" rIns="18288" tIns="18288" bIns="18288" anchor="t">
-            <a:spAutoFit/>
-          </a:bodyPr>
-          <a:lstStyle/>
-          <a:p>
-            <a:pPr algn="l"/>
-            <a:r>
-              <a:rPr sz="900" b="0">
+            <a:off x="1746504" y="1600200"/>
+            <a:ext cx="1014984" cy="365760"/>
+          </a:xfrm>
+          <a:prstGeom prst="rect">
+            <a:avLst/>
+          </a:prstGeom>
+          <a:noFill/>
+        </p:spPr>
+        <p:txBody>
+          <a:bodyPr wrap="square" lIns="18288" rIns="18288" tIns="18288" bIns="18288" anchor="t">
+            <a:spAutoFit/>
+          </a:bodyPr>
+          <a:lstStyle/>
+          <a:p>
+            <a:pPr algn="r"/>
+            <a:r>
+              <a:rPr sz="790" b="0">
                 <a:solidFill>
                   <a:srgbClr val="667381"/>
                 </a:solidFill>
                 <a:latin typeface="Microsoft YaHei"/>
               </a:rPr>
-              <a:t>Booster · 228 张</a:t>
-            </a:r>
-          </a:p>
-        </p:txBody>
-      </p:sp>
-      <p:sp>
-        <p:nvSpPr>
-          <p:cNvPr id="12" name="TextBox 11"/>
-          <p:cNvSpPr txBox="1"/>
-          <p:nvPr/>
-        </p:nvSpPr>
-        <p:spPr>
-          <a:xfrm>
-            <a:off x="2788920" y="1746504"/>
-            <a:ext cx="3931920" cy="210312"/>
-          </a:xfrm>
-          <a:prstGeom prst="rect">
-            <a:avLst/>
-          </a:prstGeom>
-          <a:noFill/>
-        </p:spPr>
-        <p:txBody>
-          <a:bodyPr wrap="square" lIns="18288" rIns="18288" tIns="18288" bIns="18288" anchor="t">
-            <a:spAutoFit/>
-          </a:bodyPr>
-          <a:lstStyle/>
-          <a:p>
-            <a:pPr algn="r"/>
-            <a:r>
-              <a:rPr sz="1110" b="1">
-                <a:solidFill>
-                  <a:srgbClr val="15805D"/>
-                </a:solidFill>
-                <a:latin typeface="Microsoft YaHei"/>
-              </a:rPr>
-              <a:t>均方根误差 136.28 mm（约 13.6 cm）</a:t>
-            </a:r>
-          </a:p>
-        </p:txBody>
-      </p:sp>
-      <p:sp>
-        <p:nvSpPr>
-          <p:cNvPr id="13" name="TextBox 12"/>
-          <p:cNvSpPr txBox="1"/>
-          <p:nvPr/>
-        </p:nvSpPr>
-        <p:spPr>
-          <a:xfrm>
-            <a:off x="2788920" y="2121408"/>
-            <a:ext cx="3931920" cy="164592"/>
-          </a:xfrm>
-          <a:prstGeom prst="rect">
-            <a:avLst/>
-          </a:prstGeom>
-          <a:noFill/>
-        </p:spPr>
-        <p:txBody>
-          <a:bodyPr wrap="square" lIns="18288" rIns="18288" tIns="18288" bIns="18288" anchor="t">
-            <a:spAutoFit/>
-          </a:bodyPr>
-          <a:lstStyle/>
-          <a:p>
-            <a:pPr algn="r"/>
-            <a:r>
-              <a:rPr sz="890" b="0">
-                <a:solidFill>
-                  <a:srgbClr val="667381"/>
-                </a:solidFill>
-                <a:latin typeface="Microsoft YaHei"/>
-              </a:rPr>
-              <a:t>与论文表格一致</a:t>
-            </a:r>
-          </a:p>
-        </p:txBody>
-      </p:sp>
-      <p:sp>
-        <p:nvSpPr>
-          <p:cNvPr id="14" name="Rounded Rectangle 13"/>
+              <a:t>K = 1；不虚构后表面</a:t>
+            </a:r>
+          </a:p>
+        </p:txBody>
+      </p:sp>
+      <p:sp>
+        <p:nvSpPr>
+          <p:cNvPr id="12" name="Rounded Rectangle 11"/>
           <p:cNvSpPr/>
           <p:nvPr/>
         </p:nvSpPr>
         <p:spPr>
           <a:xfrm>
-            <a:off x="603504" y="2724912"/>
-            <a:ext cx="6528816" cy="987552"/>
+            <a:off x="612648" y="2331720"/>
+            <a:ext cx="2386584" cy="621792"/>
           </a:xfrm>
           <a:prstGeom prst="roundRect">
             <a:avLst/>
@@ -8858,14 +9482,14 @@
       </p:sp>
       <p:sp>
         <p:nvSpPr>
-          <p:cNvPr id="15" name="Rectangle 14"/>
+          <p:cNvPr id="13" name="Rectangle 12"/>
           <p:cNvSpPr/>
           <p:nvPr/>
         </p:nvSpPr>
         <p:spPr>
           <a:xfrm>
-            <a:off x="603504" y="2724912"/>
-            <a:ext cx="64008" cy="987552"/>
+            <a:off x="612648" y="2331720"/>
+            <a:ext cx="64008" cy="621792"/>
           </a:xfrm>
           <a:prstGeom prst="rect">
             <a:avLst/>
@@ -8903,14 +9527,14 @@
       </p:sp>
       <p:sp>
         <p:nvSpPr>
-          <p:cNvPr id="16" name="TextBox 15"/>
-          <p:cNvSpPr txBox="1"/>
-          <p:nvPr/>
-        </p:nvSpPr>
-        <p:spPr>
-          <a:xfrm>
-            <a:off x="841248" y="2880360"/>
-            <a:ext cx="1901952" cy="192024"/>
+          <p:cNvPr id="14" name="TextBox 13"/>
+          <p:cNvSpPr txBox="1"/>
+          <p:nvPr/>
+        </p:nvSpPr>
+        <p:spPr>
+          <a:xfrm>
+            <a:off x="832104" y="2450591"/>
+            <a:ext cx="932688" cy="182880"/>
           </a:xfrm>
           <a:prstGeom prst="rect">
             <a:avLst/>
@@ -8925,132 +9549,62 @@
           <a:p>
             <a:pPr algn="l"/>
             <a:r>
-              <a:rPr sz="1150" b="1">
+              <a:rPr sz="1080" b="1">
                 <a:solidFill>
                   <a:srgbClr val="172331"/>
                 </a:solidFill>
                 <a:latin typeface="Microsoft YaHei"/>
               </a:rPr>
-              <a:t>多层深度对比</a:t>
-            </a:r>
-          </a:p>
-        </p:txBody>
-      </p:sp>
-      <p:sp>
-        <p:nvSpPr>
-          <p:cNvPr id="17" name="TextBox 16"/>
-          <p:cNvSpPr txBox="1"/>
-          <p:nvPr/>
-        </p:nvSpPr>
-        <p:spPr>
-          <a:xfrm>
-            <a:off x="841248" y="3236976"/>
-            <a:ext cx="1901952" cy="164592"/>
-          </a:xfrm>
-          <a:prstGeom prst="rect">
-            <a:avLst/>
-          </a:prstGeom>
-          <a:noFill/>
-        </p:spPr>
-        <p:txBody>
-          <a:bodyPr wrap="square" lIns="18288" rIns="18288" tIns="18288" bIns="18288" anchor="t">
-            <a:spAutoFit/>
-          </a:bodyPr>
-          <a:lstStyle/>
-          <a:p>
-            <a:pPr algn="l"/>
-            <a:r>
-              <a:rPr sz="900" b="0">
+              <a:t>多层预测</a:t>
+            </a:r>
+          </a:p>
+        </p:txBody>
+      </p:sp>
+      <p:sp>
+        <p:nvSpPr>
+          <p:cNvPr id="15" name="TextBox 14"/>
+          <p:cNvSpPr txBox="1"/>
+          <p:nvPr/>
+        </p:nvSpPr>
+        <p:spPr>
+          <a:xfrm>
+            <a:off x="1746504" y="2432303"/>
+            <a:ext cx="1014984" cy="365760"/>
+          </a:xfrm>
+          <a:prstGeom prst="rect">
+            <a:avLst/>
+          </a:prstGeom>
+          <a:noFill/>
+        </p:spPr>
+        <p:txBody>
+          <a:bodyPr wrap="square" lIns="18288" rIns="18288" tIns="18288" bIns="18288" anchor="t">
+            <a:spAutoFit/>
+          </a:bodyPr>
+          <a:lstStyle/>
+          <a:p>
+            <a:pPr algn="r"/>
+            <a:r>
+              <a:rPr sz="790" b="0">
                 <a:solidFill>
                   <a:srgbClr val="667381"/>
                 </a:solidFill>
                 <a:latin typeface="Microsoft YaHei"/>
               </a:rPr>
-              <a:t>LayeredDepth · 300 张</a:t>
-            </a:r>
-          </a:p>
-        </p:txBody>
-      </p:sp>
-      <p:sp>
-        <p:nvSpPr>
-          <p:cNvPr id="18" name="TextBox 17"/>
-          <p:cNvSpPr txBox="1"/>
-          <p:nvPr/>
-        </p:nvSpPr>
-        <p:spPr>
-          <a:xfrm>
-            <a:off x="2788920" y="2871216"/>
-            <a:ext cx="3931920" cy="210312"/>
-          </a:xfrm>
-          <a:prstGeom prst="rect">
-            <a:avLst/>
-          </a:prstGeom>
-          <a:noFill/>
-        </p:spPr>
-        <p:txBody>
-          <a:bodyPr wrap="square" lIns="18288" rIns="18288" tIns="18288" bIns="18288" anchor="t">
-            <a:spAutoFit/>
-          </a:bodyPr>
-          <a:lstStyle/>
-          <a:p>
-            <a:pPr algn="r"/>
-            <a:r>
-              <a:rPr sz="1110" b="1">
-                <a:solidFill>
-                  <a:srgbClr val="0F766E"/>
-                </a:solidFill>
-                <a:latin typeface="Microsoft YaHei"/>
-              </a:rPr>
-              <a:t>4 个界面顺序全对：29.95% → 72.41%</a:t>
-            </a:r>
-          </a:p>
-        </p:txBody>
-      </p:sp>
-      <p:sp>
-        <p:nvSpPr>
-          <p:cNvPr id="19" name="TextBox 18"/>
-          <p:cNvSpPr txBox="1"/>
-          <p:nvPr/>
-        </p:nvSpPr>
-        <p:spPr>
-          <a:xfrm>
-            <a:off x="2788920" y="3246120"/>
-            <a:ext cx="3931920" cy="164592"/>
-          </a:xfrm>
-          <a:prstGeom prst="rect">
-            <a:avLst/>
-          </a:prstGeom>
-          <a:noFill/>
-        </p:spPr>
-        <p:txBody>
-          <a:bodyPr wrap="square" lIns="18288" rIns="18288" tIns="18288" bIns="18288" anchor="t">
-            <a:spAutoFit/>
-          </a:bodyPr>
-          <a:lstStyle/>
-          <a:p>
-            <a:pPr algn="r"/>
-            <a:r>
-              <a:rPr sz="890" b="0">
-                <a:solidFill>
-                  <a:srgbClr val="667381"/>
-                </a:solidFill>
-                <a:latin typeface="Microsoft YaHei"/>
-              </a:rPr>
-              <a:t>多层模型明显更完整</a:t>
-            </a:r>
-          </a:p>
-        </p:txBody>
-      </p:sp>
-      <p:sp>
-        <p:nvSpPr>
-          <p:cNvPr id="20" name="Rounded Rectangle 19"/>
+              <a:t>K 可变；保留深度顺序</a:t>
+            </a:r>
+          </a:p>
+        </p:txBody>
+      </p:sp>
+      <p:sp>
+        <p:nvSpPr>
+          <p:cNvPr id="16" name="Rounded Rectangle 15"/>
           <p:cNvSpPr/>
           <p:nvPr/>
         </p:nvSpPr>
         <p:spPr>
           <a:xfrm>
-            <a:off x="603504" y="3849624"/>
-            <a:ext cx="6528816" cy="987552"/>
+            <a:off x="612648" y="3163824"/>
+            <a:ext cx="2386584" cy="621792"/>
           </a:xfrm>
           <a:prstGeom prst="roundRect">
             <a:avLst/>
@@ -9088,14 +9642,14 @@
       </p:sp>
       <p:sp>
         <p:nvSpPr>
-          <p:cNvPr id="21" name="Rectangle 20"/>
+          <p:cNvPr id="17" name="Rectangle 16"/>
           <p:cNvSpPr/>
           <p:nvPr/>
         </p:nvSpPr>
         <p:spPr>
           <a:xfrm>
-            <a:off x="603504" y="3849624"/>
-            <a:ext cx="64008" cy="987552"/>
+            <a:off x="612648" y="3163824"/>
+            <a:ext cx="64008" cy="621792"/>
           </a:xfrm>
           <a:prstGeom prst="rect">
             <a:avLst/>
@@ -9133,14 +9687,209 @@
       </p:sp>
       <p:sp>
         <p:nvSpPr>
+          <p:cNvPr id="18" name="TextBox 17"/>
+          <p:cNvSpPr txBox="1"/>
+          <p:nvPr/>
+        </p:nvSpPr>
+        <p:spPr>
+          <a:xfrm>
+            <a:off x="832104" y="3282696"/>
+            <a:ext cx="932688" cy="182880"/>
+          </a:xfrm>
+          <a:prstGeom prst="rect">
+            <a:avLst/>
+          </a:prstGeom>
+          <a:noFill/>
+        </p:spPr>
+        <p:txBody>
+          <a:bodyPr wrap="square" lIns="18288" rIns="18288" tIns="18288" bIns="18288" anchor="t">
+            <a:spAutoFit/>
+          </a:bodyPr>
+          <a:lstStyle/>
+          <a:p>
+            <a:pPr algn="l"/>
+            <a:r>
+              <a:rPr sz="1080" b="1">
+                <a:solidFill>
+                  <a:srgbClr val="172331"/>
+                </a:solidFill>
+                <a:latin typeface="Microsoft YaHei"/>
+              </a:rPr>
+              <a:t>完整真值</a:t>
+            </a:r>
+          </a:p>
+        </p:txBody>
+      </p:sp>
+      <p:sp>
+        <p:nvSpPr>
+          <p:cNvPr id="19" name="TextBox 18"/>
+          <p:cNvSpPr txBox="1"/>
+          <p:nvPr/>
+        </p:nvSpPr>
+        <p:spPr>
+          <a:xfrm>
+            <a:off x="1746504" y="3264408"/>
+            <a:ext cx="1014984" cy="365760"/>
+          </a:xfrm>
+          <a:prstGeom prst="rect">
+            <a:avLst/>
+          </a:prstGeom>
+          <a:noFill/>
+        </p:spPr>
+        <p:txBody>
+          <a:bodyPr wrap="square" lIns="18288" rIns="18288" tIns="18288" bIns="18288" anchor="t">
+            <a:spAutoFit/>
+          </a:bodyPr>
+          <a:lstStyle/>
+          <a:p>
+            <a:pPr algn="r"/>
+            <a:r>
+              <a:rPr sz="790" b="0">
+                <a:solidFill>
+                  <a:srgbClr val="667381"/>
+                </a:solidFill>
+                <a:latin typeface="Microsoft YaHei"/>
+              </a:rPr>
+              <a:t>TablewareNet 射线求交</a:t>
+            </a:r>
+          </a:p>
+        </p:txBody>
+      </p:sp>
+      <p:sp>
+        <p:nvSpPr>
+          <p:cNvPr id="20" name="Chevron 19"/>
+          <p:cNvSpPr/>
+          <p:nvPr/>
+        </p:nvSpPr>
+        <p:spPr>
+          <a:xfrm>
+            <a:off x="3154680" y="2331720"/>
+            <a:ext cx="347472" cy="493776"/>
+          </a:xfrm>
+          <a:prstGeom prst="chevron">
+            <a:avLst/>
+          </a:prstGeom>
+          <a:solidFill>
+            <a:srgbClr val="DDE3E8"/>
+          </a:solidFill>
+          <a:ln>
+            <a:solidFill>
+              <a:srgbClr val="DDE3E8"/>
+            </a:solidFill>
+          </a:ln>
+        </p:spPr>
+        <p:style>
+          <a:lnRef idx="1">
+            <a:schemeClr val="accent1"/>
+          </a:lnRef>
+          <a:fillRef idx="3">
+            <a:schemeClr val="accent1"/>
+          </a:fillRef>
+          <a:effectRef idx="2">
+            <a:schemeClr val="accent1"/>
+          </a:effectRef>
+          <a:fontRef idx="minor">
+            <a:schemeClr val="lt1"/>
+          </a:fontRef>
+        </p:style>
+        <p:txBody>
+          <a:bodyPr rtlCol="0" anchor="ctr"/>
+          <a:lstStyle/>
+          <a:p>
+            <a:pPr algn="ctr"/>
+          </a:p>
+        </p:txBody>
+      </p:sp>
+      <p:sp>
+        <p:nvSpPr>
+          <p:cNvPr id="21" name="Rounded Rectangle 20"/>
+          <p:cNvSpPr/>
+          <p:nvPr/>
+        </p:nvSpPr>
+        <p:spPr>
+          <a:xfrm>
+            <a:off x="3648456" y="1755648"/>
+            <a:ext cx="3154680" cy="1856231"/>
+          </a:xfrm>
+          <a:prstGeom prst="roundRect">
+            <a:avLst/>
+          </a:prstGeom>
+          <a:solidFill>
+            <a:srgbClr val="EAF6F4"/>
+          </a:solidFill>
+          <a:ln w="10160">
+            <a:solidFill>
+              <a:srgbClr val="EAF6F4"/>
+            </a:solidFill>
+          </a:ln>
+        </p:spPr>
+        <p:style>
+          <a:lnRef idx="1">
+            <a:schemeClr val="accent1"/>
+          </a:lnRef>
+          <a:fillRef idx="3">
+            <a:schemeClr val="accent1"/>
+          </a:fillRef>
+          <a:effectRef idx="2">
+            <a:schemeClr val="accent1"/>
+          </a:effectRef>
+          <a:fontRef idx="minor">
+            <a:schemeClr val="lt1"/>
+          </a:fontRef>
+        </p:style>
+        <p:txBody>
+          <a:bodyPr rtlCol="0" anchor="ctr"/>
+          <a:lstStyle/>
+          <a:p>
+            <a:pPr algn="ctr"/>
+          </a:p>
+        </p:txBody>
+      </p:sp>
+      <p:sp>
+        <p:nvSpPr>
           <p:cNvPr id="22" name="TextBox 21"/>
           <p:cNvSpPr txBox="1"/>
           <p:nvPr/>
         </p:nvSpPr>
         <p:spPr>
           <a:xfrm>
-            <a:off x="841248" y="4005072"/>
-            <a:ext cx="1901952" cy="192024"/>
+            <a:off x="3931920" y="2002536"/>
+            <a:ext cx="2587752" cy="228600"/>
+          </a:xfrm>
+          <a:prstGeom prst="rect">
+            <a:avLst/>
+          </a:prstGeom>
+          <a:noFill/>
+        </p:spPr>
+        <p:txBody>
+          <a:bodyPr wrap="square" lIns="18288" rIns="18288" tIns="18288" bIns="18288" anchor="t">
+            <a:spAutoFit/>
+          </a:bodyPr>
+          <a:lstStyle/>
+          <a:p>
+            <a:pPr algn="ctr"/>
+            <a:r>
+              <a:rPr sz="1420" b="1">
+                <a:solidFill>
+                  <a:srgbClr val="0F766E"/>
+                </a:solidFill>
+                <a:latin typeface="Microsoft YaHei"/>
+              </a:rPr>
+              <a:t>统一 RayEvents</a:t>
+            </a:r>
+          </a:p>
+        </p:txBody>
+      </p:sp>
+      <p:sp>
+        <p:nvSpPr>
+          <p:cNvPr id="23" name="TextBox 22"/>
+          <p:cNvSpPr txBox="1"/>
+          <p:nvPr/>
+        </p:nvSpPr>
+        <p:spPr>
+          <a:xfrm>
+            <a:off x="4041648" y="2441448"/>
+            <a:ext cx="2368296" cy="813816"/>
           </a:xfrm>
           <a:prstGeom prst="rect">
             <a:avLst/>
@@ -9155,27 +9904,155 @@
           <a:p>
             <a:pPr algn="l"/>
             <a:r>
-              <a:rPr sz="1150" b="1">
+              <a:rPr sz="1019" b="0">
                 <a:solidFill>
                   <a:srgbClr val="172331"/>
                 </a:solidFill>
                 <a:latin typeface="Microsoft YaHei"/>
               </a:rPr>
-              <a:t>薄壳几何检查</a:t>
-            </a:r>
-          </a:p>
-        </p:txBody>
-      </p:sp>
-      <p:sp>
-        <p:nvSpPr>
-          <p:cNvPr id="23" name="TextBox 22"/>
-          <p:cNvSpPr txBox="1"/>
-          <p:nvPr/>
-        </p:nvSpPr>
-        <p:spPr>
-          <a:xfrm>
-            <a:off x="841248" y="4361688"/>
-            <a:ext cx="1901952" cy="164592"/>
+              <a:t>depths_m        [K,H,W]
+valid_mask       [K,H,W]
+transition_type  [K,H,W]
+uncertainty_m    可选</a:t>
+            </a:r>
+          </a:p>
+        </p:txBody>
+      </p:sp>
+      <p:sp>
+        <p:nvSpPr>
+          <p:cNvPr id="24" name="Chevron 23"/>
+          <p:cNvSpPr/>
+          <p:nvPr/>
+        </p:nvSpPr>
+        <p:spPr>
+          <a:xfrm>
+            <a:off x="6949440" y="2331720"/>
+            <a:ext cx="347472" cy="493776"/>
+          </a:xfrm>
+          <a:prstGeom prst="chevron">
+            <a:avLst/>
+          </a:prstGeom>
+          <a:solidFill>
+            <a:srgbClr val="DDE3E8"/>
+          </a:solidFill>
+          <a:ln>
+            <a:solidFill>
+              <a:srgbClr val="DDE3E8"/>
+            </a:solidFill>
+          </a:ln>
+        </p:spPr>
+        <p:style>
+          <a:lnRef idx="1">
+            <a:schemeClr val="accent1"/>
+          </a:lnRef>
+          <a:fillRef idx="3">
+            <a:schemeClr val="accent1"/>
+          </a:fillRef>
+          <a:effectRef idx="2">
+            <a:schemeClr val="accent1"/>
+          </a:effectRef>
+          <a:fontRef idx="minor">
+            <a:schemeClr val="lt1"/>
+          </a:fontRef>
+        </p:style>
+        <p:txBody>
+          <a:bodyPr rtlCol="0" anchor="ctr"/>
+          <a:lstStyle/>
+          <a:p>
+            <a:pPr algn="ctr"/>
+          </a:p>
+        </p:txBody>
+      </p:sp>
+      <p:sp>
+        <p:nvSpPr>
+          <p:cNvPr id="25" name="Rounded Rectangle 24"/>
+          <p:cNvSpPr/>
+          <p:nvPr/>
+        </p:nvSpPr>
+        <p:spPr>
+          <a:xfrm>
+            <a:off x="7443216" y="1499616"/>
+            <a:ext cx="4142232" cy="2468880"/>
+          </a:xfrm>
+          <a:prstGeom prst="roundRect">
+            <a:avLst/>
+          </a:prstGeom>
+          <a:solidFill>
+            <a:srgbClr val="FFFFFF"/>
+          </a:solidFill>
+          <a:ln w="10160">
+            <a:solidFill>
+              <a:srgbClr val="DDE3E8"/>
+            </a:solidFill>
+          </a:ln>
+        </p:spPr>
+        <p:style>
+          <a:lnRef idx="1">
+            <a:schemeClr val="accent1"/>
+          </a:lnRef>
+          <a:fillRef idx="3">
+            <a:schemeClr val="accent1"/>
+          </a:fillRef>
+          <a:effectRef idx="2">
+            <a:schemeClr val="accent1"/>
+          </a:effectRef>
+          <a:fontRef idx="minor">
+            <a:schemeClr val="lt1"/>
+          </a:fontRef>
+        </p:style>
+        <p:txBody>
+          <a:bodyPr rtlCol="0" anchor="ctr"/>
+          <a:lstStyle/>
+          <a:p>
+            <a:pPr algn="ctr"/>
+          </a:p>
+        </p:txBody>
+      </p:sp>
+      <p:sp>
+        <p:nvSpPr>
+          <p:cNvPr id="26" name="TextBox 25"/>
+          <p:cNvSpPr txBox="1"/>
+          <p:nvPr/>
+        </p:nvSpPr>
+        <p:spPr>
+          <a:xfrm>
+            <a:off x="7754112" y="1764792"/>
+            <a:ext cx="3520440" cy="228600"/>
+          </a:xfrm>
+          <a:prstGeom prst="rect">
+            <a:avLst/>
+          </a:prstGeom>
+          <a:noFill/>
+        </p:spPr>
+        <p:txBody>
+          <a:bodyPr wrap="square" lIns="18288" rIns="18288" tIns="18288" bIns="18288" anchor="t">
+            <a:spAutoFit/>
+          </a:bodyPr>
+          <a:lstStyle/>
+          <a:p>
+            <a:pPr algn="ctr"/>
+            <a:r>
+              <a:rPr sz="1420" b="1">
+                <a:solidFill>
+                  <a:srgbClr val="172331"/>
+                </a:solidFill>
+                <a:latin typeface="Microsoft YaHei"/>
+              </a:rPr>
+              <a:t>统一评分</a:t>
+            </a:r>
+          </a:p>
+        </p:txBody>
+      </p:sp>
+      <p:sp>
+        <p:nvSpPr>
+          <p:cNvPr id="27" name="TextBox 26"/>
+          <p:cNvSpPr txBox="1"/>
+          <p:nvPr/>
+        </p:nvSpPr>
+        <p:spPr>
+          <a:xfrm>
+            <a:off x="7754112" y="2194560"/>
+            <a:ext cx="1664208" cy="164592"/>
           </a:xfrm>
           <a:prstGeom prst="rect">
             <a:avLst/>
@@ -9190,27 +10067,27 @@
           <a:p>
             <a:pPr algn="l"/>
             <a:r>
-              <a:rPr sz="900" b="0">
+              <a:rPr sz="940" b="0">
                 <a:solidFill>
                   <a:srgbClr val="667381"/>
                 </a:solidFill>
                 <a:latin typeface="Microsoft YaHei"/>
               </a:rPr>
-              <a:t>TablewareNet · 100 个场景</a:t>
-            </a:r>
-          </a:p>
-        </p:txBody>
-      </p:sp>
-      <p:sp>
-        <p:nvSpPr>
-          <p:cNvPr id="24" name="TextBox 23"/>
-          <p:cNvSpPr txBox="1"/>
-          <p:nvPr/>
-        </p:nvSpPr>
-        <p:spPr>
-          <a:xfrm>
-            <a:off x="2788920" y="3995928"/>
-            <a:ext cx="3931920" cy="210312"/>
+              <a:t>界面是否找全</a:t>
+            </a:r>
+          </a:p>
+        </p:txBody>
+      </p:sp>
+      <p:sp>
+        <p:nvSpPr>
+          <p:cNvPr id="28" name="TextBox 27"/>
+          <p:cNvSpPr txBox="1"/>
+          <p:nvPr/>
+        </p:nvSpPr>
+        <p:spPr>
+          <a:xfrm>
+            <a:off x="9345168" y="2194560"/>
+            <a:ext cx="1847088" cy="164592"/>
           </a:xfrm>
           <a:prstGeom prst="rect">
             <a:avLst/>
@@ -9225,27 +10102,62 @@
           <a:p>
             <a:pPr algn="r"/>
             <a:r>
-              <a:rPr sz="1110" b="1">
-                <a:solidFill>
-                  <a:srgbClr val="C46B16"/>
-                </a:solidFill>
-                <a:latin typeface="Microsoft YaHei"/>
-              </a:rPr>
-              <a:t>已知真实物体区域时，界面识别 F1 = 79.15%</a:t>
-            </a:r>
-          </a:p>
-        </p:txBody>
-      </p:sp>
-      <p:sp>
-        <p:nvSpPr>
-          <p:cNvPr id="25" name="TextBox 24"/>
-          <p:cNvSpPr txBox="1"/>
-          <p:nvPr/>
-        </p:nvSpPr>
-        <p:spPr>
-          <a:xfrm>
-            <a:off x="2788920" y="4370832"/>
-            <a:ext cx="3931920" cy="164592"/>
+              <a:rPr sz="940" b="1">
+                <a:solidFill>
+                  <a:srgbClr val="2563EB"/>
+                </a:solidFill>
+                <a:latin typeface="Microsoft YaHei"/>
+              </a:rPr>
+              <a:t>Precision / Recall / F1</a:t>
+            </a:r>
+          </a:p>
+        </p:txBody>
+      </p:sp>
+      <p:sp>
+        <p:nvSpPr>
+          <p:cNvPr id="29" name="TextBox 28"/>
+          <p:cNvSpPr txBox="1"/>
+          <p:nvPr/>
+        </p:nvSpPr>
+        <p:spPr>
+          <a:xfrm>
+            <a:off x="7754112" y="2587752"/>
+            <a:ext cx="1664208" cy="164592"/>
+          </a:xfrm>
+          <a:prstGeom prst="rect">
+            <a:avLst/>
+          </a:prstGeom>
+          <a:noFill/>
+        </p:spPr>
+        <p:txBody>
+          <a:bodyPr wrap="square" lIns="18288" rIns="18288" tIns="18288" bIns="18288" anchor="t">
+            <a:spAutoFit/>
+          </a:bodyPr>
+          <a:lstStyle/>
+          <a:p>
+            <a:pPr algn="l"/>
+            <a:r>
+              <a:rPr sz="940" b="0">
+                <a:solidFill>
+                  <a:srgbClr val="667381"/>
+                </a:solidFill>
+                <a:latin typeface="Microsoft YaHei"/>
+              </a:rPr>
+              <a:t>界面数量是否正确</a:t>
+            </a:r>
+          </a:p>
+        </p:txBody>
+      </p:sp>
+      <p:sp>
+        <p:nvSpPr>
+          <p:cNvPr id="30" name="TextBox 29"/>
+          <p:cNvSpPr txBox="1"/>
+          <p:nvPr/>
+        </p:nvSpPr>
+        <p:spPr>
+          <a:xfrm>
+            <a:off x="9345168" y="2587752"/>
+            <a:ext cx="1847088" cy="164592"/>
           </a:xfrm>
           <a:prstGeom prst="rect">
             <a:avLst/>
@@ -9260,27 +10172,97 @@
           <a:p>
             <a:pPr algn="r"/>
             <a:r>
-              <a:rPr sz="890" b="0">
+              <a:rPr sz="940" b="1">
+                <a:solidFill>
+                  <a:srgbClr val="2563EB"/>
+                </a:solidFill>
+                <a:latin typeface="Microsoft YaHei"/>
+              </a:rPr>
+              <a:t>Event-count accuracy</a:t>
+            </a:r>
+          </a:p>
+        </p:txBody>
+      </p:sp>
+      <p:sp>
+        <p:nvSpPr>
+          <p:cNvPr id="31" name="TextBox 30"/>
+          <p:cNvSpPr txBox="1"/>
+          <p:nvPr/>
+        </p:nvSpPr>
+        <p:spPr>
+          <a:xfrm>
+            <a:off x="7754112" y="2980944"/>
+            <a:ext cx="1664208" cy="164592"/>
+          </a:xfrm>
+          <a:prstGeom prst="rect">
+            <a:avLst/>
+          </a:prstGeom>
+          <a:noFill/>
+        </p:spPr>
+        <p:txBody>
+          <a:bodyPr wrap="square" lIns="18288" rIns="18288" tIns="18288" bIns="18288" anchor="t">
+            <a:spAutoFit/>
+          </a:bodyPr>
+          <a:lstStyle/>
+          <a:p>
+            <a:pPr algn="l"/>
+            <a:r>
+              <a:rPr sz="940" b="0">
                 <a:solidFill>
                   <a:srgbClr val="667381"/>
                 </a:solidFill>
                 <a:latin typeface="Microsoft YaHei"/>
               </a:rPr>
-              <a:t>说明几何路线可行，不是论文正式分数</a:t>
-            </a:r>
-          </a:p>
-        </p:txBody>
-      </p:sp>
-      <p:sp>
-        <p:nvSpPr>
-          <p:cNvPr id="26" name="TextBox 25"/>
-          <p:cNvSpPr txBox="1"/>
-          <p:nvPr/>
-        </p:nvSpPr>
-        <p:spPr>
-          <a:xfrm>
-            <a:off x="7370064" y="1161288"/>
-            <a:ext cx="1920240" cy="219456"/>
+              <a:t>深度偏差</a:t>
+            </a:r>
+          </a:p>
+        </p:txBody>
+      </p:sp>
+      <p:sp>
+        <p:nvSpPr>
+          <p:cNvPr id="32" name="TextBox 31"/>
+          <p:cNvSpPr txBox="1"/>
+          <p:nvPr/>
+        </p:nvSpPr>
+        <p:spPr>
+          <a:xfrm>
+            <a:off x="9345168" y="2980944"/>
+            <a:ext cx="1847088" cy="164592"/>
+          </a:xfrm>
+          <a:prstGeom prst="rect">
+            <a:avLst/>
+          </a:prstGeom>
+          <a:noFill/>
+        </p:spPr>
+        <p:txBody>
+          <a:bodyPr wrap="square" lIns="18288" rIns="18288" tIns="18288" bIns="18288" anchor="t">
+            <a:spAutoFit/>
+          </a:bodyPr>
+          <a:lstStyle/>
+          <a:p>
+            <a:pPr algn="r"/>
+            <a:r>
+              <a:rPr sz="940" b="1">
+                <a:solidFill>
+                  <a:srgbClr val="2563EB"/>
+                </a:solidFill>
+                <a:latin typeface="Microsoft YaHei"/>
+              </a:rPr>
+              <a:t>匹配后的 MAE / RMSE</a:t>
+            </a:r>
+          </a:p>
+        </p:txBody>
+      </p:sp>
+      <p:sp>
+        <p:nvSpPr>
+          <p:cNvPr id="33" name="TextBox 32"/>
+          <p:cNvSpPr txBox="1"/>
+          <p:nvPr/>
+        </p:nvSpPr>
+        <p:spPr>
+          <a:xfrm>
+            <a:off x="7754112" y="3374136"/>
+            <a:ext cx="1664208" cy="164592"/>
           </a:xfrm>
           <a:prstGeom prst="rect">
             <a:avLst/>
@@ -9295,27 +10277,292 @@
           <a:p>
             <a:pPr algn="l"/>
             <a:r>
-              <a:rPr sz="1400" b="1">
+              <a:rPr sz="940" b="0">
+                <a:solidFill>
+                  <a:srgbClr val="667381"/>
+                </a:solidFill>
+                <a:latin typeface="Microsoft YaHei"/>
+              </a:rPr>
+              <a:t>材料转换是否正确</a:t>
+            </a:r>
+          </a:p>
+        </p:txBody>
+      </p:sp>
+      <p:sp>
+        <p:nvSpPr>
+          <p:cNvPr id="34" name="TextBox 33"/>
+          <p:cNvSpPr txBox="1"/>
+          <p:nvPr/>
+        </p:nvSpPr>
+        <p:spPr>
+          <a:xfrm>
+            <a:off x="9345168" y="3374136"/>
+            <a:ext cx="1847088" cy="164592"/>
+          </a:xfrm>
+          <a:prstGeom prst="rect">
+            <a:avLst/>
+          </a:prstGeom>
+          <a:noFill/>
+        </p:spPr>
+        <p:txBody>
+          <a:bodyPr wrap="square" lIns="18288" rIns="18288" tIns="18288" bIns="18288" anchor="t">
+            <a:spAutoFit/>
+          </a:bodyPr>
+          <a:lstStyle/>
+          <a:p>
+            <a:pPr algn="r"/>
+            <a:r>
+              <a:rPr sz="940" b="1">
+                <a:solidFill>
+                  <a:srgbClr val="2563EB"/>
+                </a:solidFill>
+                <a:latin typeface="Microsoft YaHei"/>
+              </a:rPr>
+              <a:t>Transition / topology</a:t>
+            </a:r>
+          </a:p>
+        </p:txBody>
+      </p:sp>
+      <p:sp>
+        <p:nvSpPr>
+          <p:cNvPr id="35" name="Rounded Rectangle 34"/>
+          <p:cNvSpPr/>
+          <p:nvPr/>
+        </p:nvSpPr>
+        <p:spPr>
+          <a:xfrm>
+            <a:off x="850392" y="4325112"/>
+            <a:ext cx="10488168" cy="548640"/>
+          </a:xfrm>
+          <a:prstGeom prst="roundRect">
+            <a:avLst/>
+          </a:prstGeom>
+          <a:solidFill>
+            <a:srgbClr val="F5F8FA"/>
+          </a:solidFill>
+          <a:ln w="10160">
+            <a:solidFill>
+              <a:srgbClr val="F5F8FA"/>
+            </a:solidFill>
+          </a:ln>
+        </p:spPr>
+        <p:style>
+          <a:lnRef idx="1">
+            <a:schemeClr val="accent1"/>
+          </a:lnRef>
+          <a:fillRef idx="3">
+            <a:schemeClr val="accent1"/>
+          </a:fillRef>
+          <a:effectRef idx="2">
+            <a:schemeClr val="accent1"/>
+          </a:effectRef>
+          <a:fontRef idx="minor">
+            <a:schemeClr val="lt1"/>
+          </a:fontRef>
+        </p:style>
+        <p:txBody>
+          <a:bodyPr rtlCol="0" anchor="ctr"/>
+          <a:lstStyle/>
+          <a:p>
+            <a:pPr algn="ctr"/>
+          </a:p>
+        </p:txBody>
+      </p:sp>
+      <p:sp>
+        <p:nvSpPr>
+          <p:cNvPr id="36" name="TextBox 35"/>
+          <p:cNvSpPr txBox="1"/>
+          <p:nvPr/>
+        </p:nvSpPr>
+        <p:spPr>
+          <a:xfrm>
+            <a:off x="1115568" y="4507992"/>
+            <a:ext cx="4288536" cy="192024"/>
+          </a:xfrm>
+          <a:prstGeom prst="rect">
+            <a:avLst/>
+          </a:prstGeom>
+          <a:noFill/>
+        </p:spPr>
+        <p:txBody>
+          <a:bodyPr wrap="square" lIns="18288" rIns="18288" tIns="18288" bIns="18288" anchor="t">
+            <a:spAutoFit/>
+          </a:bodyPr>
+          <a:lstStyle/>
+          <a:p>
+            <a:pPr algn="l"/>
+            <a:r>
+              <a:rPr sz="1160" b="1">
+                <a:solidFill>
+                  <a:srgbClr val="0F766E"/>
+                </a:solidFill>
+                <a:latin typeface="Microsoft YaHei"/>
+              </a:rPr>
+              <a:t>合法拓扑：空气 → 材料 → 空腔 → 材料 → 空气</a:t>
+            </a:r>
+          </a:p>
+        </p:txBody>
+      </p:sp>
+      <p:sp>
+        <p:nvSpPr>
+          <p:cNvPr id="37" name="TextBox 36"/>
+          <p:cNvSpPr txBox="1"/>
+          <p:nvPr/>
+        </p:nvSpPr>
+        <p:spPr>
+          <a:xfrm>
+            <a:off x="5504688" y="4507992"/>
+            <a:ext cx="5477256" cy="192024"/>
+          </a:xfrm>
+          <a:prstGeom prst="rect">
+            <a:avLst/>
+          </a:prstGeom>
+          <a:noFill/>
+        </p:spPr>
+        <p:txBody>
+          <a:bodyPr wrap="square" lIns="18288" rIns="18288" tIns="18288" bIns="18288" anchor="t">
+            <a:spAutoFit/>
+          </a:bodyPr>
+          <a:lstStyle/>
+          <a:p>
+            <a:pPr algn="r"/>
+            <a:r>
+              <a:rPr sz="1080" b="1">
                 <a:solidFill>
                   <a:srgbClr val="172331"/>
                 </a:solidFill>
                 <a:latin typeface="Microsoft YaHei"/>
               </a:rPr>
-              <a:t>仍未完成</a:t>
-            </a:r>
-          </a:p>
-        </p:txBody>
-      </p:sp>
-      <p:sp>
-        <p:nvSpPr>
-          <p:cNvPr id="27" name="Rounded Rectangle 26"/>
+              <a:t>坐标链：(u,v,dₖ) → 相机点 → 手眼外参 → PIPER Base 薄壳</a:t>
+            </a:r>
+          </a:p>
+        </p:txBody>
+      </p:sp>
+      <p:sp>
+        <p:nvSpPr>
+          <p:cNvPr id="38" name="Rounded Rectangle 37"/>
           <p:cNvSpPr/>
           <p:nvPr/>
         </p:nvSpPr>
         <p:spPr>
           <a:xfrm>
-            <a:off x="10305288" y="1115568"/>
-            <a:ext cx="1280160" cy="292608"/>
+            <a:off x="850392" y="5166360"/>
+            <a:ext cx="5010912" cy="694944"/>
+          </a:xfrm>
+          <a:prstGeom prst="roundRect">
+            <a:avLst/>
+          </a:prstGeom>
+          <a:solidFill>
+            <a:srgbClr val="EAF6F4"/>
+          </a:solidFill>
+          <a:ln w="10160">
+            <a:solidFill>
+              <a:srgbClr val="EAF6F4"/>
+            </a:solidFill>
+          </a:ln>
+        </p:spPr>
+        <p:style>
+          <a:lnRef idx="1">
+            <a:schemeClr val="accent1"/>
+          </a:lnRef>
+          <a:fillRef idx="3">
+            <a:schemeClr val="accent1"/>
+          </a:fillRef>
+          <a:effectRef idx="2">
+            <a:schemeClr val="accent1"/>
+          </a:effectRef>
+          <a:fontRef idx="minor">
+            <a:schemeClr val="lt1"/>
+          </a:fontRef>
+        </p:style>
+        <p:txBody>
+          <a:bodyPr rtlCol="0" anchor="ctr"/>
+          <a:lstStyle/>
+          <a:p>
+            <a:pPr algn="ctr"/>
+          </a:p>
+        </p:txBody>
+      </p:sp>
+      <p:sp>
+        <p:nvSpPr>
+          <p:cNvPr id="39" name="TextBox 38"/>
+          <p:cNvSpPr txBox="1"/>
+          <p:nvPr/>
+        </p:nvSpPr>
+        <p:spPr>
+          <a:xfrm>
+            <a:off x="1097280" y="5376672"/>
+            <a:ext cx="1005840" cy="182880"/>
+          </a:xfrm>
+          <a:prstGeom prst="rect">
+            <a:avLst/>
+          </a:prstGeom>
+          <a:noFill/>
+        </p:spPr>
+        <p:txBody>
+          <a:bodyPr wrap="square" lIns="18288" rIns="18288" tIns="18288" bIns="18288" anchor="t">
+            <a:spAutoFit/>
+          </a:bodyPr>
+          <a:lstStyle/>
+          <a:p>
+            <a:pPr algn="l"/>
+            <a:r>
+              <a:rPr sz="1140" b="1">
+                <a:solidFill>
+                  <a:srgbClr val="15805D"/>
+                </a:solidFill>
+                <a:latin typeface="Microsoft YaHei"/>
+              </a:rPr>
+              <a:t>已经完成</a:t>
+            </a:r>
+          </a:p>
+        </p:txBody>
+      </p:sp>
+      <p:sp>
+        <p:nvSpPr>
+          <p:cNvPr id="40" name="TextBox 39"/>
+          <p:cNvSpPr txBox="1"/>
+          <p:nvPr/>
+        </p:nvSpPr>
+        <p:spPr>
+          <a:xfrm>
+            <a:off x="2039112" y="5358384"/>
+            <a:ext cx="3529584" cy="246888"/>
+          </a:xfrm>
+          <a:prstGeom prst="rect">
+            <a:avLst/>
+          </a:prstGeom>
+          <a:noFill/>
+        </p:spPr>
+        <p:txBody>
+          <a:bodyPr wrap="square" lIns="18288" rIns="18288" tIns="18288" bIns="18288" anchor="t">
+            <a:spAutoFit/>
+          </a:bodyPr>
+          <a:lstStyle/>
+          <a:p>
+            <a:pPr algn="l"/>
+            <a:r>
+              <a:rPr sz="980" b="1">
+                <a:solidFill>
+                  <a:srgbClr val="172331"/>
+                </a:solidFill>
+                <a:latin typeface="Microsoft YaHei"/>
+              </a:rPr>
+              <a:t>数据格式 · 转换器 · 真值生成 · 评测 · 单元/集成测试</a:t>
+            </a:r>
+          </a:p>
+        </p:txBody>
+      </p:sp>
+      <p:sp>
+        <p:nvSpPr>
+          <p:cNvPr id="41" name="Rounded Rectangle 40"/>
+          <p:cNvSpPr/>
+          <p:nvPr/>
+        </p:nvSpPr>
+        <p:spPr>
+          <a:xfrm>
+            <a:off x="6053328" y="5166360"/>
+            <a:ext cx="5285232" cy="694944"/>
           </a:xfrm>
           <a:prstGeom prst="roundRect">
             <a:avLst/>
@@ -9353,139 +10600,49 @@
       </p:sp>
       <p:sp>
         <p:nvSpPr>
-          <p:cNvPr id="28" name="TextBox 27"/>
-          <p:cNvSpPr txBox="1"/>
-          <p:nvPr/>
-        </p:nvSpPr>
-        <p:spPr>
-          <a:xfrm>
-            <a:off x="10305288" y="1184148"/>
-            <a:ext cx="1280160" cy="118872"/>
-          </a:xfrm>
-          <a:prstGeom prst="rect">
-            <a:avLst/>
-          </a:prstGeom>
-          <a:noFill/>
-        </p:spPr>
-        <p:txBody>
-          <a:bodyPr wrap="square" lIns="18288" rIns="18288" tIns="18288" bIns="18288" anchor="t">
-            <a:spAutoFit/>
-          </a:bodyPr>
-          <a:lstStyle/>
-          <a:p>
-            <a:pPr algn="ctr"/>
-            <a:r>
-              <a:rPr sz="880" b="1">
+          <p:cNvPr id="42" name="TextBox 41"/>
+          <p:cNvSpPr txBox="1"/>
+          <p:nvPr/>
+        </p:nvSpPr>
+        <p:spPr>
+          <a:xfrm>
+            <a:off x="6309360" y="5376672"/>
+            <a:ext cx="1005840" cy="182880"/>
+          </a:xfrm>
+          <a:prstGeom prst="rect">
+            <a:avLst/>
+          </a:prstGeom>
+          <a:noFill/>
+        </p:spPr>
+        <p:txBody>
+          <a:bodyPr wrap="square" lIns="18288" rIns="18288" tIns="18288" bIns="18288" anchor="t">
+            <a:spAutoFit/>
+          </a:bodyPr>
+          <a:lstStyle/>
+          <a:p>
+            <a:pPr algn="l"/>
+            <a:r>
+              <a:rPr sz="1140" b="1">
                 <a:solidFill>
                   <a:srgbClr val="C46B16"/>
                 </a:solidFill>
                 <a:latin typeface="Microsoft YaHei"/>
               </a:rPr>
-              <a:t>暂不下结论</a:t>
-            </a:r>
-          </a:p>
-        </p:txBody>
-      </p:sp>
-      <p:sp>
-        <p:nvSpPr>
-          <p:cNvPr id="29" name="Rounded Rectangle 28"/>
-          <p:cNvSpPr/>
-          <p:nvPr/>
-        </p:nvSpPr>
-        <p:spPr>
-          <a:xfrm>
-            <a:off x="7370064" y="1600200"/>
-            <a:ext cx="4215384" cy="1554480"/>
-          </a:xfrm>
-          <a:prstGeom prst="roundRect">
-            <a:avLst/>
-          </a:prstGeom>
-          <a:solidFill>
-            <a:srgbClr val="FFFFFF"/>
-          </a:solidFill>
-          <a:ln w="10160">
-            <a:solidFill>
-              <a:srgbClr val="DDE3E8"/>
-            </a:solidFill>
-          </a:ln>
-        </p:spPr>
-        <p:style>
-          <a:lnRef idx="1">
-            <a:schemeClr val="accent1"/>
-          </a:lnRef>
-          <a:fillRef idx="3">
-            <a:schemeClr val="accent1"/>
-          </a:fillRef>
-          <a:effectRef idx="2">
-            <a:schemeClr val="accent1"/>
-          </a:effectRef>
-          <a:fontRef idx="minor">
-            <a:schemeClr val="lt1"/>
-          </a:fontRef>
-        </p:style>
-        <p:txBody>
-          <a:bodyPr rtlCol="0" anchor="ctr"/>
-          <a:lstStyle/>
-          <a:p>
-            <a:pPr algn="ctr"/>
-          </a:p>
-        </p:txBody>
-      </p:sp>
-      <p:sp>
-        <p:nvSpPr>
-          <p:cNvPr id="30" name="Rectangle 29"/>
-          <p:cNvSpPr/>
-          <p:nvPr/>
-        </p:nvSpPr>
-        <p:spPr>
-          <a:xfrm>
-            <a:off x="7370064" y="1600200"/>
-            <a:ext cx="64008" cy="1554480"/>
-          </a:xfrm>
-          <a:prstGeom prst="rect">
-            <a:avLst/>
-          </a:prstGeom>
-          <a:solidFill>
-            <a:srgbClr val="C46B16"/>
-          </a:solidFill>
-          <a:ln w="10160">
-            <a:solidFill>
-              <a:srgbClr val="C46B16"/>
-            </a:solidFill>
-          </a:ln>
-        </p:spPr>
-        <p:style>
-          <a:lnRef idx="1">
-            <a:schemeClr val="accent1"/>
-          </a:lnRef>
-          <a:fillRef idx="3">
-            <a:schemeClr val="accent1"/>
-          </a:fillRef>
-          <a:effectRef idx="2">
-            <a:schemeClr val="accent1"/>
-          </a:effectRef>
-          <a:fontRef idx="minor">
-            <a:schemeClr val="lt1"/>
-          </a:fontRef>
-        </p:style>
-        <p:txBody>
-          <a:bodyPr rtlCol="0" anchor="ctr"/>
-          <a:lstStyle/>
-          <a:p>
-            <a:pPr algn="ctr"/>
-          </a:p>
-        </p:txBody>
-      </p:sp>
-      <p:sp>
-        <p:nvSpPr>
-          <p:cNvPr id="31" name="TextBox 30"/>
-          <p:cNvSpPr txBox="1"/>
-          <p:nvPr/>
-        </p:nvSpPr>
-        <p:spPr>
-          <a:xfrm>
-            <a:off x="7626096" y="1792224"/>
-            <a:ext cx="3666744" cy="210312"/>
+              <a:t>尚未完成</a:t>
+            </a:r>
+          </a:p>
+        </p:txBody>
+      </p:sp>
+      <p:sp>
+        <p:nvSpPr>
+          <p:cNvPr id="43" name="TextBox 42"/>
+          <p:cNvSpPr txBox="1"/>
+          <p:nvPr/>
+        </p:nvSpPr>
+        <p:spPr>
+          <a:xfrm>
+            <a:off x="7251192" y="5358384"/>
+            <a:ext cx="3776472" cy="246888"/>
           </a:xfrm>
           <a:prstGeom prst="rect">
             <a:avLst/>
@@ -9500,463 +10657,13 @@
           <a:p>
             <a:pPr algn="l"/>
             <a:r>
-              <a:rPr sz="1220" b="1">
+              <a:rPr sz="980" b="1">
                 <a:solidFill>
                   <a:srgbClr val="172331"/>
                 </a:solidFill>
                 <a:latin typeface="Microsoft YaHei"/>
               </a:rPr>
-              <a:t>TransCG 全量测试</a:t>
-            </a:r>
-          </a:p>
-        </p:txBody>
-      </p:sp>
-      <p:sp>
-        <p:nvSpPr>
-          <p:cNvPr id="32" name="TextBox 31"/>
-          <p:cNvSpPr txBox="1"/>
-          <p:nvPr/>
-        </p:nvSpPr>
-        <p:spPr>
-          <a:xfrm>
-            <a:off x="7626096" y="2148840"/>
-            <a:ext cx="3666744" cy="182880"/>
-          </a:xfrm>
-          <a:prstGeom prst="rect">
-            <a:avLst/>
-          </a:prstGeom>
-          <a:noFill/>
-        </p:spPr>
-        <p:txBody>
-          <a:bodyPr wrap="square" lIns="18288" rIns="18288" tIns="18288" bIns="18288" anchor="t">
-            <a:spAutoFit/>
-          </a:bodyPr>
-          <a:lstStyle/>
-          <a:p>
-            <a:pPr algn="l"/>
-            <a:r>
-              <a:rPr sz="930" b="0">
-                <a:solidFill>
-                  <a:srgbClr val="667381"/>
-                </a:solidFill>
-                <a:latin typeface="Microsoft YaHei"/>
-              </a:rPr>
-              <a:t>需要 52 个场景 / 23,524 个样本</a:t>
-            </a:r>
-          </a:p>
-        </p:txBody>
-      </p:sp>
-      <p:sp>
-        <p:nvSpPr>
-          <p:cNvPr id="33" name="TextBox 32"/>
-          <p:cNvSpPr txBox="1"/>
-          <p:nvPr/>
-        </p:nvSpPr>
-        <p:spPr>
-          <a:xfrm>
-            <a:off x="7626096" y="2496312"/>
-            <a:ext cx="3666744" cy="201168"/>
-          </a:xfrm>
-          <a:prstGeom prst="rect">
-            <a:avLst/>
-          </a:prstGeom>
-          <a:noFill/>
-        </p:spPr>
-        <p:txBody>
-          <a:bodyPr wrap="square" lIns="18288" rIns="18288" tIns="18288" bIns="18288" anchor="t">
-            <a:spAutoFit/>
-          </a:bodyPr>
-          <a:lstStyle/>
-          <a:p>
-            <a:pPr algn="l"/>
-            <a:r>
-              <a:rPr sz="1130" b="1">
-                <a:solidFill>
-                  <a:srgbClr val="C46B16"/>
-                </a:solidFill>
-                <a:latin typeface="Microsoft YaHei"/>
-              </a:rPr>
-              <a:t>已取得 40 / 52 个场景</a:t>
-            </a:r>
-          </a:p>
-        </p:txBody>
-      </p:sp>
-      <p:sp>
-        <p:nvSpPr>
-          <p:cNvPr id="34" name="TextBox 33"/>
-          <p:cNvSpPr txBox="1"/>
-          <p:nvPr/>
-        </p:nvSpPr>
-        <p:spPr>
-          <a:xfrm>
-            <a:off x="7626096" y="2825496"/>
-            <a:ext cx="3666744" cy="164592"/>
-          </a:xfrm>
-          <a:prstGeom prst="rect">
-            <a:avLst/>
-          </a:prstGeom>
-          <a:noFill/>
-        </p:spPr>
-        <p:txBody>
-          <a:bodyPr wrap="square" lIns="18288" rIns="18288" tIns="18288" bIns="18288" anchor="t">
-            <a:spAutoFit/>
-          </a:bodyPr>
-          <a:lstStyle/>
-          <a:p>
-            <a:pPr algn="l"/>
-            <a:r>
-              <a:rPr sz="890" b="0">
-                <a:solidFill>
-                  <a:srgbClr val="667381"/>
-                </a:solidFill>
-                <a:latin typeface="Microsoft YaHei"/>
-              </a:rPr>
-              <a:t>缺少 12 个场景，暂不报最终指标</a:t>
-            </a:r>
-          </a:p>
-        </p:txBody>
-      </p:sp>
-      <p:sp>
-        <p:nvSpPr>
-          <p:cNvPr id="35" name="Rounded Rectangle 34"/>
-          <p:cNvSpPr/>
-          <p:nvPr/>
-        </p:nvSpPr>
-        <p:spPr>
-          <a:xfrm>
-            <a:off x="7370064" y="3346704"/>
-            <a:ext cx="4215384" cy="1554480"/>
-          </a:xfrm>
-          <a:prstGeom prst="roundRect">
-            <a:avLst/>
-          </a:prstGeom>
-          <a:solidFill>
-            <a:srgbClr val="FFFFFF"/>
-          </a:solidFill>
-          <a:ln w="10160">
-            <a:solidFill>
-              <a:srgbClr val="DDE3E8"/>
-            </a:solidFill>
-          </a:ln>
-        </p:spPr>
-        <p:style>
-          <a:lnRef idx="1">
-            <a:schemeClr val="accent1"/>
-          </a:lnRef>
-          <a:fillRef idx="3">
-            <a:schemeClr val="accent1"/>
-          </a:fillRef>
-          <a:effectRef idx="2">
-            <a:schemeClr val="accent1"/>
-          </a:effectRef>
-          <a:fontRef idx="minor">
-            <a:schemeClr val="lt1"/>
-          </a:fontRef>
-        </p:style>
-        <p:txBody>
-          <a:bodyPr rtlCol="0" anchor="ctr"/>
-          <a:lstStyle/>
-          <a:p>
-            <a:pPr algn="ctr"/>
-          </a:p>
-        </p:txBody>
-      </p:sp>
-      <p:sp>
-        <p:nvSpPr>
-          <p:cNvPr id="36" name="Rectangle 35"/>
-          <p:cNvSpPr/>
-          <p:nvPr/>
-        </p:nvSpPr>
-        <p:spPr>
-          <a:xfrm>
-            <a:off x="7370064" y="3346704"/>
-            <a:ext cx="64008" cy="1554480"/>
-          </a:xfrm>
-          <a:prstGeom prst="rect">
-            <a:avLst/>
-          </a:prstGeom>
-          <a:solidFill>
-            <a:srgbClr val="C46B16"/>
-          </a:solidFill>
-          <a:ln w="10160">
-            <a:solidFill>
-              <a:srgbClr val="C46B16"/>
-            </a:solidFill>
-          </a:ln>
-        </p:spPr>
-        <p:style>
-          <a:lnRef idx="1">
-            <a:schemeClr val="accent1"/>
-          </a:lnRef>
-          <a:fillRef idx="3">
-            <a:schemeClr val="accent1"/>
-          </a:fillRef>
-          <a:effectRef idx="2">
-            <a:schemeClr val="accent1"/>
-          </a:effectRef>
-          <a:fontRef idx="minor">
-            <a:schemeClr val="lt1"/>
-          </a:fontRef>
-        </p:style>
-        <p:txBody>
-          <a:bodyPr rtlCol="0" anchor="ctr"/>
-          <a:lstStyle/>
-          <a:p>
-            <a:pPr algn="ctr"/>
-          </a:p>
-        </p:txBody>
-      </p:sp>
-      <p:sp>
-        <p:nvSpPr>
-          <p:cNvPr id="37" name="TextBox 36"/>
-          <p:cNvSpPr txBox="1"/>
-          <p:nvPr/>
-        </p:nvSpPr>
-        <p:spPr>
-          <a:xfrm>
-            <a:off x="7626096" y="3538728"/>
-            <a:ext cx="3666744" cy="210312"/>
-          </a:xfrm>
-          <a:prstGeom prst="rect">
-            <a:avLst/>
-          </a:prstGeom>
-          <a:noFill/>
-        </p:spPr>
-        <p:txBody>
-          <a:bodyPr wrap="square" lIns="18288" rIns="18288" tIns="18288" bIns="18288" anchor="t">
-            <a:spAutoFit/>
-          </a:bodyPr>
-          <a:lstStyle/>
-          <a:p>
-            <a:pPr algn="l"/>
-            <a:r>
-              <a:rPr sz="1220" b="1">
-                <a:solidFill>
-                  <a:srgbClr val="172331"/>
-                </a:solidFill>
-                <a:latin typeface="Microsoft YaHei"/>
-              </a:rPr>
-              <a:t>机器人抓取收益</a:t>
-            </a:r>
-          </a:p>
-        </p:txBody>
-      </p:sp>
-      <p:sp>
-        <p:nvSpPr>
-          <p:cNvPr id="38" name="TextBox 37"/>
-          <p:cNvSpPr txBox="1"/>
-          <p:nvPr/>
-        </p:nvSpPr>
-        <p:spPr>
-          <a:xfrm>
-            <a:off x="7626096" y="3895344"/>
-            <a:ext cx="3666744" cy="182880"/>
-          </a:xfrm>
-          <a:prstGeom prst="rect">
-            <a:avLst/>
-          </a:prstGeom>
-          <a:noFill/>
-        </p:spPr>
-        <p:txBody>
-          <a:bodyPr wrap="square" lIns="18288" rIns="18288" tIns="18288" bIns="18288" anchor="t">
-            <a:spAutoFit/>
-          </a:bodyPr>
-          <a:lstStyle/>
-          <a:p>
-            <a:pPr algn="l"/>
-            <a:r>
-              <a:rPr sz="930" b="0">
-                <a:solidFill>
-                  <a:srgbClr val="667381"/>
-                </a:solidFill>
-                <a:latin typeface="Microsoft YaHei"/>
-              </a:rPr>
-              <a:t>还没有公平比较单层与多层输入</a:t>
-            </a:r>
-          </a:p>
-        </p:txBody>
-      </p:sp>
-      <p:sp>
-        <p:nvSpPr>
-          <p:cNvPr id="39" name="TextBox 38"/>
-          <p:cNvSpPr txBox="1"/>
-          <p:nvPr/>
-        </p:nvSpPr>
-        <p:spPr>
-          <a:xfrm>
-            <a:off x="7626096" y="4242816"/>
-            <a:ext cx="3666744" cy="201168"/>
-          </a:xfrm>
-          <a:prstGeom prst="rect">
-            <a:avLst/>
-          </a:prstGeom>
-          <a:noFill/>
-        </p:spPr>
-        <p:txBody>
-          <a:bodyPr wrap="square" lIns="18288" rIns="18288" tIns="18288" bIns="18288" anchor="t">
-            <a:spAutoFit/>
-          </a:bodyPr>
-          <a:lstStyle/>
-          <a:p>
-            <a:pPr algn="l"/>
-            <a:r>
-              <a:rPr sz="1130" b="1">
-                <a:solidFill>
-                  <a:srgbClr val="C46B16"/>
-                </a:solidFill>
-                <a:latin typeface="Microsoft YaHei"/>
-              </a:rPr>
-              <a:t>尚无抓取成功率结论</a:t>
-            </a:r>
-          </a:p>
-        </p:txBody>
-      </p:sp>
-      <p:sp>
-        <p:nvSpPr>
-          <p:cNvPr id="40" name="TextBox 39"/>
-          <p:cNvSpPr txBox="1"/>
-          <p:nvPr/>
-        </p:nvSpPr>
-        <p:spPr>
-          <a:xfrm>
-            <a:off x="7626096" y="4572000"/>
-            <a:ext cx="3666744" cy="164592"/>
-          </a:xfrm>
-          <a:prstGeom prst="rect">
-            <a:avLst/>
-          </a:prstGeom>
-          <a:noFill/>
-        </p:spPr>
-        <p:txBody>
-          <a:bodyPr wrap="square" lIns="18288" rIns="18288" tIns="18288" bIns="18288" anchor="t">
-            <a:spAutoFit/>
-          </a:bodyPr>
-          <a:lstStyle/>
-          <a:p>
-            <a:pPr algn="l"/>
-            <a:r>
-              <a:rPr sz="890" b="0">
-                <a:solidFill>
-                  <a:srgbClr val="667381"/>
-                </a:solidFill>
-                <a:latin typeface="Microsoft YaHei"/>
-              </a:rPr>
-              <a:t>下一页用同一规划器直接验证</a:t>
-            </a:r>
-          </a:p>
-        </p:txBody>
-      </p:sp>
-      <p:sp>
-        <p:nvSpPr>
-          <p:cNvPr id="41" name="Rounded Rectangle 40"/>
-          <p:cNvSpPr/>
-          <p:nvPr/>
-        </p:nvSpPr>
-        <p:spPr>
-          <a:xfrm>
-            <a:off x="786384" y="5230368"/>
-            <a:ext cx="10588752" cy="786384"/>
-          </a:xfrm>
-          <a:prstGeom prst="roundRect">
-            <a:avLst/>
-          </a:prstGeom>
-          <a:solidFill>
-            <a:srgbClr val="EEF4FF"/>
-          </a:solidFill>
-          <a:ln w="10160">
-            <a:solidFill>
-              <a:srgbClr val="EEF4FF"/>
-            </a:solidFill>
-          </a:ln>
-        </p:spPr>
-        <p:style>
-          <a:lnRef idx="1">
-            <a:schemeClr val="accent1"/>
-          </a:lnRef>
-          <a:fillRef idx="3">
-            <a:schemeClr val="accent1"/>
-          </a:fillRef>
-          <a:effectRef idx="2">
-            <a:schemeClr val="accent1"/>
-          </a:effectRef>
-          <a:fontRef idx="minor">
-            <a:schemeClr val="lt1"/>
-          </a:fontRef>
-        </p:style>
-        <p:txBody>
-          <a:bodyPr rtlCol="0" anchor="ctr"/>
-          <a:lstStyle/>
-          <a:p>
-            <a:pPr algn="ctr"/>
-          </a:p>
-        </p:txBody>
-      </p:sp>
-      <p:sp>
-        <p:nvSpPr>
-          <p:cNvPr id="42" name="TextBox 41"/>
-          <p:cNvSpPr txBox="1"/>
-          <p:nvPr/>
-        </p:nvSpPr>
-        <p:spPr>
-          <a:xfrm>
-            <a:off x="1042415" y="5486400"/>
-            <a:ext cx="1261872" cy="201168"/>
-          </a:xfrm>
-          <a:prstGeom prst="rect">
-            <a:avLst/>
-          </a:prstGeom>
-          <a:noFill/>
-        </p:spPr>
-        <p:txBody>
-          <a:bodyPr wrap="square" lIns="18288" rIns="18288" tIns="18288" bIns="18288" anchor="t">
-            <a:spAutoFit/>
-          </a:bodyPr>
-          <a:lstStyle/>
-          <a:p>
-            <a:pPr algn="l"/>
-            <a:r>
-              <a:rPr sz="1200" b="1">
-                <a:solidFill>
-                  <a:srgbClr val="2563EB"/>
-                </a:solidFill>
-                <a:latin typeface="Microsoft YaHei"/>
-              </a:rPr>
-              <a:t>目前结论</a:t>
-            </a:r>
-          </a:p>
-        </p:txBody>
-      </p:sp>
-      <p:sp>
-        <p:nvSpPr>
-          <p:cNvPr id="43" name="TextBox 42"/>
-          <p:cNvSpPr txBox="1"/>
-          <p:nvPr/>
-        </p:nvSpPr>
-        <p:spPr>
-          <a:xfrm>
-            <a:off x="2203704" y="5449824"/>
-            <a:ext cx="8750808" cy="283464"/>
-          </a:xfrm>
-          <a:prstGeom prst="rect">
-            <a:avLst/>
-          </a:prstGeom>
-          <a:noFill/>
-        </p:spPr>
-        <p:txBody>
-          <a:bodyPr wrap="square" lIns="18288" rIns="18288" tIns="18288" bIns="18288" anchor="t">
-            <a:spAutoFit/>
-          </a:bodyPr>
-          <a:lstStyle/>
-          <a:p>
-            <a:pPr algn="l"/>
-            <a:r>
-              <a:rPr sz="1320" b="1">
-                <a:solidFill>
-                  <a:srgbClr val="172331"/>
-                </a:solidFill>
-                <a:latin typeface="Microsoft YaHei"/>
-              </a:rPr>
-              <a:t>多层深度能更完整地描述透明物体；是否让机器人抓得更稳，还需要下一步实验。</a:t>
+              <a:t>预测网络 · 三维薄壳提升 · 规划器对照 · 实机闭环</a:t>
             </a:r>
           </a:p>
         </p:txBody>
@@ -9991,7 +10698,7 @@
                 </a:solidFill>
                 <a:latin typeface="Microsoft YaHei"/>
               </a:rPr>
-              <a:t>所有数字都来自本地完整运行；未完成的实验不提前写成结论。</a:t>
+              <a:t>ShellBench 已能评价表示质量，但尚未产生机器人抓取成功率结论。</a:t>
             </a:r>
           </a:p>
         </p:txBody>
@@ -10087,7 +10794,7 @@
                 </a:solidFill>
                 <a:latin typeface="Microsoft YaHei"/>
               </a:rPr>
-              <a:t>下一步：证明“多层深度是否真的更好抓”</a:t>
+              <a:t>复现进度：已经证明什么，还缺什么</a:t>
             </a:r>
           </a:p>
         </p:txBody>
@@ -10135,8 +10842,8 @@
         </p:nvSpPr>
         <p:spPr>
           <a:xfrm>
-            <a:off x="603504" y="1069848"/>
-            <a:ext cx="10424160" cy="228600"/>
+            <a:off x="603504" y="1161288"/>
+            <a:ext cx="2103120" cy="219456"/>
           </a:xfrm>
           <a:prstGeom prst="rect">
             <a:avLst/>
@@ -10151,13 +10858,13 @@
           <a:p>
             <a:pPr algn="l"/>
             <a:r>
-              <a:rPr sz="1320" b="0">
-                <a:solidFill>
-                  <a:srgbClr val="667381"/>
-                </a:solidFill>
-                <a:latin typeface="Microsoft YaHei"/>
-              </a:rPr>
-              <a:t>保持物体、物体区域和抓取规划器完全相同，只改变输入的几何信息。</a:t>
+              <a:rPr sz="1400" b="1">
+                <a:solidFill>
+                  <a:srgbClr val="172331"/>
+                </a:solidFill>
+                <a:latin typeface="Microsoft YaHei"/>
+              </a:rPr>
+              <a:t>已完成的证据</a:t>
             </a:r>
           </a:p>
         </p:txBody>
@@ -10170,8 +10877,8 @@
         </p:nvSpPr>
         <p:spPr>
           <a:xfrm>
-            <a:off x="960120" y="1517904"/>
-            <a:ext cx="10268712" cy="630936"/>
+            <a:off x="5806440" y="1115568"/>
+            <a:ext cx="1115568" cy="292608"/>
           </a:xfrm>
           <a:prstGeom prst="roundRect">
             <a:avLst/>
@@ -10215,29 +10922,29 @@
         </p:nvSpPr>
         <p:spPr>
           <a:xfrm>
-            <a:off x="1188720" y="1719072"/>
-            <a:ext cx="9811512" cy="228600"/>
-          </a:xfrm>
-          <a:prstGeom prst="rect">
-            <a:avLst/>
-          </a:prstGeom>
-          <a:noFill/>
-        </p:spPr>
-        <p:txBody>
-          <a:bodyPr wrap="square" lIns="18288" rIns="18288" tIns="18288" bIns="18288" anchor="t">
-            <a:spAutoFit/>
-          </a:bodyPr>
-          <a:lstStyle/>
-          <a:p>
-            <a:pPr algn="ctr"/>
-            <a:r>
-              <a:rPr sz="1420" b="1">
-                <a:solidFill>
-                  <a:srgbClr val="0F766E"/>
-                </a:solidFill>
-                <a:latin typeface="Microsoft YaHei"/>
-              </a:rPr>
-              <a:t>核心问题：只知道最前表面，与知道前后 / 内外表面相比，哪一种抓取错误更少？</a:t>
+            <a:off x="5806440" y="1184148"/>
+            <a:ext cx="1115568" cy="118872"/>
+          </a:xfrm>
+          <a:prstGeom prst="rect">
+            <a:avLst/>
+          </a:prstGeom>
+          <a:noFill/>
+        </p:spPr>
+        <p:txBody>
+          <a:bodyPr wrap="square" lIns="18288" rIns="18288" tIns="18288" bIns="18288" anchor="t">
+            <a:spAutoFit/>
+          </a:bodyPr>
+          <a:lstStyle/>
+          <a:p>
+            <a:pPr algn="ctr"/>
+            <a:r>
+              <a:rPr sz="880" b="1">
+                <a:solidFill>
+                  <a:srgbClr val="15805D"/>
+                </a:solidFill>
+                <a:latin typeface="Microsoft YaHei"/>
+              </a:rPr>
+              <a:t>结果可信</a:t>
             </a:r>
           </a:p>
         </p:txBody>
@@ -10250,8 +10957,8 @@
         </p:nvSpPr>
         <p:spPr>
           <a:xfrm>
-            <a:off x="676656" y="2532888"/>
-            <a:ext cx="3447288" cy="2075688"/>
+            <a:off x="603504" y="1600200"/>
+            <a:ext cx="6528816" cy="987552"/>
           </a:xfrm>
           <a:prstGeom prst="roundRect">
             <a:avLst/>
@@ -10289,6 +10996,1667 @@
       </p:sp>
       <p:sp>
         <p:nvSpPr>
+          <p:cNvPr id="9" name="Rectangle 8"/>
+          <p:cNvSpPr/>
+          <p:nvPr/>
+        </p:nvSpPr>
+        <p:spPr>
+          <a:xfrm>
+            <a:off x="603504" y="1600200"/>
+            <a:ext cx="64008" cy="987552"/>
+          </a:xfrm>
+          <a:prstGeom prst="rect">
+            <a:avLst/>
+          </a:prstGeom>
+          <a:solidFill>
+            <a:srgbClr val="15805D"/>
+          </a:solidFill>
+          <a:ln w="10160">
+            <a:solidFill>
+              <a:srgbClr val="15805D"/>
+            </a:solidFill>
+          </a:ln>
+        </p:spPr>
+        <p:style>
+          <a:lnRef idx="1">
+            <a:schemeClr val="accent1"/>
+          </a:lnRef>
+          <a:fillRef idx="3">
+            <a:schemeClr val="accent1"/>
+          </a:fillRef>
+          <a:effectRef idx="2">
+            <a:schemeClr val="accent1"/>
+          </a:effectRef>
+          <a:fontRef idx="minor">
+            <a:schemeClr val="lt1"/>
+          </a:fontRef>
+        </p:style>
+        <p:txBody>
+          <a:bodyPr rtlCol="0" anchor="ctr"/>
+          <a:lstStyle/>
+          <a:p>
+            <a:pPr algn="ctr"/>
+          </a:p>
+        </p:txBody>
+      </p:sp>
+      <p:sp>
+        <p:nvSpPr>
+          <p:cNvPr id="10" name="TextBox 9"/>
+          <p:cNvSpPr txBox="1"/>
+          <p:nvPr/>
+        </p:nvSpPr>
+        <p:spPr>
+          <a:xfrm>
+            <a:off x="841248" y="1755648"/>
+            <a:ext cx="1901952" cy="192024"/>
+          </a:xfrm>
+          <a:prstGeom prst="rect">
+            <a:avLst/>
+          </a:prstGeom>
+          <a:noFill/>
+        </p:spPr>
+        <p:txBody>
+          <a:bodyPr wrap="square" lIns="18288" rIns="18288" tIns="18288" bIns="18288" anchor="t">
+            <a:spAutoFit/>
+          </a:bodyPr>
+          <a:lstStyle/>
+          <a:p>
+            <a:pPr algn="l"/>
+            <a:r>
+              <a:rPr sz="1150" b="1">
+                <a:solidFill>
+                  <a:srgbClr val="172331"/>
+                </a:solidFill>
+                <a:latin typeface="Microsoft YaHei"/>
+              </a:rPr>
+              <a:t>单层深度基线</a:t>
+            </a:r>
+          </a:p>
+        </p:txBody>
+      </p:sp>
+      <p:sp>
+        <p:nvSpPr>
+          <p:cNvPr id="11" name="TextBox 10"/>
+          <p:cNvSpPr txBox="1"/>
+          <p:nvPr/>
+        </p:nvSpPr>
+        <p:spPr>
+          <a:xfrm>
+            <a:off x="841248" y="2112264"/>
+            <a:ext cx="1901952" cy="164592"/>
+          </a:xfrm>
+          <a:prstGeom prst="rect">
+            <a:avLst/>
+          </a:prstGeom>
+          <a:noFill/>
+        </p:spPr>
+        <p:txBody>
+          <a:bodyPr wrap="square" lIns="18288" rIns="18288" tIns="18288" bIns="18288" anchor="t">
+            <a:spAutoFit/>
+          </a:bodyPr>
+          <a:lstStyle/>
+          <a:p>
+            <a:pPr algn="l"/>
+            <a:r>
+              <a:rPr sz="900" b="0">
+                <a:solidFill>
+                  <a:srgbClr val="667381"/>
+                </a:solidFill>
+                <a:latin typeface="Microsoft YaHei"/>
+              </a:rPr>
+              <a:t>Booster · 228 张</a:t>
+            </a:r>
+          </a:p>
+        </p:txBody>
+      </p:sp>
+      <p:sp>
+        <p:nvSpPr>
+          <p:cNvPr id="12" name="TextBox 11"/>
+          <p:cNvSpPr txBox="1"/>
+          <p:nvPr/>
+        </p:nvSpPr>
+        <p:spPr>
+          <a:xfrm>
+            <a:off x="2788920" y="1746504"/>
+            <a:ext cx="3931920" cy="210312"/>
+          </a:xfrm>
+          <a:prstGeom prst="rect">
+            <a:avLst/>
+          </a:prstGeom>
+          <a:noFill/>
+        </p:spPr>
+        <p:txBody>
+          <a:bodyPr wrap="square" lIns="18288" rIns="18288" tIns="18288" bIns="18288" anchor="t">
+            <a:spAutoFit/>
+          </a:bodyPr>
+          <a:lstStyle/>
+          <a:p>
+            <a:pPr algn="r"/>
+            <a:r>
+              <a:rPr sz="1110" b="1">
+                <a:solidFill>
+                  <a:srgbClr val="15805D"/>
+                </a:solidFill>
+                <a:latin typeface="Microsoft YaHei"/>
+              </a:rPr>
+              <a:t>均方根误差 136.28 mm（约 13.6 cm）</a:t>
+            </a:r>
+          </a:p>
+        </p:txBody>
+      </p:sp>
+      <p:sp>
+        <p:nvSpPr>
+          <p:cNvPr id="13" name="TextBox 12"/>
+          <p:cNvSpPr txBox="1"/>
+          <p:nvPr/>
+        </p:nvSpPr>
+        <p:spPr>
+          <a:xfrm>
+            <a:off x="2788920" y="2121408"/>
+            <a:ext cx="3931920" cy="164592"/>
+          </a:xfrm>
+          <a:prstGeom prst="rect">
+            <a:avLst/>
+          </a:prstGeom>
+          <a:noFill/>
+        </p:spPr>
+        <p:txBody>
+          <a:bodyPr wrap="square" lIns="18288" rIns="18288" tIns="18288" bIns="18288" anchor="t">
+            <a:spAutoFit/>
+          </a:bodyPr>
+          <a:lstStyle/>
+          <a:p>
+            <a:pPr algn="r"/>
+            <a:r>
+              <a:rPr sz="890" b="0">
+                <a:solidFill>
+                  <a:srgbClr val="667381"/>
+                </a:solidFill>
+                <a:latin typeface="Microsoft YaHei"/>
+              </a:rPr>
+              <a:t>与论文表格一致</a:t>
+            </a:r>
+          </a:p>
+        </p:txBody>
+      </p:sp>
+      <p:sp>
+        <p:nvSpPr>
+          <p:cNvPr id="14" name="Rounded Rectangle 13"/>
+          <p:cNvSpPr/>
+          <p:nvPr/>
+        </p:nvSpPr>
+        <p:spPr>
+          <a:xfrm>
+            <a:off x="603504" y="2724912"/>
+            <a:ext cx="6528816" cy="987552"/>
+          </a:xfrm>
+          <a:prstGeom prst="roundRect">
+            <a:avLst/>
+          </a:prstGeom>
+          <a:solidFill>
+            <a:srgbClr val="FFFFFF"/>
+          </a:solidFill>
+          <a:ln w="10160">
+            <a:solidFill>
+              <a:srgbClr val="DDE3E8"/>
+            </a:solidFill>
+          </a:ln>
+        </p:spPr>
+        <p:style>
+          <a:lnRef idx="1">
+            <a:schemeClr val="accent1"/>
+          </a:lnRef>
+          <a:fillRef idx="3">
+            <a:schemeClr val="accent1"/>
+          </a:fillRef>
+          <a:effectRef idx="2">
+            <a:schemeClr val="accent1"/>
+          </a:effectRef>
+          <a:fontRef idx="minor">
+            <a:schemeClr val="lt1"/>
+          </a:fontRef>
+        </p:style>
+        <p:txBody>
+          <a:bodyPr rtlCol="0" anchor="ctr"/>
+          <a:lstStyle/>
+          <a:p>
+            <a:pPr algn="ctr"/>
+          </a:p>
+        </p:txBody>
+      </p:sp>
+      <p:sp>
+        <p:nvSpPr>
+          <p:cNvPr id="15" name="Rectangle 14"/>
+          <p:cNvSpPr/>
+          <p:nvPr/>
+        </p:nvSpPr>
+        <p:spPr>
+          <a:xfrm>
+            <a:off x="603504" y="2724912"/>
+            <a:ext cx="64008" cy="987552"/>
+          </a:xfrm>
+          <a:prstGeom prst="rect">
+            <a:avLst/>
+          </a:prstGeom>
+          <a:solidFill>
+            <a:srgbClr val="0F766E"/>
+          </a:solidFill>
+          <a:ln w="10160">
+            <a:solidFill>
+              <a:srgbClr val="0F766E"/>
+            </a:solidFill>
+          </a:ln>
+        </p:spPr>
+        <p:style>
+          <a:lnRef idx="1">
+            <a:schemeClr val="accent1"/>
+          </a:lnRef>
+          <a:fillRef idx="3">
+            <a:schemeClr val="accent1"/>
+          </a:fillRef>
+          <a:effectRef idx="2">
+            <a:schemeClr val="accent1"/>
+          </a:effectRef>
+          <a:fontRef idx="minor">
+            <a:schemeClr val="lt1"/>
+          </a:fontRef>
+        </p:style>
+        <p:txBody>
+          <a:bodyPr rtlCol="0" anchor="ctr"/>
+          <a:lstStyle/>
+          <a:p>
+            <a:pPr algn="ctr"/>
+          </a:p>
+        </p:txBody>
+      </p:sp>
+      <p:sp>
+        <p:nvSpPr>
+          <p:cNvPr id="16" name="TextBox 15"/>
+          <p:cNvSpPr txBox="1"/>
+          <p:nvPr/>
+        </p:nvSpPr>
+        <p:spPr>
+          <a:xfrm>
+            <a:off x="841248" y="2880360"/>
+            <a:ext cx="1901952" cy="192024"/>
+          </a:xfrm>
+          <a:prstGeom prst="rect">
+            <a:avLst/>
+          </a:prstGeom>
+          <a:noFill/>
+        </p:spPr>
+        <p:txBody>
+          <a:bodyPr wrap="square" lIns="18288" rIns="18288" tIns="18288" bIns="18288" anchor="t">
+            <a:spAutoFit/>
+          </a:bodyPr>
+          <a:lstStyle/>
+          <a:p>
+            <a:pPr algn="l"/>
+            <a:r>
+              <a:rPr sz="1150" b="1">
+                <a:solidFill>
+                  <a:srgbClr val="172331"/>
+                </a:solidFill>
+                <a:latin typeface="Microsoft YaHei"/>
+              </a:rPr>
+              <a:t>多层深度对比</a:t>
+            </a:r>
+          </a:p>
+        </p:txBody>
+      </p:sp>
+      <p:sp>
+        <p:nvSpPr>
+          <p:cNvPr id="17" name="TextBox 16"/>
+          <p:cNvSpPr txBox="1"/>
+          <p:nvPr/>
+        </p:nvSpPr>
+        <p:spPr>
+          <a:xfrm>
+            <a:off x="841248" y="3236976"/>
+            <a:ext cx="1901952" cy="164592"/>
+          </a:xfrm>
+          <a:prstGeom prst="rect">
+            <a:avLst/>
+          </a:prstGeom>
+          <a:noFill/>
+        </p:spPr>
+        <p:txBody>
+          <a:bodyPr wrap="square" lIns="18288" rIns="18288" tIns="18288" bIns="18288" anchor="t">
+            <a:spAutoFit/>
+          </a:bodyPr>
+          <a:lstStyle/>
+          <a:p>
+            <a:pPr algn="l"/>
+            <a:r>
+              <a:rPr sz="900" b="0">
+                <a:solidFill>
+                  <a:srgbClr val="667381"/>
+                </a:solidFill>
+                <a:latin typeface="Microsoft YaHei"/>
+              </a:rPr>
+              <a:t>LayeredDepth · 300 张</a:t>
+            </a:r>
+          </a:p>
+        </p:txBody>
+      </p:sp>
+      <p:sp>
+        <p:nvSpPr>
+          <p:cNvPr id="18" name="TextBox 17"/>
+          <p:cNvSpPr txBox="1"/>
+          <p:nvPr/>
+        </p:nvSpPr>
+        <p:spPr>
+          <a:xfrm>
+            <a:off x="2788920" y="2871216"/>
+            <a:ext cx="3931920" cy="210312"/>
+          </a:xfrm>
+          <a:prstGeom prst="rect">
+            <a:avLst/>
+          </a:prstGeom>
+          <a:noFill/>
+        </p:spPr>
+        <p:txBody>
+          <a:bodyPr wrap="square" lIns="18288" rIns="18288" tIns="18288" bIns="18288" anchor="t">
+            <a:spAutoFit/>
+          </a:bodyPr>
+          <a:lstStyle/>
+          <a:p>
+            <a:pPr algn="r"/>
+            <a:r>
+              <a:rPr sz="1110" b="1">
+                <a:solidFill>
+                  <a:srgbClr val="0F766E"/>
+                </a:solidFill>
+                <a:latin typeface="Microsoft YaHei"/>
+              </a:rPr>
+              <a:t>4 个界面顺序全对：29.95% → 72.41%</a:t>
+            </a:r>
+          </a:p>
+        </p:txBody>
+      </p:sp>
+      <p:sp>
+        <p:nvSpPr>
+          <p:cNvPr id="19" name="TextBox 18"/>
+          <p:cNvSpPr txBox="1"/>
+          <p:nvPr/>
+        </p:nvSpPr>
+        <p:spPr>
+          <a:xfrm>
+            <a:off x="2788920" y="3246120"/>
+            <a:ext cx="3931920" cy="164592"/>
+          </a:xfrm>
+          <a:prstGeom prst="rect">
+            <a:avLst/>
+          </a:prstGeom>
+          <a:noFill/>
+        </p:spPr>
+        <p:txBody>
+          <a:bodyPr wrap="square" lIns="18288" rIns="18288" tIns="18288" bIns="18288" anchor="t">
+            <a:spAutoFit/>
+          </a:bodyPr>
+          <a:lstStyle/>
+          <a:p>
+            <a:pPr algn="r"/>
+            <a:r>
+              <a:rPr sz="890" b="0">
+                <a:solidFill>
+                  <a:srgbClr val="667381"/>
+                </a:solidFill>
+                <a:latin typeface="Microsoft YaHei"/>
+              </a:rPr>
+              <a:t>多层模型明显更完整</a:t>
+            </a:r>
+          </a:p>
+        </p:txBody>
+      </p:sp>
+      <p:sp>
+        <p:nvSpPr>
+          <p:cNvPr id="20" name="Rounded Rectangle 19"/>
+          <p:cNvSpPr/>
+          <p:nvPr/>
+        </p:nvSpPr>
+        <p:spPr>
+          <a:xfrm>
+            <a:off x="603504" y="3849624"/>
+            <a:ext cx="6528816" cy="987552"/>
+          </a:xfrm>
+          <a:prstGeom prst="roundRect">
+            <a:avLst/>
+          </a:prstGeom>
+          <a:solidFill>
+            <a:srgbClr val="FFFFFF"/>
+          </a:solidFill>
+          <a:ln w="10160">
+            <a:solidFill>
+              <a:srgbClr val="DDE3E8"/>
+            </a:solidFill>
+          </a:ln>
+        </p:spPr>
+        <p:style>
+          <a:lnRef idx="1">
+            <a:schemeClr val="accent1"/>
+          </a:lnRef>
+          <a:fillRef idx="3">
+            <a:schemeClr val="accent1"/>
+          </a:fillRef>
+          <a:effectRef idx="2">
+            <a:schemeClr val="accent1"/>
+          </a:effectRef>
+          <a:fontRef idx="minor">
+            <a:schemeClr val="lt1"/>
+          </a:fontRef>
+        </p:style>
+        <p:txBody>
+          <a:bodyPr rtlCol="0" anchor="ctr"/>
+          <a:lstStyle/>
+          <a:p>
+            <a:pPr algn="ctr"/>
+          </a:p>
+        </p:txBody>
+      </p:sp>
+      <p:sp>
+        <p:nvSpPr>
+          <p:cNvPr id="21" name="Rectangle 20"/>
+          <p:cNvSpPr/>
+          <p:nvPr/>
+        </p:nvSpPr>
+        <p:spPr>
+          <a:xfrm>
+            <a:off x="603504" y="3849624"/>
+            <a:ext cx="64008" cy="987552"/>
+          </a:xfrm>
+          <a:prstGeom prst="rect">
+            <a:avLst/>
+          </a:prstGeom>
+          <a:solidFill>
+            <a:srgbClr val="C46B16"/>
+          </a:solidFill>
+          <a:ln w="10160">
+            <a:solidFill>
+              <a:srgbClr val="C46B16"/>
+            </a:solidFill>
+          </a:ln>
+        </p:spPr>
+        <p:style>
+          <a:lnRef idx="1">
+            <a:schemeClr val="accent1"/>
+          </a:lnRef>
+          <a:fillRef idx="3">
+            <a:schemeClr val="accent1"/>
+          </a:fillRef>
+          <a:effectRef idx="2">
+            <a:schemeClr val="accent1"/>
+          </a:effectRef>
+          <a:fontRef idx="minor">
+            <a:schemeClr val="lt1"/>
+          </a:fontRef>
+        </p:style>
+        <p:txBody>
+          <a:bodyPr rtlCol="0" anchor="ctr"/>
+          <a:lstStyle/>
+          <a:p>
+            <a:pPr algn="ctr"/>
+          </a:p>
+        </p:txBody>
+      </p:sp>
+      <p:sp>
+        <p:nvSpPr>
+          <p:cNvPr id="22" name="TextBox 21"/>
+          <p:cNvSpPr txBox="1"/>
+          <p:nvPr/>
+        </p:nvSpPr>
+        <p:spPr>
+          <a:xfrm>
+            <a:off x="841248" y="4005072"/>
+            <a:ext cx="1901952" cy="192024"/>
+          </a:xfrm>
+          <a:prstGeom prst="rect">
+            <a:avLst/>
+          </a:prstGeom>
+          <a:noFill/>
+        </p:spPr>
+        <p:txBody>
+          <a:bodyPr wrap="square" lIns="18288" rIns="18288" tIns="18288" bIns="18288" anchor="t">
+            <a:spAutoFit/>
+          </a:bodyPr>
+          <a:lstStyle/>
+          <a:p>
+            <a:pPr algn="l"/>
+            <a:r>
+              <a:rPr sz="1150" b="1">
+                <a:solidFill>
+                  <a:srgbClr val="172331"/>
+                </a:solidFill>
+                <a:latin typeface="Microsoft YaHei"/>
+              </a:rPr>
+              <a:t>薄壳几何检查</a:t>
+            </a:r>
+          </a:p>
+        </p:txBody>
+      </p:sp>
+      <p:sp>
+        <p:nvSpPr>
+          <p:cNvPr id="23" name="TextBox 22"/>
+          <p:cNvSpPr txBox="1"/>
+          <p:nvPr/>
+        </p:nvSpPr>
+        <p:spPr>
+          <a:xfrm>
+            <a:off x="841248" y="4361688"/>
+            <a:ext cx="1901952" cy="164592"/>
+          </a:xfrm>
+          <a:prstGeom prst="rect">
+            <a:avLst/>
+          </a:prstGeom>
+          <a:noFill/>
+        </p:spPr>
+        <p:txBody>
+          <a:bodyPr wrap="square" lIns="18288" rIns="18288" tIns="18288" bIns="18288" anchor="t">
+            <a:spAutoFit/>
+          </a:bodyPr>
+          <a:lstStyle/>
+          <a:p>
+            <a:pPr algn="l"/>
+            <a:r>
+              <a:rPr sz="900" b="0">
+                <a:solidFill>
+                  <a:srgbClr val="667381"/>
+                </a:solidFill>
+                <a:latin typeface="Microsoft YaHei"/>
+              </a:rPr>
+              <a:t>TablewareNet · 100 个场景</a:t>
+            </a:r>
+          </a:p>
+        </p:txBody>
+      </p:sp>
+      <p:sp>
+        <p:nvSpPr>
+          <p:cNvPr id="24" name="TextBox 23"/>
+          <p:cNvSpPr txBox="1"/>
+          <p:nvPr/>
+        </p:nvSpPr>
+        <p:spPr>
+          <a:xfrm>
+            <a:off x="2788920" y="3995928"/>
+            <a:ext cx="3931920" cy="210312"/>
+          </a:xfrm>
+          <a:prstGeom prst="rect">
+            <a:avLst/>
+          </a:prstGeom>
+          <a:noFill/>
+        </p:spPr>
+        <p:txBody>
+          <a:bodyPr wrap="square" lIns="18288" rIns="18288" tIns="18288" bIns="18288" anchor="t">
+            <a:spAutoFit/>
+          </a:bodyPr>
+          <a:lstStyle/>
+          <a:p>
+            <a:pPr algn="r"/>
+            <a:r>
+              <a:rPr sz="1110" b="1">
+                <a:solidFill>
+                  <a:srgbClr val="C46B16"/>
+                </a:solidFill>
+                <a:latin typeface="Microsoft YaHei"/>
+              </a:rPr>
+              <a:t>已知真实物体区域时，界面识别 F1 = 79.15%</a:t>
+            </a:r>
+          </a:p>
+        </p:txBody>
+      </p:sp>
+      <p:sp>
+        <p:nvSpPr>
+          <p:cNvPr id="25" name="TextBox 24"/>
+          <p:cNvSpPr txBox="1"/>
+          <p:nvPr/>
+        </p:nvSpPr>
+        <p:spPr>
+          <a:xfrm>
+            <a:off x="2788920" y="4370832"/>
+            <a:ext cx="3931920" cy="164592"/>
+          </a:xfrm>
+          <a:prstGeom prst="rect">
+            <a:avLst/>
+          </a:prstGeom>
+          <a:noFill/>
+        </p:spPr>
+        <p:txBody>
+          <a:bodyPr wrap="square" lIns="18288" rIns="18288" tIns="18288" bIns="18288" anchor="t">
+            <a:spAutoFit/>
+          </a:bodyPr>
+          <a:lstStyle/>
+          <a:p>
+            <a:pPr algn="r"/>
+            <a:r>
+              <a:rPr sz="890" b="0">
+                <a:solidFill>
+                  <a:srgbClr val="667381"/>
+                </a:solidFill>
+                <a:latin typeface="Microsoft YaHei"/>
+              </a:rPr>
+              <a:t>说明几何路线可行，不是论文正式分数</a:t>
+            </a:r>
+          </a:p>
+        </p:txBody>
+      </p:sp>
+      <p:sp>
+        <p:nvSpPr>
+          <p:cNvPr id="26" name="TextBox 25"/>
+          <p:cNvSpPr txBox="1"/>
+          <p:nvPr/>
+        </p:nvSpPr>
+        <p:spPr>
+          <a:xfrm>
+            <a:off x="7370064" y="1161288"/>
+            <a:ext cx="1920240" cy="219456"/>
+          </a:xfrm>
+          <a:prstGeom prst="rect">
+            <a:avLst/>
+          </a:prstGeom>
+          <a:noFill/>
+        </p:spPr>
+        <p:txBody>
+          <a:bodyPr wrap="square" lIns="18288" rIns="18288" tIns="18288" bIns="18288" anchor="t">
+            <a:spAutoFit/>
+          </a:bodyPr>
+          <a:lstStyle/>
+          <a:p>
+            <a:pPr algn="l"/>
+            <a:r>
+              <a:rPr sz="1400" b="1">
+                <a:solidFill>
+                  <a:srgbClr val="172331"/>
+                </a:solidFill>
+                <a:latin typeface="Microsoft YaHei"/>
+              </a:rPr>
+              <a:t>仍未完成</a:t>
+            </a:r>
+          </a:p>
+        </p:txBody>
+      </p:sp>
+      <p:sp>
+        <p:nvSpPr>
+          <p:cNvPr id="27" name="Rounded Rectangle 26"/>
+          <p:cNvSpPr/>
+          <p:nvPr/>
+        </p:nvSpPr>
+        <p:spPr>
+          <a:xfrm>
+            <a:off x="10305288" y="1115568"/>
+            <a:ext cx="1280160" cy="292608"/>
+          </a:xfrm>
+          <a:prstGeom prst="roundRect">
+            <a:avLst/>
+          </a:prstGeom>
+          <a:solidFill>
+            <a:srgbClr val="FFF4E8"/>
+          </a:solidFill>
+          <a:ln w="10160">
+            <a:solidFill>
+              <a:srgbClr val="FFF4E8"/>
+            </a:solidFill>
+          </a:ln>
+        </p:spPr>
+        <p:style>
+          <a:lnRef idx="1">
+            <a:schemeClr val="accent1"/>
+          </a:lnRef>
+          <a:fillRef idx="3">
+            <a:schemeClr val="accent1"/>
+          </a:fillRef>
+          <a:effectRef idx="2">
+            <a:schemeClr val="accent1"/>
+          </a:effectRef>
+          <a:fontRef idx="minor">
+            <a:schemeClr val="lt1"/>
+          </a:fontRef>
+        </p:style>
+        <p:txBody>
+          <a:bodyPr rtlCol="0" anchor="ctr"/>
+          <a:lstStyle/>
+          <a:p>
+            <a:pPr algn="ctr"/>
+          </a:p>
+        </p:txBody>
+      </p:sp>
+      <p:sp>
+        <p:nvSpPr>
+          <p:cNvPr id="28" name="TextBox 27"/>
+          <p:cNvSpPr txBox="1"/>
+          <p:nvPr/>
+        </p:nvSpPr>
+        <p:spPr>
+          <a:xfrm>
+            <a:off x="10305288" y="1184148"/>
+            <a:ext cx="1280160" cy="118872"/>
+          </a:xfrm>
+          <a:prstGeom prst="rect">
+            <a:avLst/>
+          </a:prstGeom>
+          <a:noFill/>
+        </p:spPr>
+        <p:txBody>
+          <a:bodyPr wrap="square" lIns="18288" rIns="18288" tIns="18288" bIns="18288" anchor="t">
+            <a:spAutoFit/>
+          </a:bodyPr>
+          <a:lstStyle/>
+          <a:p>
+            <a:pPr algn="ctr"/>
+            <a:r>
+              <a:rPr sz="880" b="1">
+                <a:solidFill>
+                  <a:srgbClr val="C46B16"/>
+                </a:solidFill>
+                <a:latin typeface="Microsoft YaHei"/>
+              </a:rPr>
+              <a:t>暂不下结论</a:t>
+            </a:r>
+          </a:p>
+        </p:txBody>
+      </p:sp>
+      <p:sp>
+        <p:nvSpPr>
+          <p:cNvPr id="29" name="Rounded Rectangle 28"/>
+          <p:cNvSpPr/>
+          <p:nvPr/>
+        </p:nvSpPr>
+        <p:spPr>
+          <a:xfrm>
+            <a:off x="7370064" y="1600200"/>
+            <a:ext cx="4215384" cy="1554480"/>
+          </a:xfrm>
+          <a:prstGeom prst="roundRect">
+            <a:avLst/>
+          </a:prstGeom>
+          <a:solidFill>
+            <a:srgbClr val="FFFFFF"/>
+          </a:solidFill>
+          <a:ln w="10160">
+            <a:solidFill>
+              <a:srgbClr val="DDE3E8"/>
+            </a:solidFill>
+          </a:ln>
+        </p:spPr>
+        <p:style>
+          <a:lnRef idx="1">
+            <a:schemeClr val="accent1"/>
+          </a:lnRef>
+          <a:fillRef idx="3">
+            <a:schemeClr val="accent1"/>
+          </a:fillRef>
+          <a:effectRef idx="2">
+            <a:schemeClr val="accent1"/>
+          </a:effectRef>
+          <a:fontRef idx="minor">
+            <a:schemeClr val="lt1"/>
+          </a:fontRef>
+        </p:style>
+        <p:txBody>
+          <a:bodyPr rtlCol="0" anchor="ctr"/>
+          <a:lstStyle/>
+          <a:p>
+            <a:pPr algn="ctr"/>
+          </a:p>
+        </p:txBody>
+      </p:sp>
+      <p:sp>
+        <p:nvSpPr>
+          <p:cNvPr id="30" name="Rectangle 29"/>
+          <p:cNvSpPr/>
+          <p:nvPr/>
+        </p:nvSpPr>
+        <p:spPr>
+          <a:xfrm>
+            <a:off x="7370064" y="1600200"/>
+            <a:ext cx="64008" cy="1554480"/>
+          </a:xfrm>
+          <a:prstGeom prst="rect">
+            <a:avLst/>
+          </a:prstGeom>
+          <a:solidFill>
+            <a:srgbClr val="C46B16"/>
+          </a:solidFill>
+          <a:ln w="10160">
+            <a:solidFill>
+              <a:srgbClr val="C46B16"/>
+            </a:solidFill>
+          </a:ln>
+        </p:spPr>
+        <p:style>
+          <a:lnRef idx="1">
+            <a:schemeClr val="accent1"/>
+          </a:lnRef>
+          <a:fillRef idx="3">
+            <a:schemeClr val="accent1"/>
+          </a:fillRef>
+          <a:effectRef idx="2">
+            <a:schemeClr val="accent1"/>
+          </a:effectRef>
+          <a:fontRef idx="minor">
+            <a:schemeClr val="lt1"/>
+          </a:fontRef>
+        </p:style>
+        <p:txBody>
+          <a:bodyPr rtlCol="0" anchor="ctr"/>
+          <a:lstStyle/>
+          <a:p>
+            <a:pPr algn="ctr"/>
+          </a:p>
+        </p:txBody>
+      </p:sp>
+      <p:sp>
+        <p:nvSpPr>
+          <p:cNvPr id="31" name="TextBox 30"/>
+          <p:cNvSpPr txBox="1"/>
+          <p:nvPr/>
+        </p:nvSpPr>
+        <p:spPr>
+          <a:xfrm>
+            <a:off x="7626096" y="1792224"/>
+            <a:ext cx="3666744" cy="210312"/>
+          </a:xfrm>
+          <a:prstGeom prst="rect">
+            <a:avLst/>
+          </a:prstGeom>
+          <a:noFill/>
+        </p:spPr>
+        <p:txBody>
+          <a:bodyPr wrap="square" lIns="18288" rIns="18288" tIns="18288" bIns="18288" anchor="t">
+            <a:spAutoFit/>
+          </a:bodyPr>
+          <a:lstStyle/>
+          <a:p>
+            <a:pPr algn="l"/>
+            <a:r>
+              <a:rPr sz="1220" b="1">
+                <a:solidFill>
+                  <a:srgbClr val="172331"/>
+                </a:solidFill>
+                <a:latin typeface="Microsoft YaHei"/>
+              </a:rPr>
+              <a:t>TransCG 全量测试</a:t>
+            </a:r>
+          </a:p>
+        </p:txBody>
+      </p:sp>
+      <p:sp>
+        <p:nvSpPr>
+          <p:cNvPr id="32" name="TextBox 31"/>
+          <p:cNvSpPr txBox="1"/>
+          <p:nvPr/>
+        </p:nvSpPr>
+        <p:spPr>
+          <a:xfrm>
+            <a:off x="7626096" y="2148840"/>
+            <a:ext cx="3666744" cy="182880"/>
+          </a:xfrm>
+          <a:prstGeom prst="rect">
+            <a:avLst/>
+          </a:prstGeom>
+          <a:noFill/>
+        </p:spPr>
+        <p:txBody>
+          <a:bodyPr wrap="square" lIns="18288" rIns="18288" tIns="18288" bIns="18288" anchor="t">
+            <a:spAutoFit/>
+          </a:bodyPr>
+          <a:lstStyle/>
+          <a:p>
+            <a:pPr algn="l"/>
+            <a:r>
+              <a:rPr sz="930" b="0">
+                <a:solidFill>
+                  <a:srgbClr val="667381"/>
+                </a:solidFill>
+                <a:latin typeface="Microsoft YaHei"/>
+              </a:rPr>
+              <a:t>需要 52 个场景 / 23,524 个样本</a:t>
+            </a:r>
+          </a:p>
+        </p:txBody>
+      </p:sp>
+      <p:sp>
+        <p:nvSpPr>
+          <p:cNvPr id="33" name="TextBox 32"/>
+          <p:cNvSpPr txBox="1"/>
+          <p:nvPr/>
+        </p:nvSpPr>
+        <p:spPr>
+          <a:xfrm>
+            <a:off x="7626096" y="2496312"/>
+            <a:ext cx="3666744" cy="201168"/>
+          </a:xfrm>
+          <a:prstGeom prst="rect">
+            <a:avLst/>
+          </a:prstGeom>
+          <a:noFill/>
+        </p:spPr>
+        <p:txBody>
+          <a:bodyPr wrap="square" lIns="18288" rIns="18288" tIns="18288" bIns="18288" anchor="t">
+            <a:spAutoFit/>
+          </a:bodyPr>
+          <a:lstStyle/>
+          <a:p>
+            <a:pPr algn="l"/>
+            <a:r>
+              <a:rPr sz="1130" b="1">
+                <a:solidFill>
+                  <a:srgbClr val="C46B16"/>
+                </a:solidFill>
+                <a:latin typeface="Microsoft YaHei"/>
+              </a:rPr>
+              <a:t>已取得 40 / 52 个场景</a:t>
+            </a:r>
+          </a:p>
+        </p:txBody>
+      </p:sp>
+      <p:sp>
+        <p:nvSpPr>
+          <p:cNvPr id="34" name="TextBox 33"/>
+          <p:cNvSpPr txBox="1"/>
+          <p:nvPr/>
+        </p:nvSpPr>
+        <p:spPr>
+          <a:xfrm>
+            <a:off x="7626096" y="2825496"/>
+            <a:ext cx="3666744" cy="164592"/>
+          </a:xfrm>
+          <a:prstGeom prst="rect">
+            <a:avLst/>
+          </a:prstGeom>
+          <a:noFill/>
+        </p:spPr>
+        <p:txBody>
+          <a:bodyPr wrap="square" lIns="18288" rIns="18288" tIns="18288" bIns="18288" anchor="t">
+            <a:spAutoFit/>
+          </a:bodyPr>
+          <a:lstStyle/>
+          <a:p>
+            <a:pPr algn="l"/>
+            <a:r>
+              <a:rPr sz="890" b="0">
+                <a:solidFill>
+                  <a:srgbClr val="667381"/>
+                </a:solidFill>
+                <a:latin typeface="Microsoft YaHei"/>
+              </a:rPr>
+              <a:t>缺少 12 个场景，暂不报最终指标</a:t>
+            </a:r>
+          </a:p>
+        </p:txBody>
+      </p:sp>
+      <p:sp>
+        <p:nvSpPr>
+          <p:cNvPr id="35" name="Rounded Rectangle 34"/>
+          <p:cNvSpPr/>
+          <p:nvPr/>
+        </p:nvSpPr>
+        <p:spPr>
+          <a:xfrm>
+            <a:off x="7370064" y="3346704"/>
+            <a:ext cx="4215384" cy="1554480"/>
+          </a:xfrm>
+          <a:prstGeom prst="roundRect">
+            <a:avLst/>
+          </a:prstGeom>
+          <a:solidFill>
+            <a:srgbClr val="FFFFFF"/>
+          </a:solidFill>
+          <a:ln w="10160">
+            <a:solidFill>
+              <a:srgbClr val="DDE3E8"/>
+            </a:solidFill>
+          </a:ln>
+        </p:spPr>
+        <p:style>
+          <a:lnRef idx="1">
+            <a:schemeClr val="accent1"/>
+          </a:lnRef>
+          <a:fillRef idx="3">
+            <a:schemeClr val="accent1"/>
+          </a:fillRef>
+          <a:effectRef idx="2">
+            <a:schemeClr val="accent1"/>
+          </a:effectRef>
+          <a:fontRef idx="minor">
+            <a:schemeClr val="lt1"/>
+          </a:fontRef>
+        </p:style>
+        <p:txBody>
+          <a:bodyPr rtlCol="0" anchor="ctr"/>
+          <a:lstStyle/>
+          <a:p>
+            <a:pPr algn="ctr"/>
+          </a:p>
+        </p:txBody>
+      </p:sp>
+      <p:sp>
+        <p:nvSpPr>
+          <p:cNvPr id="36" name="Rectangle 35"/>
+          <p:cNvSpPr/>
+          <p:nvPr/>
+        </p:nvSpPr>
+        <p:spPr>
+          <a:xfrm>
+            <a:off x="7370064" y="3346704"/>
+            <a:ext cx="64008" cy="1554480"/>
+          </a:xfrm>
+          <a:prstGeom prst="rect">
+            <a:avLst/>
+          </a:prstGeom>
+          <a:solidFill>
+            <a:srgbClr val="C46B16"/>
+          </a:solidFill>
+          <a:ln w="10160">
+            <a:solidFill>
+              <a:srgbClr val="C46B16"/>
+            </a:solidFill>
+          </a:ln>
+        </p:spPr>
+        <p:style>
+          <a:lnRef idx="1">
+            <a:schemeClr val="accent1"/>
+          </a:lnRef>
+          <a:fillRef idx="3">
+            <a:schemeClr val="accent1"/>
+          </a:fillRef>
+          <a:effectRef idx="2">
+            <a:schemeClr val="accent1"/>
+          </a:effectRef>
+          <a:fontRef idx="minor">
+            <a:schemeClr val="lt1"/>
+          </a:fontRef>
+        </p:style>
+        <p:txBody>
+          <a:bodyPr rtlCol="0" anchor="ctr"/>
+          <a:lstStyle/>
+          <a:p>
+            <a:pPr algn="ctr"/>
+          </a:p>
+        </p:txBody>
+      </p:sp>
+      <p:sp>
+        <p:nvSpPr>
+          <p:cNvPr id="37" name="TextBox 36"/>
+          <p:cNvSpPr txBox="1"/>
+          <p:nvPr/>
+        </p:nvSpPr>
+        <p:spPr>
+          <a:xfrm>
+            <a:off x="7626096" y="3538728"/>
+            <a:ext cx="3666744" cy="210312"/>
+          </a:xfrm>
+          <a:prstGeom prst="rect">
+            <a:avLst/>
+          </a:prstGeom>
+          <a:noFill/>
+        </p:spPr>
+        <p:txBody>
+          <a:bodyPr wrap="square" lIns="18288" rIns="18288" tIns="18288" bIns="18288" anchor="t">
+            <a:spAutoFit/>
+          </a:bodyPr>
+          <a:lstStyle/>
+          <a:p>
+            <a:pPr algn="l"/>
+            <a:r>
+              <a:rPr sz="1220" b="1">
+                <a:solidFill>
+                  <a:srgbClr val="172331"/>
+                </a:solidFill>
+                <a:latin typeface="Microsoft YaHei"/>
+              </a:rPr>
+              <a:t>机器人抓取收益</a:t>
+            </a:r>
+          </a:p>
+        </p:txBody>
+      </p:sp>
+      <p:sp>
+        <p:nvSpPr>
+          <p:cNvPr id="38" name="TextBox 37"/>
+          <p:cNvSpPr txBox="1"/>
+          <p:nvPr/>
+        </p:nvSpPr>
+        <p:spPr>
+          <a:xfrm>
+            <a:off x="7626096" y="3895344"/>
+            <a:ext cx="3666744" cy="182880"/>
+          </a:xfrm>
+          <a:prstGeom prst="rect">
+            <a:avLst/>
+          </a:prstGeom>
+          <a:noFill/>
+        </p:spPr>
+        <p:txBody>
+          <a:bodyPr wrap="square" lIns="18288" rIns="18288" tIns="18288" bIns="18288" anchor="t">
+            <a:spAutoFit/>
+          </a:bodyPr>
+          <a:lstStyle/>
+          <a:p>
+            <a:pPr algn="l"/>
+            <a:r>
+              <a:rPr sz="930" b="0">
+                <a:solidFill>
+                  <a:srgbClr val="667381"/>
+                </a:solidFill>
+                <a:latin typeface="Microsoft YaHei"/>
+              </a:rPr>
+              <a:t>还没有公平比较单层与多层输入</a:t>
+            </a:r>
+          </a:p>
+        </p:txBody>
+      </p:sp>
+      <p:sp>
+        <p:nvSpPr>
+          <p:cNvPr id="39" name="TextBox 38"/>
+          <p:cNvSpPr txBox="1"/>
+          <p:nvPr/>
+        </p:nvSpPr>
+        <p:spPr>
+          <a:xfrm>
+            <a:off x="7626096" y="4242816"/>
+            <a:ext cx="3666744" cy="201168"/>
+          </a:xfrm>
+          <a:prstGeom prst="rect">
+            <a:avLst/>
+          </a:prstGeom>
+          <a:noFill/>
+        </p:spPr>
+        <p:txBody>
+          <a:bodyPr wrap="square" lIns="18288" rIns="18288" tIns="18288" bIns="18288" anchor="t">
+            <a:spAutoFit/>
+          </a:bodyPr>
+          <a:lstStyle/>
+          <a:p>
+            <a:pPr algn="l"/>
+            <a:r>
+              <a:rPr sz="1130" b="1">
+                <a:solidFill>
+                  <a:srgbClr val="C46B16"/>
+                </a:solidFill>
+                <a:latin typeface="Microsoft YaHei"/>
+              </a:rPr>
+              <a:t>尚无抓取成功率结论</a:t>
+            </a:r>
+          </a:p>
+        </p:txBody>
+      </p:sp>
+      <p:sp>
+        <p:nvSpPr>
+          <p:cNvPr id="40" name="TextBox 39"/>
+          <p:cNvSpPr txBox="1"/>
+          <p:nvPr/>
+        </p:nvSpPr>
+        <p:spPr>
+          <a:xfrm>
+            <a:off x="7626096" y="4572000"/>
+            <a:ext cx="3666744" cy="164592"/>
+          </a:xfrm>
+          <a:prstGeom prst="rect">
+            <a:avLst/>
+          </a:prstGeom>
+          <a:noFill/>
+        </p:spPr>
+        <p:txBody>
+          <a:bodyPr wrap="square" lIns="18288" rIns="18288" tIns="18288" bIns="18288" anchor="t">
+            <a:spAutoFit/>
+          </a:bodyPr>
+          <a:lstStyle/>
+          <a:p>
+            <a:pPr algn="l"/>
+            <a:r>
+              <a:rPr sz="890" b="0">
+                <a:solidFill>
+                  <a:srgbClr val="667381"/>
+                </a:solidFill>
+                <a:latin typeface="Microsoft YaHei"/>
+              </a:rPr>
+              <a:t>下一页用同一规划器直接验证</a:t>
+            </a:r>
+          </a:p>
+        </p:txBody>
+      </p:sp>
+      <p:sp>
+        <p:nvSpPr>
+          <p:cNvPr id="41" name="Rounded Rectangle 40"/>
+          <p:cNvSpPr/>
+          <p:nvPr/>
+        </p:nvSpPr>
+        <p:spPr>
+          <a:xfrm>
+            <a:off x="786384" y="5230368"/>
+            <a:ext cx="10588752" cy="786384"/>
+          </a:xfrm>
+          <a:prstGeom prst="roundRect">
+            <a:avLst/>
+          </a:prstGeom>
+          <a:solidFill>
+            <a:srgbClr val="EEF4FF"/>
+          </a:solidFill>
+          <a:ln w="10160">
+            <a:solidFill>
+              <a:srgbClr val="EEF4FF"/>
+            </a:solidFill>
+          </a:ln>
+        </p:spPr>
+        <p:style>
+          <a:lnRef idx="1">
+            <a:schemeClr val="accent1"/>
+          </a:lnRef>
+          <a:fillRef idx="3">
+            <a:schemeClr val="accent1"/>
+          </a:fillRef>
+          <a:effectRef idx="2">
+            <a:schemeClr val="accent1"/>
+          </a:effectRef>
+          <a:fontRef idx="minor">
+            <a:schemeClr val="lt1"/>
+          </a:fontRef>
+        </p:style>
+        <p:txBody>
+          <a:bodyPr rtlCol="0" anchor="ctr"/>
+          <a:lstStyle/>
+          <a:p>
+            <a:pPr algn="ctr"/>
+          </a:p>
+        </p:txBody>
+      </p:sp>
+      <p:sp>
+        <p:nvSpPr>
+          <p:cNvPr id="42" name="TextBox 41"/>
+          <p:cNvSpPr txBox="1"/>
+          <p:nvPr/>
+        </p:nvSpPr>
+        <p:spPr>
+          <a:xfrm>
+            <a:off x="1042415" y="5486400"/>
+            <a:ext cx="1261872" cy="201168"/>
+          </a:xfrm>
+          <a:prstGeom prst="rect">
+            <a:avLst/>
+          </a:prstGeom>
+          <a:noFill/>
+        </p:spPr>
+        <p:txBody>
+          <a:bodyPr wrap="square" lIns="18288" rIns="18288" tIns="18288" bIns="18288" anchor="t">
+            <a:spAutoFit/>
+          </a:bodyPr>
+          <a:lstStyle/>
+          <a:p>
+            <a:pPr algn="l"/>
+            <a:r>
+              <a:rPr sz="1200" b="1">
+                <a:solidFill>
+                  <a:srgbClr val="2563EB"/>
+                </a:solidFill>
+                <a:latin typeface="Microsoft YaHei"/>
+              </a:rPr>
+              <a:t>目前结论</a:t>
+            </a:r>
+          </a:p>
+        </p:txBody>
+      </p:sp>
+      <p:sp>
+        <p:nvSpPr>
+          <p:cNvPr id="43" name="TextBox 42"/>
+          <p:cNvSpPr txBox="1"/>
+          <p:nvPr/>
+        </p:nvSpPr>
+        <p:spPr>
+          <a:xfrm>
+            <a:off x="2203704" y="5449824"/>
+            <a:ext cx="8750808" cy="283464"/>
+          </a:xfrm>
+          <a:prstGeom prst="rect">
+            <a:avLst/>
+          </a:prstGeom>
+          <a:noFill/>
+        </p:spPr>
+        <p:txBody>
+          <a:bodyPr wrap="square" lIns="18288" rIns="18288" tIns="18288" bIns="18288" anchor="t">
+            <a:spAutoFit/>
+          </a:bodyPr>
+          <a:lstStyle/>
+          <a:p>
+            <a:pPr algn="l"/>
+            <a:r>
+              <a:rPr sz="1320" b="1">
+                <a:solidFill>
+                  <a:srgbClr val="172331"/>
+                </a:solidFill>
+                <a:latin typeface="Microsoft YaHei"/>
+              </a:rPr>
+              <a:t>多层深度能更完整地描述透明物体；是否让机器人抓得更稳，还需要下一步实验。</a:t>
+            </a:r>
+          </a:p>
+        </p:txBody>
+      </p:sp>
+      <p:sp>
+        <p:nvSpPr>
+          <p:cNvPr id="44" name="TextBox 43"/>
+          <p:cNvSpPr txBox="1"/>
+          <p:nvPr/>
+        </p:nvSpPr>
+        <p:spPr>
+          <a:xfrm>
+            <a:off x="521207" y="6565392"/>
+            <a:ext cx="10881360" cy="137160"/>
+          </a:xfrm>
+          <a:prstGeom prst="rect">
+            <a:avLst/>
+          </a:prstGeom>
+          <a:noFill/>
+        </p:spPr>
+        <p:txBody>
+          <a:bodyPr wrap="square" lIns="18288" rIns="18288" tIns="18288" bIns="18288" anchor="t">
+            <a:spAutoFit/>
+          </a:bodyPr>
+          <a:lstStyle/>
+          <a:p>
+            <a:pPr algn="l"/>
+            <a:r>
+              <a:rPr sz="720" b="0">
+                <a:solidFill>
+                  <a:srgbClr val="667381"/>
+                </a:solidFill>
+                <a:latin typeface="Microsoft YaHei"/>
+              </a:rPr>
+              <a:t>所有数字都来自本地完整运行；未完成的实验不提前写成结论。</a:t>
+            </a:r>
+          </a:p>
+        </p:txBody>
+      </p:sp>
+    </p:spTree>
+  </p:cSld>
+  <p:clrMapOvr>
+    <a:masterClrMapping/>
+  </p:clrMapOvr>
+</p:sld>
+</file>
+
+<file path=ppt/slides/slide8.xml><?xml version="1.0" encoding="utf-8"?>
+<p:sld xmlns:a="http://schemas.openxmlformats.org/drawingml/2006/main" xmlns:p="http://schemas.openxmlformats.org/presentationml/2006/main" xmlns:r="http://schemas.openxmlformats.org/officeDocument/2006/relationships">
+  <p:cSld>
+    <p:bg>
+      <p:bgPr>
+        <a:solidFill>
+          <a:srgbClr val="FFFFFF"/>
+        </a:solidFill>
+        <a:effectLst/>
+      </p:bgPr>
+    </p:bg>
+    <p:spTree>
+      <p:nvGrpSpPr>
+        <p:cNvPr id="1" name=""/>
+        <p:cNvGrpSpPr/>
+        <p:nvPr/>
+      </p:nvGrpSpPr>
+      <p:grpSpPr/>
+      <p:sp>
+        <p:nvSpPr>
+          <p:cNvPr id="2" name="TextBox 1"/>
+          <p:cNvSpPr txBox="1"/>
+          <p:nvPr/>
+        </p:nvSpPr>
+        <p:spPr>
+          <a:xfrm>
+            <a:off x="512064" y="338328"/>
+            <a:ext cx="457200" cy="182880"/>
+          </a:xfrm>
+          <a:prstGeom prst="rect">
+            <a:avLst/>
+          </a:prstGeom>
+          <a:noFill/>
+        </p:spPr>
+        <p:txBody>
+          <a:bodyPr wrap="square" lIns="18288" rIns="18288" tIns="18288" bIns="18288" anchor="t">
+            <a:spAutoFit/>
+          </a:bodyPr>
+          <a:lstStyle/>
+          <a:p>
+            <a:pPr algn="l"/>
+            <a:r>
+              <a:rPr sz="900" b="1">
+                <a:solidFill>
+                  <a:srgbClr val="0F766E"/>
+                </a:solidFill>
+                <a:latin typeface="Microsoft YaHei"/>
+              </a:rPr>
+              <a:t>08</a:t>
+            </a:r>
+          </a:p>
+        </p:txBody>
+      </p:sp>
+      <p:sp>
+        <p:nvSpPr>
+          <p:cNvPr id="3" name="TextBox 2"/>
+          <p:cNvSpPr txBox="1"/>
+          <p:nvPr/>
+        </p:nvSpPr>
+        <p:spPr>
+          <a:xfrm>
+            <a:off x="960120" y="283464"/>
+            <a:ext cx="10424160" cy="384048"/>
+          </a:xfrm>
+          <a:prstGeom prst="rect">
+            <a:avLst/>
+          </a:prstGeom>
+          <a:noFill/>
+        </p:spPr>
+        <p:txBody>
+          <a:bodyPr wrap="square" lIns="18288" rIns="18288" tIns="18288" bIns="18288" anchor="t">
+            <a:spAutoFit/>
+          </a:bodyPr>
+          <a:lstStyle/>
+          <a:p>
+            <a:pPr algn="l"/>
+            <a:r>
+              <a:rPr sz="2400" b="1">
+                <a:solidFill>
+                  <a:srgbClr val="172331"/>
+                </a:solidFill>
+                <a:latin typeface="Microsoft YaHei"/>
+              </a:rPr>
+              <a:t>下一步：证明“多层深度是否真的更好抓”</a:t>
+            </a:r>
+          </a:p>
+        </p:txBody>
+      </p:sp>
+      <p:cxnSp>
+        <p:nvCxnSpPr>
+          <p:cNvPr id="4" name="Connector 3"/>
+          <p:cNvCxnSpPr/>
+          <p:nvPr/>
+        </p:nvCxnSpPr>
+        <p:spPr>
+          <a:xfrm>
+            <a:off x="512064" y="850392"/>
+            <a:ext cx="11137392" cy="0"/>
+          </a:xfrm>
+          <a:prstGeom prst="line">
+            <a:avLst/>
+          </a:prstGeom>
+          <a:ln w="11430">
+            <a:solidFill>
+              <a:srgbClr val="DDE3E8"/>
+            </a:solidFill>
+          </a:ln>
+        </p:spPr>
+        <p:style>
+          <a:lnRef idx="2">
+            <a:schemeClr val="accent1"/>
+          </a:lnRef>
+          <a:fillRef idx="0">
+            <a:schemeClr val="accent1"/>
+          </a:fillRef>
+          <a:effectRef idx="1">
+            <a:schemeClr val="accent1"/>
+          </a:effectRef>
+          <a:fontRef idx="minor">
+            <a:schemeClr val="tx1"/>
+          </a:fontRef>
+        </p:style>
+      </p:cxnSp>
+      <p:sp>
+        <p:nvSpPr>
+          <p:cNvPr id="5" name="TextBox 4"/>
+          <p:cNvSpPr txBox="1"/>
+          <p:nvPr/>
+        </p:nvSpPr>
+        <p:spPr>
+          <a:xfrm>
+            <a:off x="603504" y="1069848"/>
+            <a:ext cx="10424160" cy="228600"/>
+          </a:xfrm>
+          <a:prstGeom prst="rect">
+            <a:avLst/>
+          </a:prstGeom>
+          <a:noFill/>
+        </p:spPr>
+        <p:txBody>
+          <a:bodyPr wrap="square" lIns="18288" rIns="18288" tIns="18288" bIns="18288" anchor="t">
+            <a:spAutoFit/>
+          </a:bodyPr>
+          <a:lstStyle/>
+          <a:p>
+            <a:pPr algn="l"/>
+            <a:r>
+              <a:rPr sz="1320" b="0">
+                <a:solidFill>
+                  <a:srgbClr val="667381"/>
+                </a:solidFill>
+                <a:latin typeface="Microsoft YaHei"/>
+              </a:rPr>
+              <a:t>保持物体、物体区域和抓取规划器完全相同，只改变输入的几何信息。</a:t>
+            </a:r>
+          </a:p>
+        </p:txBody>
+      </p:sp>
+      <p:sp>
+        <p:nvSpPr>
+          <p:cNvPr id="6" name="Rounded Rectangle 5"/>
+          <p:cNvSpPr/>
+          <p:nvPr/>
+        </p:nvSpPr>
+        <p:spPr>
+          <a:xfrm>
+            <a:off x="960120" y="1517904"/>
+            <a:ext cx="10268712" cy="630936"/>
+          </a:xfrm>
+          <a:prstGeom prst="roundRect">
+            <a:avLst/>
+          </a:prstGeom>
+          <a:solidFill>
+            <a:srgbClr val="EAF6F4"/>
+          </a:solidFill>
+          <a:ln w="10160">
+            <a:solidFill>
+              <a:srgbClr val="EAF6F4"/>
+            </a:solidFill>
+          </a:ln>
+        </p:spPr>
+        <p:style>
+          <a:lnRef idx="1">
+            <a:schemeClr val="accent1"/>
+          </a:lnRef>
+          <a:fillRef idx="3">
+            <a:schemeClr val="accent1"/>
+          </a:fillRef>
+          <a:effectRef idx="2">
+            <a:schemeClr val="accent1"/>
+          </a:effectRef>
+          <a:fontRef idx="minor">
+            <a:schemeClr val="lt1"/>
+          </a:fontRef>
+        </p:style>
+        <p:txBody>
+          <a:bodyPr rtlCol="0" anchor="ctr"/>
+          <a:lstStyle/>
+          <a:p>
+            <a:pPr algn="ctr"/>
+          </a:p>
+        </p:txBody>
+      </p:sp>
+      <p:sp>
+        <p:nvSpPr>
+          <p:cNvPr id="7" name="TextBox 6"/>
+          <p:cNvSpPr txBox="1"/>
+          <p:nvPr/>
+        </p:nvSpPr>
+        <p:spPr>
+          <a:xfrm>
+            <a:off x="1188720" y="1719072"/>
+            <a:ext cx="9811512" cy="228600"/>
+          </a:xfrm>
+          <a:prstGeom prst="rect">
+            <a:avLst/>
+          </a:prstGeom>
+          <a:noFill/>
+        </p:spPr>
+        <p:txBody>
+          <a:bodyPr wrap="square" lIns="18288" rIns="18288" tIns="18288" bIns="18288" anchor="t">
+            <a:spAutoFit/>
+          </a:bodyPr>
+          <a:lstStyle/>
+          <a:p>
+            <a:pPr algn="ctr"/>
+            <a:r>
+              <a:rPr sz="1420" b="1">
+                <a:solidFill>
+                  <a:srgbClr val="0F766E"/>
+                </a:solidFill>
+                <a:latin typeface="Microsoft YaHei"/>
+              </a:rPr>
+              <a:t>核心问题：只知道最前表面，与知道前后 / 内外表面相比，哪一种抓取错误更少？</a:t>
+            </a:r>
+          </a:p>
+        </p:txBody>
+      </p:sp>
+      <p:sp>
+        <p:nvSpPr>
+          <p:cNvPr id="8" name="Rounded Rectangle 7"/>
+          <p:cNvSpPr/>
+          <p:nvPr/>
+        </p:nvSpPr>
+        <p:spPr>
+          <a:xfrm>
+            <a:off x="676656" y="2532888"/>
+            <a:ext cx="3447288" cy="2075688"/>
+          </a:xfrm>
+          <a:prstGeom prst="roundRect">
+            <a:avLst/>
+          </a:prstGeom>
+          <a:solidFill>
+            <a:srgbClr val="FFFFFF"/>
+          </a:solidFill>
+          <a:ln w="10160">
+            <a:solidFill>
+              <a:srgbClr val="DDE3E8"/>
+            </a:solidFill>
+          </a:ln>
+        </p:spPr>
+        <p:style>
+          <a:lnRef idx="1">
+            <a:schemeClr val="accent1"/>
+          </a:lnRef>
+          <a:fillRef idx="3">
+            <a:schemeClr val="accent1"/>
+          </a:fillRef>
+          <a:effectRef idx="2">
+            <a:schemeClr val="accent1"/>
+          </a:effectRef>
+          <a:fontRef idx="minor">
+            <a:schemeClr val="lt1"/>
+          </a:fontRef>
+        </p:style>
+        <p:txBody>
+          <a:bodyPr rtlCol="0" anchor="ctr"/>
+          <a:lstStyle/>
+          <a:p>
+            <a:pPr algn="ctr"/>
+          </a:p>
+        </p:txBody>
+      </p:sp>
+      <p:sp>
+        <p:nvSpPr>
           <p:cNvPr id="9" name="Oval 8"/>
           <p:cNvSpPr/>
           <p:nvPr/>
@@ -11216,7 +13584,1410 @@
                 </a:solidFill>
                 <a:latin typeface="Microsoft YaHei"/>
               </a:rPr>
-              <a:t>先用真实几何验证价值，再投入训练 DepthHypothesisPack。</a:t>
+              <a:t>先用真实几何验证价值，再投入训练多界面预测模型。</a:t>
+            </a:r>
+          </a:p>
+        </p:txBody>
+      </p:sp>
+    </p:spTree>
+  </p:cSld>
+  <p:clrMapOvr>
+    <a:masterClrMapping/>
+  </p:clrMapOvr>
+</p:sld>
+</file>
+
+<file path=ppt/slides/slide9.xml><?xml version="1.0" encoding="utf-8"?>
+<p:sld xmlns:a="http://schemas.openxmlformats.org/drawingml/2006/main" xmlns:p="http://schemas.openxmlformats.org/presentationml/2006/main" xmlns:r="http://schemas.openxmlformats.org/officeDocument/2006/relationships">
+  <p:cSld>
+    <p:bg>
+      <p:bgPr>
+        <a:solidFill>
+          <a:srgbClr val="FFFFFF"/>
+        </a:solidFill>
+        <a:effectLst/>
+      </p:bgPr>
+    </p:bg>
+    <p:spTree>
+      <p:nvGrpSpPr>
+        <p:cNvPr id="1" name=""/>
+        <p:cNvGrpSpPr/>
+        <p:nvPr/>
+      </p:nvGrpSpPr>
+      <p:grpSpPr/>
+      <p:sp>
+        <p:nvSpPr>
+          <p:cNvPr id="2" name="TextBox 1"/>
+          <p:cNvSpPr txBox="1"/>
+          <p:nvPr/>
+        </p:nvSpPr>
+        <p:spPr>
+          <a:xfrm>
+            <a:off x="512064" y="338328"/>
+            <a:ext cx="457200" cy="182880"/>
+          </a:xfrm>
+          <a:prstGeom prst="rect">
+            <a:avLst/>
+          </a:prstGeom>
+          <a:noFill/>
+        </p:spPr>
+        <p:txBody>
+          <a:bodyPr wrap="square" lIns="18288" rIns="18288" tIns="18288" bIns="18288" anchor="t">
+            <a:spAutoFit/>
+          </a:bodyPr>
+          <a:lstStyle/>
+          <a:p>
+            <a:pPr algn="l"/>
+            <a:r>
+              <a:rPr sz="900" b="1">
+                <a:solidFill>
+                  <a:srgbClr val="0F766E"/>
+                </a:solidFill>
+                <a:latin typeface="Microsoft YaHei"/>
+              </a:rPr>
+              <a:t>09</a:t>
+            </a:r>
+          </a:p>
+        </p:txBody>
+      </p:sp>
+      <p:sp>
+        <p:nvSpPr>
+          <p:cNvPr id="3" name="TextBox 2"/>
+          <p:cNvSpPr txBox="1"/>
+          <p:nvPr/>
+        </p:nvSpPr>
+        <p:spPr>
+          <a:xfrm>
+            <a:off x="960120" y="283464"/>
+            <a:ext cx="10424160" cy="384048"/>
+          </a:xfrm>
+          <a:prstGeom prst="rect">
+            <a:avLst/>
+          </a:prstGeom>
+          <a:noFill/>
+        </p:spPr>
+        <p:txBody>
+          <a:bodyPr wrap="square" lIns="18288" rIns="18288" tIns="18288" bIns="18288" anchor="t">
+            <a:spAutoFit/>
+          </a:bodyPr>
+          <a:lstStyle/>
+          <a:p>
+            <a:pPr algn="l"/>
+            <a:r>
+              <a:rPr sz="2400" b="1">
+                <a:solidFill>
+                  <a:srgbClr val="172331"/>
+                </a:solidFill>
+                <a:latin typeface="Microsoft YaHei"/>
+              </a:rPr>
+              <a:t>技术备用页：匹配、指标与因果对照</a:t>
+            </a:r>
+          </a:p>
+        </p:txBody>
+      </p:sp>
+      <p:cxnSp>
+        <p:nvCxnSpPr>
+          <p:cNvPr id="4" name="Connector 3"/>
+          <p:cNvCxnSpPr/>
+          <p:nvPr/>
+        </p:nvCxnSpPr>
+        <p:spPr>
+          <a:xfrm>
+            <a:off x="512064" y="850392"/>
+            <a:ext cx="11137392" cy="0"/>
+          </a:xfrm>
+          <a:prstGeom prst="line">
+            <a:avLst/>
+          </a:prstGeom>
+          <a:ln w="11430">
+            <a:solidFill>
+              <a:srgbClr val="DDE3E8"/>
+            </a:solidFill>
+          </a:ln>
+        </p:spPr>
+        <p:style>
+          <a:lnRef idx="2">
+            <a:schemeClr val="accent1"/>
+          </a:lnRef>
+          <a:fillRef idx="0">
+            <a:schemeClr val="accent1"/>
+          </a:fillRef>
+          <a:effectRef idx="1">
+            <a:schemeClr val="accent1"/>
+          </a:effectRef>
+          <a:fontRef idx="minor">
+            <a:schemeClr val="tx1"/>
+          </a:fontRef>
+        </p:style>
+      </p:cxnSp>
+      <p:sp>
+        <p:nvSpPr>
+          <p:cNvPr id="5" name="Rounded Rectangle 4"/>
+          <p:cNvSpPr/>
+          <p:nvPr/>
+        </p:nvSpPr>
+        <p:spPr>
+          <a:xfrm>
+            <a:off x="10222992" y="1024128"/>
+            <a:ext cx="1335024" cy="292608"/>
+          </a:xfrm>
+          <a:prstGeom prst="roundRect">
+            <a:avLst/>
+          </a:prstGeom>
+          <a:solidFill>
+            <a:srgbClr val="EEF4FF"/>
+          </a:solidFill>
+          <a:ln w="10160">
+            <a:solidFill>
+              <a:srgbClr val="EEF4FF"/>
+            </a:solidFill>
+          </a:ln>
+        </p:spPr>
+        <p:style>
+          <a:lnRef idx="1">
+            <a:schemeClr val="accent1"/>
+          </a:lnRef>
+          <a:fillRef idx="3">
+            <a:schemeClr val="accent1"/>
+          </a:fillRef>
+          <a:effectRef idx="2">
+            <a:schemeClr val="accent1"/>
+          </a:effectRef>
+          <a:fontRef idx="minor">
+            <a:schemeClr val="lt1"/>
+          </a:fontRef>
+        </p:style>
+        <p:txBody>
+          <a:bodyPr rtlCol="0" anchor="ctr"/>
+          <a:lstStyle/>
+          <a:p>
+            <a:pPr algn="ctr"/>
+          </a:p>
+        </p:txBody>
+      </p:sp>
+      <p:sp>
+        <p:nvSpPr>
+          <p:cNvPr id="6" name="TextBox 5"/>
+          <p:cNvSpPr txBox="1"/>
+          <p:nvPr/>
+        </p:nvSpPr>
+        <p:spPr>
+          <a:xfrm>
+            <a:off x="10222992" y="1092708"/>
+            <a:ext cx="1335024" cy="118872"/>
+          </a:xfrm>
+          <a:prstGeom prst="rect">
+            <a:avLst/>
+          </a:prstGeom>
+          <a:noFill/>
+        </p:spPr>
+        <p:txBody>
+          <a:bodyPr wrap="square" lIns="18288" rIns="18288" tIns="18288" bIns="18288" anchor="t">
+            <a:spAutoFit/>
+          </a:bodyPr>
+          <a:lstStyle/>
+          <a:p>
+            <a:pPr algn="ctr"/>
+            <a:r>
+              <a:rPr sz="880" b="1">
+                <a:solidFill>
+                  <a:srgbClr val="2563EB"/>
+                </a:solidFill>
+                <a:latin typeface="Microsoft YaHei"/>
+              </a:rPr>
+              <a:t>追问时展示</a:t>
+            </a:r>
+          </a:p>
+        </p:txBody>
+      </p:sp>
+      <p:sp>
+        <p:nvSpPr>
+          <p:cNvPr id="7" name="Rounded Rectangle 6"/>
+          <p:cNvSpPr/>
+          <p:nvPr/>
+        </p:nvSpPr>
+        <p:spPr>
+          <a:xfrm>
+            <a:off x="603504" y="1353312"/>
+            <a:ext cx="5358384" cy="2688336"/>
+          </a:xfrm>
+          <a:prstGeom prst="roundRect">
+            <a:avLst/>
+          </a:prstGeom>
+          <a:solidFill>
+            <a:srgbClr val="FFFFFF"/>
+          </a:solidFill>
+          <a:ln w="10160">
+            <a:solidFill>
+              <a:srgbClr val="DDE3E8"/>
+            </a:solidFill>
+          </a:ln>
+        </p:spPr>
+        <p:style>
+          <a:lnRef idx="1">
+            <a:schemeClr val="accent1"/>
+          </a:lnRef>
+          <a:fillRef idx="3">
+            <a:schemeClr val="accent1"/>
+          </a:fillRef>
+          <a:effectRef idx="2">
+            <a:schemeClr val="accent1"/>
+          </a:effectRef>
+          <a:fontRef idx="minor">
+            <a:schemeClr val="lt1"/>
+          </a:fontRef>
+        </p:style>
+        <p:txBody>
+          <a:bodyPr rtlCol="0" anchor="ctr"/>
+          <a:lstStyle/>
+          <a:p>
+            <a:pPr algn="ctr"/>
+          </a:p>
+        </p:txBody>
+      </p:sp>
+      <p:sp>
+        <p:nvSpPr>
+          <p:cNvPr id="8" name="TextBox 7"/>
+          <p:cNvSpPr txBox="1"/>
+          <p:nvPr/>
+        </p:nvSpPr>
+        <p:spPr>
+          <a:xfrm>
+            <a:off x="877824" y="1627632"/>
+            <a:ext cx="2514600" cy="228600"/>
+          </a:xfrm>
+          <a:prstGeom prst="rect">
+            <a:avLst/>
+          </a:prstGeom>
+          <a:noFill/>
+        </p:spPr>
+        <p:txBody>
+          <a:bodyPr wrap="square" lIns="18288" rIns="18288" tIns="18288" bIns="18288" anchor="t">
+            <a:spAutoFit/>
+          </a:bodyPr>
+          <a:lstStyle/>
+          <a:p>
+            <a:pPr algn="l"/>
+            <a:r>
+              <a:rPr sz="1400" b="1">
+                <a:solidFill>
+                  <a:srgbClr val="172331"/>
+                </a:solidFill>
+                <a:latin typeface="Microsoft YaHei"/>
+              </a:rPr>
+              <a:t>1｜有序界面匹配</a:t>
+            </a:r>
+          </a:p>
+        </p:txBody>
+      </p:sp>
+      <p:sp>
+        <p:nvSpPr>
+          <p:cNvPr id="9" name="TextBox 8"/>
+          <p:cNvSpPr txBox="1"/>
+          <p:nvPr/>
+        </p:nvSpPr>
+        <p:spPr>
+          <a:xfrm>
+            <a:off x="896112" y="2103120"/>
+            <a:ext cx="502920" cy="182880"/>
+          </a:xfrm>
+          <a:prstGeom prst="rect">
+            <a:avLst/>
+          </a:prstGeom>
+          <a:noFill/>
+        </p:spPr>
+        <p:txBody>
+          <a:bodyPr wrap="square" lIns="18288" rIns="18288" tIns="18288" bIns="18288" anchor="t">
+            <a:spAutoFit/>
+          </a:bodyPr>
+          <a:lstStyle/>
+          <a:p>
+            <a:pPr algn="l"/>
+            <a:r>
+              <a:rPr sz="950" b="1">
+                <a:solidFill>
+                  <a:srgbClr val="667381"/>
+                </a:solidFill>
+                <a:latin typeface="Microsoft YaHei"/>
+              </a:rPr>
+              <a:t>真值</a:t>
+            </a:r>
+          </a:p>
+        </p:txBody>
+      </p:sp>
+      <p:sp>
+        <p:nvSpPr>
+          <p:cNvPr id="10" name="TextBox 9"/>
+          <p:cNvSpPr txBox="1"/>
+          <p:nvPr/>
+        </p:nvSpPr>
+        <p:spPr>
+          <a:xfrm>
+            <a:off x="1490472" y="2084831"/>
+            <a:ext cx="3611880" cy="201168"/>
+          </a:xfrm>
+          <a:prstGeom prst="rect">
+            <a:avLst/>
+          </a:prstGeom>
+          <a:noFill/>
+        </p:spPr>
+        <p:txBody>
+          <a:bodyPr wrap="square" lIns="18288" rIns="18288" tIns="18288" bIns="18288" anchor="t">
+            <a:spAutoFit/>
+          </a:bodyPr>
+          <a:lstStyle/>
+          <a:p>
+            <a:pPr algn="ctr"/>
+            <a:r>
+              <a:rPr sz="1100" b="1">
+                <a:solidFill>
+                  <a:srgbClr val="0F766E"/>
+                </a:solidFill>
+                <a:latin typeface="Microsoft YaHei"/>
+              </a:rPr>
+              <a:t>0.400   0.405   0.490   0.495 m</a:t>
+            </a:r>
+          </a:p>
+        </p:txBody>
+      </p:sp>
+      <p:sp>
+        <p:nvSpPr>
+          <p:cNvPr id="11" name="TextBox 10"/>
+          <p:cNvSpPr txBox="1"/>
+          <p:nvPr/>
+        </p:nvSpPr>
+        <p:spPr>
+          <a:xfrm>
+            <a:off x="896112" y="2523744"/>
+            <a:ext cx="502920" cy="182880"/>
+          </a:xfrm>
+          <a:prstGeom prst="rect">
+            <a:avLst/>
+          </a:prstGeom>
+          <a:noFill/>
+        </p:spPr>
+        <p:txBody>
+          <a:bodyPr wrap="square" lIns="18288" rIns="18288" tIns="18288" bIns="18288" anchor="t">
+            <a:spAutoFit/>
+          </a:bodyPr>
+          <a:lstStyle/>
+          <a:p>
+            <a:pPr algn="l"/>
+            <a:r>
+              <a:rPr sz="950" b="1">
+                <a:solidFill>
+                  <a:srgbClr val="667381"/>
+                </a:solidFill>
+                <a:latin typeface="Microsoft YaHei"/>
+              </a:rPr>
+              <a:t>预测</a:t>
+            </a:r>
+          </a:p>
+        </p:txBody>
+      </p:sp>
+      <p:sp>
+        <p:nvSpPr>
+          <p:cNvPr id="12" name="TextBox 11"/>
+          <p:cNvSpPr txBox="1"/>
+          <p:nvPr/>
+        </p:nvSpPr>
+        <p:spPr>
+          <a:xfrm>
+            <a:off x="1490472" y="2505456"/>
+            <a:ext cx="3611880" cy="201168"/>
+          </a:xfrm>
+          <a:prstGeom prst="rect">
+            <a:avLst/>
+          </a:prstGeom>
+          <a:noFill/>
+        </p:spPr>
+        <p:txBody>
+          <a:bodyPr wrap="square" lIns="18288" rIns="18288" tIns="18288" bIns="18288" anchor="t">
+            <a:spAutoFit/>
+          </a:bodyPr>
+          <a:lstStyle/>
+          <a:p>
+            <a:pPr algn="ctr"/>
+            <a:r>
+              <a:rPr sz="1100" b="1">
+                <a:solidFill>
+                  <a:srgbClr val="C46B16"/>
+                </a:solidFill>
+                <a:latin typeface="Microsoft YaHei"/>
+              </a:rPr>
+              <a:t>0.402      缺失      0.492   0.497 m</a:t>
+            </a:r>
+          </a:p>
+        </p:txBody>
+      </p:sp>
+      <p:cxnSp>
+        <p:nvCxnSpPr>
+          <p:cNvPr id="13" name="Connector 12"/>
+          <p:cNvCxnSpPr/>
+          <p:nvPr/>
+        </p:nvCxnSpPr>
+        <p:spPr>
+          <a:xfrm>
+            <a:off x="1645920" y="2907792"/>
+            <a:ext cx="3374136" cy="0"/>
+          </a:xfrm>
+          <a:prstGeom prst="line">
+            <a:avLst/>
+          </a:prstGeom>
+          <a:ln w="11430">
+            <a:solidFill>
+              <a:srgbClr val="DDE3E8"/>
+            </a:solidFill>
+          </a:ln>
+        </p:spPr>
+        <p:style>
+          <a:lnRef idx="2">
+            <a:schemeClr val="accent1"/>
+          </a:lnRef>
+          <a:fillRef idx="0">
+            <a:schemeClr val="accent1"/>
+          </a:fillRef>
+          <a:effectRef idx="1">
+            <a:schemeClr val="accent1"/>
+          </a:effectRef>
+          <a:fontRef idx="minor">
+            <a:schemeClr val="tx1"/>
+          </a:fontRef>
+        </p:style>
+      </p:cxnSp>
+      <p:sp>
+        <p:nvSpPr>
+          <p:cNvPr id="14" name="TextBox 13"/>
+          <p:cNvSpPr txBox="1"/>
+          <p:nvPr/>
+        </p:nvSpPr>
+        <p:spPr>
+          <a:xfrm>
+            <a:off x="896112" y="3127248"/>
+            <a:ext cx="2212848" cy="182880"/>
+          </a:xfrm>
+          <a:prstGeom prst="rect">
+            <a:avLst/>
+          </a:prstGeom>
+          <a:noFill/>
+        </p:spPr>
+        <p:txBody>
+          <a:bodyPr wrap="square" lIns="18288" rIns="18288" tIns="18288" bIns="18288" anchor="t">
+            <a:spAutoFit/>
+          </a:bodyPr>
+          <a:lstStyle/>
+          <a:p>
+            <a:pPr algn="l"/>
+            <a:r>
+              <a:rPr sz="1019" b="1">
+                <a:solidFill>
+                  <a:srgbClr val="172331"/>
+                </a:solidFill>
+                <a:latin typeface="Microsoft YaHei"/>
+              </a:rPr>
+              <a:t>动态规划按三个规则匹配：</a:t>
+            </a:r>
+          </a:p>
+        </p:txBody>
+      </p:sp>
+      <p:sp>
+        <p:nvSpPr>
+          <p:cNvPr id="15" name="TextBox 14"/>
+          <p:cNvSpPr txBox="1"/>
+          <p:nvPr/>
+        </p:nvSpPr>
+        <p:spPr>
+          <a:xfrm>
+            <a:off x="896112" y="3474720"/>
+            <a:ext cx="4654296" cy="201168"/>
+          </a:xfrm>
+          <a:prstGeom prst="rect">
+            <a:avLst/>
+          </a:prstGeom>
+          <a:noFill/>
+        </p:spPr>
+        <p:txBody>
+          <a:bodyPr wrap="square" lIns="18288" rIns="18288" tIns="18288" bIns="18288" anchor="t">
+            <a:spAutoFit/>
+          </a:bodyPr>
+          <a:lstStyle/>
+          <a:p>
+            <a:pPr algn="l"/>
+            <a:r>
+              <a:rPr sz="1000" b="0">
+                <a:solidFill>
+                  <a:srgbClr val="667381"/>
+                </a:solidFill>
+                <a:latin typeface="Microsoft YaHei"/>
+              </a:rPr>
+              <a:t>① 保持由近到远　② 先让匹配数最多　③ 再让总误差最小</a:t>
+            </a:r>
+          </a:p>
+        </p:txBody>
+      </p:sp>
+      <p:sp>
+        <p:nvSpPr>
+          <p:cNvPr id="16" name="TextBox 15"/>
+          <p:cNvSpPr txBox="1"/>
+          <p:nvPr/>
+        </p:nvSpPr>
+        <p:spPr>
+          <a:xfrm>
+            <a:off x="896112" y="3767328"/>
+            <a:ext cx="4654296" cy="164592"/>
+          </a:xfrm>
+          <a:prstGeom prst="rect">
+            <a:avLst/>
+          </a:prstGeom>
+          <a:noFill/>
+        </p:spPr>
+        <p:txBody>
+          <a:bodyPr wrap="square" lIns="18288" rIns="18288" tIns="18288" bIns="18288" anchor="t">
+            <a:spAutoFit/>
+          </a:bodyPr>
+          <a:lstStyle/>
+          <a:p>
+            <a:pPr algn="l"/>
+            <a:r>
+              <a:rPr sz="880" b="1">
+                <a:solidFill>
+                  <a:srgbClr val="2563EB"/>
+                </a:solidFill>
+                <a:latin typeface="Microsoft YaHei"/>
+              </a:rPr>
+              <a:t>只有误差 ≤ δ 的界面可匹配；δ 可配置，示例为 5 mm。</a:t>
+            </a:r>
+          </a:p>
+        </p:txBody>
+      </p:sp>
+      <p:sp>
+        <p:nvSpPr>
+          <p:cNvPr id="17" name="Rounded Rectangle 16"/>
+          <p:cNvSpPr/>
+          <p:nvPr/>
+        </p:nvSpPr>
+        <p:spPr>
+          <a:xfrm>
+            <a:off x="6227064" y="1353312"/>
+            <a:ext cx="5358384" cy="2688336"/>
+          </a:xfrm>
+          <a:prstGeom prst="roundRect">
+            <a:avLst/>
+          </a:prstGeom>
+          <a:solidFill>
+            <a:srgbClr val="FFFFFF"/>
+          </a:solidFill>
+          <a:ln w="10160">
+            <a:solidFill>
+              <a:srgbClr val="DDE3E8"/>
+            </a:solidFill>
+          </a:ln>
+        </p:spPr>
+        <p:style>
+          <a:lnRef idx="1">
+            <a:schemeClr val="accent1"/>
+          </a:lnRef>
+          <a:fillRef idx="3">
+            <a:schemeClr val="accent1"/>
+          </a:fillRef>
+          <a:effectRef idx="2">
+            <a:schemeClr val="accent1"/>
+          </a:effectRef>
+          <a:fontRef idx="minor">
+            <a:schemeClr val="lt1"/>
+          </a:fontRef>
+        </p:style>
+        <p:txBody>
+          <a:bodyPr rtlCol="0" anchor="ctr"/>
+          <a:lstStyle/>
+          <a:p>
+            <a:pPr algn="ctr"/>
+          </a:p>
+        </p:txBody>
+      </p:sp>
+      <p:sp>
+        <p:nvSpPr>
+          <p:cNvPr id="18" name="TextBox 17"/>
+          <p:cNvSpPr txBox="1"/>
+          <p:nvPr/>
+        </p:nvSpPr>
+        <p:spPr>
+          <a:xfrm>
+            <a:off x="6501384" y="1627632"/>
+            <a:ext cx="2194560" cy="228600"/>
+          </a:xfrm>
+          <a:prstGeom prst="rect">
+            <a:avLst/>
+          </a:prstGeom>
+          <a:noFill/>
+        </p:spPr>
+        <p:txBody>
+          <a:bodyPr wrap="square" lIns="18288" rIns="18288" tIns="18288" bIns="18288" anchor="t">
+            <a:spAutoFit/>
+          </a:bodyPr>
+          <a:lstStyle/>
+          <a:p>
+            <a:pPr algn="l"/>
+            <a:r>
+              <a:rPr sz="1400" b="1">
+                <a:solidFill>
+                  <a:srgbClr val="172331"/>
+                </a:solidFill>
+                <a:latin typeface="Microsoft YaHei"/>
+              </a:rPr>
+              <a:t>2｜评分指标</a:t>
+            </a:r>
+          </a:p>
+        </p:txBody>
+      </p:sp>
+      <p:sp>
+        <p:nvSpPr>
+          <p:cNvPr id="19" name="Rounded Rectangle 18"/>
+          <p:cNvSpPr/>
+          <p:nvPr/>
+        </p:nvSpPr>
+        <p:spPr>
+          <a:xfrm>
+            <a:off x="6492240" y="2075688"/>
+            <a:ext cx="2249424" cy="1271016"/>
+          </a:xfrm>
+          <a:prstGeom prst="roundRect">
+            <a:avLst/>
+          </a:prstGeom>
+          <a:solidFill>
+            <a:srgbClr val="EEF4FF"/>
+          </a:solidFill>
+          <a:ln w="10160">
+            <a:solidFill>
+              <a:srgbClr val="EEF4FF"/>
+            </a:solidFill>
+          </a:ln>
+        </p:spPr>
+        <p:style>
+          <a:lnRef idx="1">
+            <a:schemeClr val="accent1"/>
+          </a:lnRef>
+          <a:fillRef idx="3">
+            <a:schemeClr val="accent1"/>
+          </a:fillRef>
+          <a:effectRef idx="2">
+            <a:schemeClr val="accent1"/>
+          </a:effectRef>
+          <a:fontRef idx="minor">
+            <a:schemeClr val="lt1"/>
+          </a:fontRef>
+        </p:style>
+        <p:txBody>
+          <a:bodyPr rtlCol="0" anchor="ctr"/>
+          <a:lstStyle/>
+          <a:p>
+            <a:pPr algn="ctr"/>
+          </a:p>
+        </p:txBody>
+      </p:sp>
+      <p:sp>
+        <p:nvSpPr>
+          <p:cNvPr id="20" name="TextBox 19"/>
+          <p:cNvSpPr txBox="1"/>
+          <p:nvPr/>
+        </p:nvSpPr>
+        <p:spPr>
+          <a:xfrm>
+            <a:off x="6711696" y="2331720"/>
+            <a:ext cx="1810512" cy="658368"/>
+          </a:xfrm>
+          <a:prstGeom prst="rect">
+            <a:avLst/>
+          </a:prstGeom>
+          <a:noFill/>
+        </p:spPr>
+        <p:txBody>
+          <a:bodyPr wrap="square" lIns="18288" rIns="18288" tIns="18288" bIns="18288" anchor="t">
+            <a:spAutoFit/>
+          </a:bodyPr>
+          <a:lstStyle/>
+          <a:p>
+            <a:pPr algn="ctr"/>
+            <a:r>
+              <a:rPr sz="1040" b="1">
+                <a:solidFill>
+                  <a:srgbClr val="2563EB"/>
+                </a:solidFill>
+                <a:latin typeface="Microsoft YaHei"/>
+              </a:rPr>
+              <a:t>P = 匹配数 / 预测数
+R = 匹配数 / 真值数
+F1 = 2PR / (P + R)</a:t>
+            </a:r>
+          </a:p>
+        </p:txBody>
+      </p:sp>
+      <p:sp>
+        <p:nvSpPr>
+          <p:cNvPr id="21" name="Rounded Rectangle 20"/>
+          <p:cNvSpPr/>
+          <p:nvPr/>
+        </p:nvSpPr>
+        <p:spPr>
+          <a:xfrm>
+            <a:off x="8979408" y="2075688"/>
+            <a:ext cx="2249424" cy="1271016"/>
+          </a:xfrm>
+          <a:prstGeom prst="roundRect">
+            <a:avLst/>
+          </a:prstGeom>
+          <a:solidFill>
+            <a:srgbClr val="EAF6F4"/>
+          </a:solidFill>
+          <a:ln w="10160">
+            <a:solidFill>
+              <a:srgbClr val="EAF6F4"/>
+            </a:solidFill>
+          </a:ln>
+        </p:spPr>
+        <p:style>
+          <a:lnRef idx="1">
+            <a:schemeClr val="accent1"/>
+          </a:lnRef>
+          <a:fillRef idx="3">
+            <a:schemeClr val="accent1"/>
+          </a:fillRef>
+          <a:effectRef idx="2">
+            <a:schemeClr val="accent1"/>
+          </a:effectRef>
+          <a:fontRef idx="minor">
+            <a:schemeClr val="lt1"/>
+          </a:fontRef>
+        </p:style>
+        <p:txBody>
+          <a:bodyPr rtlCol="0" anchor="ctr"/>
+          <a:lstStyle/>
+          <a:p>
+            <a:pPr algn="ctr"/>
+          </a:p>
+        </p:txBody>
+      </p:sp>
+      <p:sp>
+        <p:nvSpPr>
+          <p:cNvPr id="22" name="TextBox 21"/>
+          <p:cNvSpPr txBox="1"/>
+          <p:nvPr/>
+        </p:nvSpPr>
+        <p:spPr>
+          <a:xfrm>
+            <a:off x="9189720" y="2313432"/>
+            <a:ext cx="1828800" cy="713232"/>
+          </a:xfrm>
+          <a:prstGeom prst="rect">
+            <a:avLst/>
+          </a:prstGeom>
+          <a:noFill/>
+        </p:spPr>
+        <p:txBody>
+          <a:bodyPr wrap="square" lIns="18288" rIns="18288" tIns="18288" bIns="18288" anchor="t">
+            <a:spAutoFit/>
+          </a:bodyPr>
+          <a:lstStyle/>
+          <a:p>
+            <a:pPr algn="ctr"/>
+            <a:r>
+              <a:rPr sz="1000" b="1">
+                <a:solidFill>
+                  <a:srgbClr val="0F766E"/>
+                </a:solidFill>
+                <a:latin typeface="Microsoft YaHei"/>
+              </a:rPr>
+              <a:t>界面数量正确率
+匹配深度 MAE / RMSE
+类型 F1 / 拓扑合法率</a:t>
+            </a:r>
+          </a:p>
+        </p:txBody>
+      </p:sp>
+      <p:sp>
+        <p:nvSpPr>
+          <p:cNvPr id="23" name="TextBox 22"/>
+          <p:cNvSpPr txBox="1"/>
+          <p:nvPr/>
+        </p:nvSpPr>
+        <p:spPr>
+          <a:xfrm>
+            <a:off x="6547104" y="3566160"/>
+            <a:ext cx="4700016" cy="246888"/>
+          </a:xfrm>
+          <a:prstGeom prst="rect">
+            <a:avLst/>
+          </a:prstGeom>
+          <a:noFill/>
+        </p:spPr>
+        <p:txBody>
+          <a:bodyPr wrap="square" lIns="18288" rIns="18288" tIns="18288" bIns="18288" anchor="t">
+            <a:spAutoFit/>
+          </a:bodyPr>
+          <a:lstStyle/>
+          <a:p>
+            <a:pPr algn="ctr"/>
+            <a:r>
+              <a:rPr sz="930" b="1">
+                <a:solidFill>
+                  <a:srgbClr val="667381"/>
+                </a:solidFill>
+                <a:latin typeface="Microsoft YaHei"/>
+              </a:rPr>
+              <a:t>漏掉后层会降低 Recall；多报假界面会降低 Precision，不能只看匹配后的深度误差。</a:t>
+            </a:r>
+          </a:p>
+        </p:txBody>
+      </p:sp>
+      <p:sp>
+        <p:nvSpPr>
+          <p:cNvPr id="24" name="TextBox 23"/>
+          <p:cNvSpPr txBox="1"/>
+          <p:nvPr/>
+        </p:nvSpPr>
+        <p:spPr>
+          <a:xfrm>
+            <a:off x="640080" y="4325112"/>
+            <a:ext cx="2596896" cy="228600"/>
+          </a:xfrm>
+          <a:prstGeom prst="rect">
+            <a:avLst/>
+          </a:prstGeom>
+          <a:noFill/>
+        </p:spPr>
+        <p:txBody>
+          <a:bodyPr wrap="square" lIns="18288" rIns="18288" tIns="18288" bIns="18288" anchor="t">
+            <a:spAutoFit/>
+          </a:bodyPr>
+          <a:lstStyle/>
+          <a:p>
+            <a:pPr algn="l"/>
+            <a:r>
+              <a:rPr sz="1400" b="1">
+                <a:solidFill>
+                  <a:srgbClr val="172331"/>
+                </a:solidFill>
+                <a:latin typeface="Microsoft YaHei"/>
+              </a:rPr>
+              <a:t>3｜三组因果对照</a:t>
+            </a:r>
+          </a:p>
+        </p:txBody>
+      </p:sp>
+      <p:sp>
+        <p:nvSpPr>
+          <p:cNvPr id="25" name="Rounded Rectangle 24"/>
+          <p:cNvSpPr/>
+          <p:nvPr/>
+        </p:nvSpPr>
+        <p:spPr>
+          <a:xfrm>
+            <a:off x="640080" y="4700016"/>
+            <a:ext cx="3255264" cy="1133856"/>
+          </a:xfrm>
+          <a:prstGeom prst="roundRect">
+            <a:avLst/>
+          </a:prstGeom>
+          <a:solidFill>
+            <a:srgbClr val="FFFFFF"/>
+          </a:solidFill>
+          <a:ln w="10160">
+            <a:solidFill>
+              <a:srgbClr val="DDE3E8"/>
+            </a:solidFill>
+          </a:ln>
+        </p:spPr>
+        <p:style>
+          <a:lnRef idx="1">
+            <a:schemeClr val="accent1"/>
+          </a:lnRef>
+          <a:fillRef idx="3">
+            <a:schemeClr val="accent1"/>
+          </a:fillRef>
+          <a:effectRef idx="2">
+            <a:schemeClr val="accent1"/>
+          </a:effectRef>
+          <a:fontRef idx="minor">
+            <a:schemeClr val="lt1"/>
+          </a:fontRef>
+        </p:style>
+        <p:txBody>
+          <a:bodyPr rtlCol="0" anchor="ctr"/>
+          <a:lstStyle/>
+          <a:p>
+            <a:pPr algn="ctr"/>
+          </a:p>
+        </p:txBody>
+      </p:sp>
+      <p:sp>
+        <p:nvSpPr>
+          <p:cNvPr id="26" name="Rectangle 25"/>
+          <p:cNvSpPr/>
+          <p:nvPr/>
+        </p:nvSpPr>
+        <p:spPr>
+          <a:xfrm>
+            <a:off x="640080" y="4700016"/>
+            <a:ext cx="64008" cy="1133856"/>
+          </a:xfrm>
+          <a:prstGeom prst="rect">
+            <a:avLst/>
+          </a:prstGeom>
+          <a:solidFill>
+            <a:srgbClr val="2563EB"/>
+          </a:solidFill>
+          <a:ln w="10160">
+            <a:solidFill>
+              <a:srgbClr val="2563EB"/>
+            </a:solidFill>
+          </a:ln>
+        </p:spPr>
+        <p:style>
+          <a:lnRef idx="1">
+            <a:schemeClr val="accent1"/>
+          </a:lnRef>
+          <a:fillRef idx="3">
+            <a:schemeClr val="accent1"/>
+          </a:fillRef>
+          <a:effectRef idx="2">
+            <a:schemeClr val="accent1"/>
+          </a:effectRef>
+          <a:fontRef idx="minor">
+            <a:schemeClr val="lt1"/>
+          </a:fontRef>
+        </p:style>
+        <p:txBody>
+          <a:bodyPr rtlCol="0" anchor="ctr"/>
+          <a:lstStyle/>
+          <a:p>
+            <a:pPr algn="ctr"/>
+          </a:p>
+        </p:txBody>
+      </p:sp>
+      <p:sp>
+        <p:nvSpPr>
+          <p:cNvPr id="27" name="TextBox 26"/>
+          <p:cNvSpPr txBox="1"/>
+          <p:nvPr/>
+        </p:nvSpPr>
+        <p:spPr>
+          <a:xfrm>
+            <a:off x="841247" y="4928616"/>
+            <a:ext cx="2834640" cy="210312"/>
+          </a:xfrm>
+          <a:prstGeom prst="rect">
+            <a:avLst/>
+          </a:prstGeom>
+          <a:noFill/>
+        </p:spPr>
+        <p:txBody>
+          <a:bodyPr wrap="square" lIns="18288" rIns="18288" tIns="18288" bIns="18288" anchor="t">
+            <a:spAutoFit/>
+          </a:bodyPr>
+          <a:lstStyle/>
+          <a:p>
+            <a:pPr algn="ctr"/>
+            <a:r>
+              <a:rPr sz="1110" b="1">
+                <a:solidFill>
+                  <a:srgbClr val="172331"/>
+                </a:solidFill>
+                <a:latin typeface="Microsoft YaHei"/>
+              </a:rPr>
+              <a:t>A｜GT-front + 固定规划器</a:t>
+            </a:r>
+          </a:p>
+        </p:txBody>
+      </p:sp>
+      <p:sp>
+        <p:nvSpPr>
+          <p:cNvPr id="28" name="TextBox 27"/>
+          <p:cNvSpPr txBox="1"/>
+          <p:nvPr/>
+        </p:nvSpPr>
+        <p:spPr>
+          <a:xfrm>
+            <a:off x="877824" y="5330952"/>
+            <a:ext cx="2761488" cy="356616"/>
+          </a:xfrm>
+          <a:prstGeom prst="rect">
+            <a:avLst/>
+          </a:prstGeom>
+          <a:noFill/>
+        </p:spPr>
+        <p:txBody>
+          <a:bodyPr wrap="square" lIns="18288" rIns="18288" tIns="18288" bIns="18288" anchor="t">
+            <a:spAutoFit/>
+          </a:bodyPr>
+          <a:lstStyle/>
+          <a:p>
+            <a:pPr algn="ctr"/>
+            <a:r>
+              <a:rPr sz="940" b="0">
+                <a:solidFill>
+                  <a:srgbClr val="667381"/>
+                </a:solidFill>
+                <a:latin typeface="Microsoft YaHei"/>
+              </a:rPr>
+              <a:t>只给最前表面
+建立单层基准</a:t>
+            </a:r>
+          </a:p>
+        </p:txBody>
+      </p:sp>
+      <p:sp>
+        <p:nvSpPr>
+          <p:cNvPr id="29" name="Rounded Rectangle 28"/>
+          <p:cNvSpPr/>
+          <p:nvPr/>
+        </p:nvSpPr>
+        <p:spPr>
+          <a:xfrm>
+            <a:off x="4114800" y="4700016"/>
+            <a:ext cx="3255264" cy="1133856"/>
+          </a:xfrm>
+          <a:prstGeom prst="roundRect">
+            <a:avLst/>
+          </a:prstGeom>
+          <a:solidFill>
+            <a:srgbClr val="FFFFFF"/>
+          </a:solidFill>
+          <a:ln w="10160">
+            <a:solidFill>
+              <a:srgbClr val="DDE3E8"/>
+            </a:solidFill>
+          </a:ln>
+        </p:spPr>
+        <p:style>
+          <a:lnRef idx="1">
+            <a:schemeClr val="accent1"/>
+          </a:lnRef>
+          <a:fillRef idx="3">
+            <a:schemeClr val="accent1"/>
+          </a:fillRef>
+          <a:effectRef idx="2">
+            <a:schemeClr val="accent1"/>
+          </a:effectRef>
+          <a:fontRef idx="minor">
+            <a:schemeClr val="lt1"/>
+          </a:fontRef>
+        </p:style>
+        <p:txBody>
+          <a:bodyPr rtlCol="0" anchor="ctr"/>
+          <a:lstStyle/>
+          <a:p>
+            <a:pPr algn="ctr"/>
+          </a:p>
+        </p:txBody>
+      </p:sp>
+      <p:sp>
+        <p:nvSpPr>
+          <p:cNvPr id="30" name="Rectangle 29"/>
+          <p:cNvSpPr/>
+          <p:nvPr/>
+        </p:nvSpPr>
+        <p:spPr>
+          <a:xfrm>
+            <a:off x="4114800" y="4700016"/>
+            <a:ext cx="64008" cy="1133856"/>
+          </a:xfrm>
+          <a:prstGeom prst="rect">
+            <a:avLst/>
+          </a:prstGeom>
+          <a:solidFill>
+            <a:srgbClr val="0F766E"/>
+          </a:solidFill>
+          <a:ln w="10160">
+            <a:solidFill>
+              <a:srgbClr val="0F766E"/>
+            </a:solidFill>
+          </a:ln>
+        </p:spPr>
+        <p:style>
+          <a:lnRef idx="1">
+            <a:schemeClr val="accent1"/>
+          </a:lnRef>
+          <a:fillRef idx="3">
+            <a:schemeClr val="accent1"/>
+          </a:fillRef>
+          <a:effectRef idx="2">
+            <a:schemeClr val="accent1"/>
+          </a:effectRef>
+          <a:fontRef idx="minor">
+            <a:schemeClr val="lt1"/>
+          </a:fontRef>
+        </p:style>
+        <p:txBody>
+          <a:bodyPr rtlCol="0" anchor="ctr"/>
+          <a:lstStyle/>
+          <a:p>
+            <a:pPr algn="ctr"/>
+          </a:p>
+        </p:txBody>
+      </p:sp>
+      <p:sp>
+        <p:nvSpPr>
+          <p:cNvPr id="31" name="TextBox 30"/>
+          <p:cNvSpPr txBox="1"/>
+          <p:nvPr/>
+        </p:nvSpPr>
+        <p:spPr>
+          <a:xfrm>
+            <a:off x="4315968" y="4928616"/>
+            <a:ext cx="2834640" cy="210312"/>
+          </a:xfrm>
+          <a:prstGeom prst="rect">
+            <a:avLst/>
+          </a:prstGeom>
+          <a:noFill/>
+        </p:spPr>
+        <p:txBody>
+          <a:bodyPr wrap="square" lIns="18288" rIns="18288" tIns="18288" bIns="18288" anchor="t">
+            <a:spAutoFit/>
+          </a:bodyPr>
+          <a:lstStyle/>
+          <a:p>
+            <a:pPr algn="ctr"/>
+            <a:r>
+              <a:rPr sz="1110" b="1">
+                <a:solidFill>
+                  <a:srgbClr val="172331"/>
+                </a:solidFill>
+                <a:latin typeface="Microsoft YaHei"/>
+              </a:rPr>
+              <a:t>B｜GT-full + 同一规划器</a:t>
+            </a:r>
+          </a:p>
+        </p:txBody>
+      </p:sp>
+      <p:sp>
+        <p:nvSpPr>
+          <p:cNvPr id="32" name="TextBox 31"/>
+          <p:cNvSpPr txBox="1"/>
+          <p:nvPr/>
+        </p:nvSpPr>
+        <p:spPr>
+          <a:xfrm>
+            <a:off x="4352544" y="5330952"/>
+            <a:ext cx="2761488" cy="356616"/>
+          </a:xfrm>
+          <a:prstGeom prst="rect">
+            <a:avLst/>
+          </a:prstGeom>
+          <a:noFill/>
+        </p:spPr>
+        <p:txBody>
+          <a:bodyPr wrap="square" lIns="18288" rIns="18288" tIns="18288" bIns="18288" anchor="t">
+            <a:spAutoFit/>
+          </a:bodyPr>
+          <a:lstStyle/>
+          <a:p>
+            <a:pPr algn="ctr"/>
+            <a:r>
+              <a:rPr sz="940" b="0">
+                <a:solidFill>
+                  <a:srgbClr val="667381"/>
+                </a:solidFill>
+                <a:latin typeface="Microsoft YaHei"/>
+              </a:rPr>
+              <a:t>只替换完整薄壳几何
+隔离“表示”的收益</a:t>
+            </a:r>
+          </a:p>
+        </p:txBody>
+      </p:sp>
+      <p:sp>
+        <p:nvSpPr>
+          <p:cNvPr id="33" name="Rounded Rectangle 32"/>
+          <p:cNvSpPr/>
+          <p:nvPr/>
+        </p:nvSpPr>
+        <p:spPr>
+          <a:xfrm>
+            <a:off x="7589520" y="4700016"/>
+            <a:ext cx="3255264" cy="1133856"/>
+          </a:xfrm>
+          <a:prstGeom prst="roundRect">
+            <a:avLst/>
+          </a:prstGeom>
+          <a:solidFill>
+            <a:srgbClr val="FFFFFF"/>
+          </a:solidFill>
+          <a:ln w="10160">
+            <a:solidFill>
+              <a:srgbClr val="DDE3E8"/>
+            </a:solidFill>
+          </a:ln>
+        </p:spPr>
+        <p:style>
+          <a:lnRef idx="1">
+            <a:schemeClr val="accent1"/>
+          </a:lnRef>
+          <a:fillRef idx="3">
+            <a:schemeClr val="accent1"/>
+          </a:fillRef>
+          <a:effectRef idx="2">
+            <a:schemeClr val="accent1"/>
+          </a:effectRef>
+          <a:fontRef idx="minor">
+            <a:schemeClr val="lt1"/>
+          </a:fontRef>
+        </p:style>
+        <p:txBody>
+          <a:bodyPr rtlCol="0" anchor="ctr"/>
+          <a:lstStyle/>
+          <a:p>
+            <a:pPr algn="ctr"/>
+          </a:p>
+        </p:txBody>
+      </p:sp>
+      <p:sp>
+        <p:nvSpPr>
+          <p:cNvPr id="34" name="Rectangle 33"/>
+          <p:cNvSpPr/>
+          <p:nvPr/>
+        </p:nvSpPr>
+        <p:spPr>
+          <a:xfrm>
+            <a:off x="7589520" y="4700016"/>
+            <a:ext cx="64008" cy="1133856"/>
+          </a:xfrm>
+          <a:prstGeom prst="rect">
+            <a:avLst/>
+          </a:prstGeom>
+          <a:solidFill>
+            <a:srgbClr val="15805D"/>
+          </a:solidFill>
+          <a:ln w="10160">
+            <a:solidFill>
+              <a:srgbClr val="15805D"/>
+            </a:solidFill>
+          </a:ln>
+        </p:spPr>
+        <p:style>
+          <a:lnRef idx="1">
+            <a:schemeClr val="accent1"/>
+          </a:lnRef>
+          <a:fillRef idx="3">
+            <a:schemeClr val="accent1"/>
+          </a:fillRef>
+          <a:effectRef idx="2">
+            <a:schemeClr val="accent1"/>
+          </a:effectRef>
+          <a:fontRef idx="minor">
+            <a:schemeClr val="lt1"/>
+          </a:fontRef>
+        </p:style>
+        <p:txBody>
+          <a:bodyPr rtlCol="0" anchor="ctr"/>
+          <a:lstStyle/>
+          <a:p>
+            <a:pPr algn="ctr"/>
+          </a:p>
+        </p:txBody>
+      </p:sp>
+      <p:sp>
+        <p:nvSpPr>
+          <p:cNvPr id="35" name="TextBox 34"/>
+          <p:cNvSpPr txBox="1"/>
+          <p:nvPr/>
+        </p:nvSpPr>
+        <p:spPr>
+          <a:xfrm>
+            <a:off x="7790688" y="4928616"/>
+            <a:ext cx="2834640" cy="210312"/>
+          </a:xfrm>
+          <a:prstGeom prst="rect">
+            <a:avLst/>
+          </a:prstGeom>
+          <a:noFill/>
+        </p:spPr>
+        <p:txBody>
+          <a:bodyPr wrap="square" lIns="18288" rIns="18288" tIns="18288" bIns="18288" anchor="t">
+            <a:spAutoFit/>
+          </a:bodyPr>
+          <a:lstStyle/>
+          <a:p>
+            <a:pPr algn="ctr"/>
+            <a:r>
+              <a:rPr sz="1110" b="1">
+                <a:solidFill>
+                  <a:srgbClr val="172331"/>
+                </a:solidFill>
+                <a:latin typeface="Microsoft YaHei"/>
+              </a:rPr>
+              <a:t>C｜GT-full + 薄壳规划器</a:t>
+            </a:r>
+          </a:p>
+        </p:txBody>
+      </p:sp>
+      <p:sp>
+        <p:nvSpPr>
+          <p:cNvPr id="36" name="TextBox 35"/>
+          <p:cNvSpPr txBox="1"/>
+          <p:nvPr/>
+        </p:nvSpPr>
+        <p:spPr>
+          <a:xfrm>
+            <a:off x="7827264" y="5330952"/>
+            <a:ext cx="2761488" cy="356616"/>
+          </a:xfrm>
+          <a:prstGeom prst="rect">
+            <a:avLst/>
+          </a:prstGeom>
+          <a:noFill/>
+        </p:spPr>
+        <p:txBody>
+          <a:bodyPr wrap="square" lIns="18288" rIns="18288" tIns="18288" bIns="18288" anchor="t">
+            <a:spAutoFit/>
+          </a:bodyPr>
+          <a:lstStyle/>
+          <a:p>
+            <a:pPr algn="ctr"/>
+            <a:r>
+              <a:rPr sz="940" b="0">
+                <a:solidFill>
+                  <a:srgbClr val="667381"/>
+                </a:solidFill>
+                <a:latin typeface="Microsoft YaHei"/>
+              </a:rPr>
+              <a:t>表示与规划共同正确
+估计系统上界</a:t>
+            </a:r>
+          </a:p>
+        </p:txBody>
+      </p:sp>
+      <p:sp>
+        <p:nvSpPr>
+          <p:cNvPr id="37" name="TextBox 36"/>
+          <p:cNvSpPr txBox="1"/>
+          <p:nvPr/>
+        </p:nvSpPr>
+        <p:spPr>
+          <a:xfrm>
+            <a:off x="521207" y="6565392"/>
+            <a:ext cx="10881360" cy="137160"/>
+          </a:xfrm>
+          <a:prstGeom prst="rect">
+            <a:avLst/>
+          </a:prstGeom>
+          <a:noFill/>
+        </p:spPr>
+        <p:txBody>
+          <a:bodyPr wrap="square" lIns="18288" rIns="18288" tIns="18288" bIns="18288" anchor="t">
+            <a:spAutoFit/>
+          </a:bodyPr>
+          <a:lstStyle/>
+          <a:p>
+            <a:pPr algn="l"/>
+            <a:r>
+              <a:rPr sz="720" b="0">
+                <a:solidFill>
+                  <a:srgbClr val="667381"/>
+                </a:solidFill>
+                <a:latin typeface="Microsoft YaHei"/>
+              </a:rPr>
+              <a:t>对象、候选抓取、规划器参数和数据划分全部冻结；GT 只用于离线审计，不参与候选生成。</a:t>
             </a:r>
           </a:p>
         </p:txBody>
